--- a/topic05-persistence-xml-exceptions/unit-05a-lectures/talk-3-exceptions/c-exceptions.pptx
+++ b/topic05-persistence-xml-exceptions/unit-05a-lectures/talk-3-exceptions/c-exceptions.pptx
@@ -5,7 +5,7 @@
     <p:sldMasterId id="2147483648" r:id="rId1"/>
   </p:sldMasterIdLst>
   <p:notesMasterIdLst>
-    <p:notesMasterId r:id="rId35"/>
+    <p:notesMasterId r:id="rId27"/>
   </p:notesMasterIdLst>
   <p:sldIdLst>
     <p:sldId id="256" r:id="rId2"/>
@@ -27,25 +27,17 @@
     <p:sldId id="434" r:id="rId18"/>
     <p:sldId id="419" r:id="rId19"/>
     <p:sldId id="435" r:id="rId20"/>
-    <p:sldId id="431" r:id="rId21"/>
-    <p:sldId id="432" r:id="rId22"/>
-    <p:sldId id="433" r:id="rId23"/>
-    <p:sldId id="437" r:id="rId24"/>
-    <p:sldId id="438" r:id="rId25"/>
-    <p:sldId id="439" r:id="rId26"/>
-    <p:sldId id="440" r:id="rId27"/>
-    <p:sldId id="441" r:id="rId28"/>
-    <p:sldId id="443" r:id="rId29"/>
-    <p:sldId id="444" r:id="rId30"/>
-    <p:sldId id="446" r:id="rId31"/>
-    <p:sldId id="448" r:id="rId32"/>
-    <p:sldId id="418" r:id="rId33"/>
-    <p:sldId id="392" r:id="rId34"/>
+    <p:sldId id="443" r:id="rId21"/>
+    <p:sldId id="444" r:id="rId22"/>
+    <p:sldId id="446" r:id="rId23"/>
+    <p:sldId id="448" r:id="rId24"/>
+    <p:sldId id="418" r:id="rId25"/>
+    <p:sldId id="626" r:id="rId26"/>
   </p:sldIdLst>
   <p:sldSz cx="12192000" cy="6858000"/>
   <p:notesSz cx="6858000" cy="9144000"/>
   <p:custDataLst>
-    <p:tags r:id="rId36"/>
+    <p:tags r:id="rId28"/>
   </p:custDataLst>
   <p:defaultTextStyle>
     <a:defPPr>
@@ -243,7 +235,7 @@
           <a:p>
             <a:fld id="{56BC3C30-7F3D-4B20-9974-47C57B22CA6E}" type="datetimeFigureOut">
               <a:rPr lang="en-IE" smtClean="0"/>
-              <a:t>13/02/2024</a:t>
+              <a:t>10/02/2026</a:t>
             </a:fld>
             <a:endParaRPr lang="en-IE"/>
           </a:p>
@@ -654,95 +646,6 @@
 </p:notes>
 </file>
 
-<file path=ppt/notesSlides/notesSlide10.xml><?xml version="1.0" encoding="utf-8"?>
-<p:notes xmlns:a="http://schemas.openxmlformats.org/drawingml/2006/main" xmlns:r="http://schemas.openxmlformats.org/officeDocument/2006/relationships" xmlns:p="http://schemas.openxmlformats.org/presentationml/2006/main">
-  <p:cSld>
-    <p:spTree>
-      <p:nvGrpSpPr>
-        <p:cNvPr id="1" name=""/>
-        <p:cNvGrpSpPr/>
-        <p:nvPr/>
-      </p:nvGrpSpPr>
-      <p:grpSpPr>
-        <a:xfrm>
-          <a:off x="0" y="0"/>
-          <a:ext cx="0" cy="0"/>
-          <a:chOff x="0" y="0"/>
-          <a:chExt cx="0" cy="0"/>
-        </a:xfrm>
-      </p:grpSpPr>
-      <p:sp>
-        <p:nvSpPr>
-          <p:cNvPr id="2" name="Slide Image Placeholder 1"/>
-          <p:cNvSpPr>
-            <a:spLocks noGrp="1" noRot="1" noChangeAspect="1"/>
-          </p:cNvSpPr>
-          <p:nvPr>
-            <p:ph type="sldImg"/>
-          </p:nvPr>
-        </p:nvSpPr>
-        <p:spPr>
-          <a:xfrm>
-            <a:off x="381000" y="685800"/>
-            <a:ext cx="6096000" cy="3429000"/>
-          </a:xfrm>
-        </p:spPr>
-      </p:sp>
-      <p:sp>
-        <p:nvSpPr>
-          <p:cNvPr id="3" name="Notes Placeholder 2"/>
-          <p:cNvSpPr>
-            <a:spLocks noGrp="1"/>
-          </p:cNvSpPr>
-          <p:nvPr>
-            <p:ph type="body" idx="1"/>
-          </p:nvPr>
-        </p:nvSpPr>
-        <p:spPr/>
-        <p:txBody>
-          <a:bodyPr/>
-          <a:lstStyle/>
-          <a:p>
-            <a:endParaRPr lang="en-IE" dirty="0"/>
-          </a:p>
-        </p:txBody>
-      </p:sp>
-      <p:sp>
-        <p:nvSpPr>
-          <p:cNvPr id="4" name="Slide Number Placeholder 3"/>
-          <p:cNvSpPr>
-            <a:spLocks noGrp="1"/>
-          </p:cNvSpPr>
-          <p:nvPr>
-            <p:ph type="sldNum" sz="quarter" idx="10"/>
-          </p:nvPr>
-        </p:nvSpPr>
-        <p:spPr/>
-        <p:txBody>
-          <a:bodyPr/>
-          <a:lstStyle/>
-          <a:p>
-            <a:fld id="{F609BE90-ABBD-4931-8E0C-089E0ACACA6B}" type="slidenum">
-              <a:rPr lang="en-IE" smtClean="0"/>
-              <a:t>31</a:t>
-            </a:fld>
-            <a:endParaRPr lang="en-IE"/>
-          </a:p>
-        </p:txBody>
-      </p:sp>
-    </p:spTree>
-    <p:extLst>
-      <p:ext uri="{BB962C8B-B14F-4D97-AF65-F5344CB8AC3E}">
-        <p14:creationId xmlns:p14="http://schemas.microsoft.com/office/powerpoint/2010/main" val="4002362822"/>
-      </p:ext>
-    </p:extLst>
-  </p:cSld>
-  <p:clrMapOvr>
-    <a:masterClrMapping/>
-  </p:clrMapOvr>
-</p:notes>
-</file>
-
 <file path=ppt/notesSlides/notesSlide2.xml><?xml version="1.0" encoding="utf-8"?>
 <p:notes xmlns:a="http://schemas.openxmlformats.org/drawingml/2006/main" xmlns:r="http://schemas.openxmlformats.org/officeDocument/2006/relationships" xmlns:p="http://schemas.openxmlformats.org/presentationml/2006/main">
   <p:cSld>
@@ -1446,7 +1349,7 @@
           <a:p>
             <a:fld id="{F609BE90-ABBD-4931-8E0C-089E0ACACA6B}" type="slidenum">
               <a:rPr lang="en-IE" smtClean="0"/>
-              <a:t>25</a:t>
+              <a:t>21</a:t>
             </a:fld>
             <a:endParaRPr lang="en-IE"/>
           </a:p>
@@ -1455,7 +1358,7 @@
     </p:spTree>
     <p:extLst>
       <p:ext uri="{BB962C8B-B14F-4D97-AF65-F5344CB8AC3E}">
-        <p14:creationId xmlns:p14="http://schemas.microsoft.com/office/powerpoint/2010/main" val="1692345230"/>
+        <p14:creationId xmlns:p14="http://schemas.microsoft.com/office/powerpoint/2010/main" val="775524679"/>
       </p:ext>
     </p:extLst>
   </p:cSld>
@@ -1492,7 +1395,12 @@
             <p:ph type="sldImg"/>
           </p:nvPr>
         </p:nvSpPr>
-        <p:spPr/>
+        <p:spPr>
+          <a:xfrm>
+            <a:off x="381000" y="685800"/>
+            <a:ext cx="6096000" cy="3429000"/>
+          </a:xfrm>
+        </p:spPr>
       </p:sp>
       <p:sp>
         <p:nvSpPr>
@@ -1509,7 +1417,7 @@
           <a:bodyPr/>
           <a:lstStyle/>
           <a:p>
-            <a:endParaRPr lang="en-VI" dirty="0"/>
+            <a:endParaRPr lang="en-IE" dirty="0"/>
           </a:p>
         </p:txBody>
       </p:sp>
@@ -1520,7 +1428,7 @@
             <a:spLocks noGrp="1"/>
           </p:cNvSpPr>
           <p:nvPr>
-            <p:ph type="sldNum" sz="quarter" idx="5"/>
+            <p:ph type="sldNum" sz="quarter" idx="10"/>
           </p:nvPr>
         </p:nvSpPr>
         <p:spPr/>
@@ -1530,7 +1438,7 @@
           <a:p>
             <a:fld id="{F609BE90-ABBD-4931-8E0C-089E0ACACA6B}" type="slidenum">
               <a:rPr lang="en-IE" smtClean="0"/>
-              <a:t>29</a:t>
+              <a:t>22</a:t>
             </a:fld>
             <a:endParaRPr lang="en-IE"/>
           </a:p>
@@ -1539,7 +1447,7 @@
     </p:spTree>
     <p:extLst>
       <p:ext uri="{BB962C8B-B14F-4D97-AF65-F5344CB8AC3E}">
-        <p14:creationId xmlns:p14="http://schemas.microsoft.com/office/powerpoint/2010/main" val="775524679"/>
+        <p14:creationId xmlns:p14="http://schemas.microsoft.com/office/powerpoint/2010/main" val="349844240"/>
       </p:ext>
     </p:extLst>
   </p:cSld>
@@ -1619,7 +1527,7 @@
           <a:p>
             <a:fld id="{F609BE90-ABBD-4931-8E0C-089E0ACACA6B}" type="slidenum">
               <a:rPr lang="en-IE" smtClean="0"/>
-              <a:t>30</a:t>
+              <a:t>23</a:t>
             </a:fld>
             <a:endParaRPr lang="en-IE"/>
           </a:p>
@@ -1628,7 +1536,7 @@
     </p:spTree>
     <p:extLst>
       <p:ext uri="{BB962C8B-B14F-4D97-AF65-F5344CB8AC3E}">
-        <p14:creationId xmlns:p14="http://schemas.microsoft.com/office/powerpoint/2010/main" val="349844240"/>
+        <p14:creationId xmlns:p14="http://schemas.microsoft.com/office/powerpoint/2010/main" val="4002362822"/>
       </p:ext>
     </p:extLst>
   </p:cSld>
@@ -1818,7 +1726,7 @@
             <a:fld id="{1D8BD707-D9CF-40AE-B4C6-C98DA3205C09}" type="datetimeFigureOut">
               <a:rPr lang="en-US" smtClean="0"/>
               <a:pPr/>
-              <a:t>2/13/2024</a:t>
+              <a:t>2/10/2026</a:t>
             </a:fld>
             <a:endParaRPr lang="en-US"/>
           </a:p>
@@ -1983,7 +1891,7 @@
             <a:fld id="{1D8BD707-D9CF-40AE-B4C6-C98DA3205C09}" type="datetimeFigureOut">
               <a:rPr lang="en-US" smtClean="0"/>
               <a:pPr/>
-              <a:t>2/13/2024</a:t>
+              <a:t>2/10/2026</a:t>
             </a:fld>
             <a:endParaRPr lang="en-US"/>
           </a:p>
@@ -2158,7 +2066,7 @@
             <a:fld id="{1D8BD707-D9CF-40AE-B4C6-C98DA3205C09}" type="datetimeFigureOut">
               <a:rPr lang="en-US" smtClean="0"/>
               <a:pPr/>
-              <a:t>2/13/2024</a:t>
+              <a:t>2/10/2026</a:t>
             </a:fld>
             <a:endParaRPr lang="en-US"/>
           </a:p>
@@ -2334,7 +2242,7 @@
             <a:fld id="{1D8BD707-D9CF-40AE-B4C6-C98DA3205C09}" type="datetimeFigureOut">
               <a:rPr lang="en-US" smtClean="0"/>
               <a:pPr/>
-              <a:t>2/13/2024</a:t>
+              <a:t>2/10/2026</a:t>
             </a:fld>
             <a:endParaRPr lang="en-US"/>
           </a:p>
@@ -2614,7 +2522,7 @@
             <a:fld id="{1D8BD707-D9CF-40AE-B4C6-C98DA3205C09}" type="datetimeFigureOut">
               <a:rPr lang="en-US" smtClean="0"/>
               <a:pPr/>
-              <a:t>2/13/2024</a:t>
+              <a:t>2/10/2026</a:t>
             </a:fld>
             <a:endParaRPr lang="en-US"/>
           </a:p>
@@ -2907,7 +2815,7 @@
             <a:fld id="{1D8BD707-D9CF-40AE-B4C6-C98DA3205C09}" type="datetimeFigureOut">
               <a:rPr lang="en-US" smtClean="0"/>
               <a:pPr/>
-              <a:t>2/13/2024</a:t>
+              <a:t>2/10/2026</a:t>
             </a:fld>
             <a:endParaRPr lang="en-US"/>
           </a:p>
@@ -3365,7 +3273,7 @@
             <a:fld id="{1D8BD707-D9CF-40AE-B4C6-C98DA3205C09}" type="datetimeFigureOut">
               <a:rPr lang="en-US" smtClean="0"/>
               <a:pPr/>
-              <a:t>2/13/2024</a:t>
+              <a:t>2/10/2026</a:t>
             </a:fld>
             <a:endParaRPr lang="en-US"/>
           </a:p>
@@ -3525,7 +3433,7 @@
             <a:fld id="{1D8BD707-D9CF-40AE-B4C6-C98DA3205C09}" type="datetimeFigureOut">
               <a:rPr lang="en-US" smtClean="0"/>
               <a:pPr/>
-              <a:t>2/13/2024</a:t>
+              <a:t>2/10/2026</a:t>
             </a:fld>
             <a:endParaRPr lang="en-US"/>
           </a:p>
@@ -3652,7 +3560,7 @@
             <a:fld id="{1D8BD707-D9CF-40AE-B4C6-C98DA3205C09}" type="datetimeFigureOut">
               <a:rPr lang="en-US" smtClean="0"/>
               <a:pPr/>
-              <a:t>2/13/2024</a:t>
+              <a:t>2/10/2026</a:t>
             </a:fld>
             <a:endParaRPr lang="en-US"/>
           </a:p>
@@ -3924,7 +3832,7 @@
             <a:fld id="{1D8BD707-D9CF-40AE-B4C6-C98DA3205C09}" type="datetimeFigureOut">
               <a:rPr lang="en-US" smtClean="0"/>
               <a:pPr/>
-              <a:t>2/13/2024</a:t>
+              <a:t>2/10/2026</a:t>
             </a:fld>
             <a:endParaRPr lang="en-US"/>
           </a:p>
@@ -4173,7 +4081,7 @@
             <a:fld id="{1D8BD707-D9CF-40AE-B4C6-C98DA3205C09}" type="datetimeFigureOut">
               <a:rPr lang="en-US" smtClean="0"/>
               <a:pPr/>
-              <a:t>2/13/2024</a:t>
+              <a:t>2/10/2026</a:t>
             </a:fld>
             <a:endParaRPr lang="en-US"/>
           </a:p>
@@ -4381,7 +4289,7 @@
             <a:fld id="{1D8BD707-D9CF-40AE-B4C6-C98DA3205C09}" type="datetimeFigureOut">
               <a:rPr lang="en-US" smtClean="0"/>
               <a:pPr/>
-              <a:t>2/13/2024</a:t>
+              <a:t>2/10/2026</a:t>
             </a:fld>
             <a:endParaRPr lang="en-US"/>
           </a:p>
@@ -5128,10 +5036,12 @@
                   </a:schemeClr>
                 </a:solidFill>
               </a:rPr>
-              <a:t> </a:t>
-            </a:r>
-            <a:r>
-              <a:rPr lang="en-IE" sz="2400" dirty="0" smtClean="0">
+              <a:t> Meagher</a:t>
+            </a:r>
+          </a:p>
+          <a:p>
+            <a:r>
+              <a:rPr lang="en-IE" sz="2400" dirty="0">
                 <a:solidFill>
                   <a:schemeClr val="tx1">
                     <a:lumMod val="75000"/>
@@ -5139,29 +5049,8 @@
                   </a:schemeClr>
                 </a:solidFill>
               </a:rPr>
-              <a:t>Meagher</a:t>
-            </a:r>
-          </a:p>
-          <a:p>
-            <a:r>
-              <a:rPr lang="en-IE" sz="2400" dirty="0" smtClean="0">
-                <a:solidFill>
-                  <a:schemeClr val="tx1">
-                    <a:lumMod val="75000"/>
-                    <a:lumOff val="25000"/>
-                  </a:schemeClr>
-                </a:solidFill>
-              </a:rPr>
               <a:t>Ms Siobhan Roche</a:t>
             </a:r>
-            <a:endParaRPr lang="en-IE" sz="2400" dirty="0">
-              <a:solidFill>
-                <a:schemeClr val="tx1">
-                  <a:lumMod val="75000"/>
-                  <a:lumOff val="25000"/>
-                </a:schemeClr>
-              </a:solidFill>
-            </a:endParaRPr>
           </a:p>
         </p:txBody>
       </p:sp>
@@ -6130,10 +6019,6 @@
             <a:br>
               <a:rPr lang="en-IE" sz="3400" b="1" dirty="0"/>
             </a:br>
-            <a:r>
-              <a:rPr lang="en-IE" sz="3400" b="1" dirty="0"/>
-              <a:t/>
-            </a:r>
             <a:br>
               <a:rPr lang="en-IE" sz="3400" b="1" dirty="0"/>
             </a:br>
@@ -7357,16 +7242,12 @@
           <a:lstStyle/>
           <a:p>
             <a:r>
-              <a:rPr lang="en-GB" dirty="0"/>
-              <a:t>Lab03: </a:t>
-            </a:r>
-            <a:r>
               <a:rPr lang="en-GB" dirty="0" err="1"/>
               <a:t>ScannerInput</a:t>
             </a:r>
             <a:r>
               <a:rPr lang="en-GB" dirty="0"/>
-              <a:t> Class is Introduced</a:t>
+              <a:t> Class - try/catch example</a:t>
             </a:r>
             <a:endParaRPr lang="en-VI" dirty="0"/>
           </a:p>
@@ -8049,16 +7930,12 @@
           <a:lstStyle/>
           <a:p>
             <a:r>
-              <a:rPr lang="en-GB" dirty="0"/>
-              <a:t>Lab03: </a:t>
-            </a:r>
-            <a:r>
               <a:rPr lang="en-GB" dirty="0" err="1"/>
               <a:t>ScannerInput</a:t>
             </a:r>
             <a:r>
               <a:rPr lang="en-GB" dirty="0"/>
-              <a:t> Class is Introduced</a:t>
+              <a:t> Class - try/catch example</a:t>
             </a:r>
             <a:endParaRPr lang="en-VI" dirty="0"/>
           </a:p>
@@ -8331,16 +8208,12 @@
           <a:lstStyle/>
           <a:p>
             <a:r>
-              <a:rPr lang="en-GB" dirty="0"/>
-              <a:t>Lab03: </a:t>
-            </a:r>
-            <a:r>
               <a:rPr lang="en-GB" dirty="0" err="1"/>
               <a:t>ScannerInput</a:t>
             </a:r>
             <a:r>
               <a:rPr lang="en-GB" dirty="0"/>
-              <a:t> Class is Introduced</a:t>
+              <a:t> Class - try/catch example</a:t>
             </a:r>
             <a:endParaRPr lang="en-VI" dirty="0"/>
           </a:p>
@@ -8827,1549 +8700,6 @@
 <file path=ppt/slides/slide20.xml><?xml version="1.0" encoding="utf-8"?>
 <p:sld xmlns:a="http://schemas.openxmlformats.org/drawingml/2006/main" xmlns:r="http://schemas.openxmlformats.org/officeDocument/2006/relationships" xmlns:p="http://schemas.openxmlformats.org/presentationml/2006/main">
   <p:cSld>
-    <p:spTree>
-      <p:nvGrpSpPr>
-        <p:cNvPr id="1" name=""/>
-        <p:cNvGrpSpPr/>
-        <p:nvPr/>
-      </p:nvGrpSpPr>
-      <p:grpSpPr>
-        <a:xfrm>
-          <a:off x="0" y="0"/>
-          <a:ext cx="0" cy="0"/>
-          <a:chOff x="0" y="0"/>
-          <a:chExt cx="0" cy="0"/>
-        </a:xfrm>
-      </p:grpSpPr>
-      <p:sp>
-        <p:nvSpPr>
-          <p:cNvPr id="2" name="Title 1">
-            <a:extLst>
-              <a:ext uri="{FF2B5EF4-FFF2-40B4-BE49-F238E27FC236}">
-                <a16:creationId xmlns:a16="http://schemas.microsoft.com/office/drawing/2014/main" id="{6F1EB3BC-371E-4329-8FEF-E01B9346B487}"/>
-              </a:ext>
-            </a:extLst>
-          </p:cNvPr>
-          <p:cNvSpPr>
-            <a:spLocks noGrp="1"/>
-          </p:cNvSpPr>
-          <p:nvPr>
-            <p:ph type="title"/>
-          </p:nvPr>
-        </p:nvSpPr>
-        <p:spPr>
-          <a:xfrm>
-            <a:off x="609600" y="274638"/>
-            <a:ext cx="10972800" cy="1143000"/>
-          </a:xfrm>
-        </p:spPr>
-        <p:txBody>
-          <a:bodyPr>
-            <a:normAutofit/>
-          </a:bodyPr>
-          <a:lstStyle/>
-          <a:p>
-            <a:r>
-              <a:rPr lang="en-GB" dirty="0"/>
-              <a:t>Lab03: </a:t>
-            </a:r>
-            <a:r>
-              <a:rPr lang="en-GB" dirty="0" err="1"/>
-              <a:t>ScannerInput</a:t>
-            </a:r>
-            <a:r>
-              <a:rPr lang="en-GB" dirty="0"/>
-              <a:t> Class is Introduced</a:t>
-            </a:r>
-            <a:endParaRPr lang="en-VI" dirty="0"/>
-          </a:p>
-        </p:txBody>
-      </p:sp>
-      <p:pic>
-        <p:nvPicPr>
-          <p:cNvPr id="5" name="Picture 4">
-            <a:extLst>
-              <a:ext uri="{FF2B5EF4-FFF2-40B4-BE49-F238E27FC236}">
-                <a16:creationId xmlns:a16="http://schemas.microsoft.com/office/drawing/2014/main" id="{D6CF5AE8-B8DF-4C97-A273-EAEBEDC437A0}"/>
-              </a:ext>
-            </a:extLst>
-          </p:cNvPr>
-          <p:cNvPicPr>
-            <a:picLocks noChangeAspect="1"/>
-          </p:cNvPicPr>
-          <p:nvPr/>
-        </p:nvPicPr>
-        <p:blipFill>
-          <a:blip r:embed="rId2"/>
-          <a:stretch>
-            <a:fillRect/>
-          </a:stretch>
-        </p:blipFill>
-        <p:spPr>
-          <a:xfrm>
-            <a:off x="457200" y="1676400"/>
-            <a:ext cx="3513665" cy="1524000"/>
-          </a:xfrm>
-          <a:prstGeom prst="rect">
-            <a:avLst/>
-          </a:prstGeom>
-          <a:ln>
-            <a:noFill/>
-          </a:ln>
-          <a:effectLst>
-            <a:outerShdw blurRad="292100" dist="139700" dir="2700000" algn="tl" rotWithShape="0">
-              <a:srgbClr val="333333">
-                <a:alpha val="65000"/>
-              </a:srgbClr>
-            </a:outerShdw>
-          </a:effectLst>
-        </p:spPr>
-      </p:pic>
-      <p:sp>
-        <p:nvSpPr>
-          <p:cNvPr id="12" name="TextBox 11">
-            <a:extLst>
-              <a:ext uri="{FF2B5EF4-FFF2-40B4-BE49-F238E27FC236}">
-                <a16:creationId xmlns:a16="http://schemas.microsoft.com/office/drawing/2014/main" id="{652E5CD2-81FD-4FDD-8C04-7FD702BFC861}"/>
-              </a:ext>
-            </a:extLst>
-          </p:cNvPr>
-          <p:cNvSpPr txBox="1"/>
-          <p:nvPr/>
-        </p:nvSpPr>
-        <p:spPr>
-          <a:xfrm>
-            <a:off x="4199465" y="1783012"/>
-            <a:ext cx="7010400" cy="1631216"/>
-          </a:xfrm>
-          <a:prstGeom prst="rect">
-            <a:avLst/>
-          </a:prstGeom>
-          <a:noFill/>
-        </p:spPr>
-        <p:txBody>
-          <a:bodyPr wrap="square">
-            <a:spAutoFit/>
-          </a:bodyPr>
-          <a:lstStyle/>
-          <a:p>
-            <a:pPr eaLnBrk="0" fontAlgn="base" hangingPunct="0">
-              <a:spcBef>
-                <a:spcPct val="0"/>
-              </a:spcBef>
-              <a:spcAft>
-                <a:spcPct val="0"/>
-              </a:spcAft>
-            </a:pPr>
-            <a:r>
-              <a:rPr kumimoji="0" lang="en-VI" altLang="en-VI" sz="2000" b="1" i="0" u="none" strike="noStrike" cap="none" normalizeH="0" baseline="0" dirty="0" err="1">
-                <a:ln>
-                  <a:noFill/>
-                </a:ln>
-                <a:solidFill>
-                  <a:srgbClr val="1F2937"/>
-                </a:solidFill>
-                <a:effectLst/>
-              </a:rPr>
-              <a:t>readNextDouble</a:t>
-            </a:r>
-            <a:r>
-              <a:rPr lang="en-GB" altLang="en-VI" sz="2000" dirty="0">
-                <a:solidFill>
-                  <a:srgbClr val="1F2937"/>
-                </a:solidFill>
-              </a:rPr>
-              <a:t>:</a:t>
-            </a:r>
-            <a:endParaRPr kumimoji="0" lang="en-GB" altLang="en-VI" sz="2000" b="0" i="0" u="none" strike="noStrike" cap="none" normalizeH="0" baseline="0" dirty="0">
-              <a:ln>
-                <a:noFill/>
-              </a:ln>
-              <a:solidFill>
-                <a:srgbClr val="1F2937"/>
-              </a:solidFill>
-              <a:effectLst/>
-            </a:endParaRPr>
-          </a:p>
-          <a:p>
-            <a:pPr eaLnBrk="0" fontAlgn="base" hangingPunct="0">
-              <a:spcBef>
-                <a:spcPct val="0"/>
-              </a:spcBef>
-              <a:spcAft>
-                <a:spcPct val="0"/>
-              </a:spcAft>
-            </a:pPr>
-            <a:endParaRPr lang="en-GB" altLang="en-VI" sz="2000" dirty="0">
-              <a:solidFill>
-                <a:srgbClr val="1F2937"/>
-              </a:solidFill>
-            </a:endParaRPr>
-          </a:p>
-          <a:p>
-            <a:pPr eaLnBrk="0" fontAlgn="base" hangingPunct="0">
-              <a:spcBef>
-                <a:spcPct val="0"/>
-              </a:spcBef>
-              <a:spcAft>
-                <a:spcPct val="0"/>
-              </a:spcAft>
-            </a:pPr>
-            <a:r>
-              <a:rPr kumimoji="0" lang="en-GB" altLang="en-VI" sz="2000" b="0" i="0" u="none" strike="noStrike" cap="none" normalizeH="0" baseline="0" dirty="0">
-                <a:ln>
-                  <a:noFill/>
-                </a:ln>
-                <a:solidFill>
-                  <a:srgbClr val="1F2937"/>
-                </a:solidFill>
-                <a:effectLst/>
-              </a:rPr>
-              <a:t>T</a:t>
-            </a:r>
-            <a:r>
-              <a:rPr kumimoji="0" lang="en-VI" altLang="en-VI" sz="2000" b="0" i="0" u="none" strike="noStrike" cap="none" normalizeH="0" baseline="0" dirty="0">
-                <a:ln>
-                  <a:noFill/>
-                </a:ln>
-                <a:solidFill>
-                  <a:srgbClr val="1F2937"/>
-                </a:solidFill>
-                <a:effectLst/>
-              </a:rPr>
-              <a:t>his method behaves the same as the </a:t>
-            </a:r>
-            <a:r>
-              <a:rPr kumimoji="0" lang="en-VI" altLang="en-VI" sz="2000" b="1" i="0" u="none" strike="noStrike" cap="none" normalizeH="0" baseline="0" dirty="0">
-                <a:ln>
-                  <a:noFill/>
-                </a:ln>
-                <a:solidFill>
-                  <a:srgbClr val="00B050"/>
-                </a:solidFill>
-                <a:effectLst/>
-              </a:rPr>
-              <a:t>int</a:t>
-            </a:r>
-            <a:r>
-              <a:rPr kumimoji="0" lang="en-VI" altLang="en-VI" sz="2000" b="0" i="0" u="none" strike="noStrike" cap="none" normalizeH="0" baseline="0" dirty="0">
-                <a:ln>
-                  <a:noFill/>
-                </a:ln>
-                <a:solidFill>
-                  <a:srgbClr val="1F2937"/>
-                </a:solidFill>
-                <a:effectLst/>
-              </a:rPr>
-              <a:t> one above, except that it is validating for a </a:t>
-            </a:r>
-            <a:r>
-              <a:rPr kumimoji="0" lang="en-VI" altLang="en-VI" sz="2000" b="1" i="0" u="none" strike="noStrike" cap="none" normalizeH="0" baseline="0" dirty="0">
-                <a:ln>
-                  <a:noFill/>
-                </a:ln>
-                <a:solidFill>
-                  <a:srgbClr val="00B050"/>
-                </a:solidFill>
-                <a:effectLst/>
-              </a:rPr>
-              <a:t>double</a:t>
-            </a:r>
-            <a:r>
-              <a:rPr kumimoji="0" lang="en-VI" altLang="en-VI" sz="2000" b="0" i="0" u="none" strike="noStrike" cap="none" normalizeH="0" baseline="0" dirty="0">
-                <a:ln>
-                  <a:noFill/>
-                </a:ln>
-                <a:solidFill>
-                  <a:srgbClr val="1F2937"/>
-                </a:solidFill>
-                <a:effectLst/>
-              </a:rPr>
-              <a:t> value.</a:t>
-            </a:r>
-          </a:p>
-          <a:p>
-            <a:pPr marL="0" marR="0" lvl="0" indent="0" algn="l" defTabSz="914400" rtl="0" eaLnBrk="0" fontAlgn="base" latinLnBrk="0" hangingPunct="0">
-              <a:lnSpc>
-                <a:spcPct val="100000"/>
-              </a:lnSpc>
-              <a:spcBef>
-                <a:spcPct val="0"/>
-              </a:spcBef>
-              <a:spcAft>
-                <a:spcPct val="0"/>
-              </a:spcAft>
-              <a:buClrTx/>
-              <a:buSzTx/>
-              <a:tabLst/>
-            </a:pPr>
-            <a:endParaRPr kumimoji="0" lang="en-GB" altLang="en-VI" sz="2000" b="1" i="0" u="none" strike="noStrike" cap="none" normalizeH="0" baseline="0" dirty="0">
-              <a:ln>
-                <a:noFill/>
-              </a:ln>
-              <a:solidFill>
-                <a:srgbClr val="1F2937"/>
-              </a:solidFill>
-              <a:effectLst/>
-            </a:endParaRPr>
-          </a:p>
-        </p:txBody>
-      </p:sp>
-      <p:sp>
-        <p:nvSpPr>
-          <p:cNvPr id="11" name="Rectangle: Rounded Corners 10">
-            <a:extLst>
-              <a:ext uri="{FF2B5EF4-FFF2-40B4-BE49-F238E27FC236}">
-                <a16:creationId xmlns:a16="http://schemas.microsoft.com/office/drawing/2014/main" id="{234E1E0E-ADCD-4532-9583-018116FF1B14}"/>
-              </a:ext>
-            </a:extLst>
-          </p:cNvPr>
-          <p:cNvSpPr/>
-          <p:nvPr/>
-        </p:nvSpPr>
-        <p:spPr>
-          <a:xfrm>
-            <a:off x="685800" y="2209800"/>
-            <a:ext cx="3048000" cy="304800"/>
-          </a:xfrm>
-          <a:prstGeom prst="roundRect">
-            <a:avLst/>
-          </a:prstGeom>
-          <a:noFill/>
-          <a:ln>
-            <a:solidFill>
-              <a:srgbClr val="C00000"/>
-            </a:solidFill>
-          </a:ln>
-        </p:spPr>
-        <p:style>
-          <a:lnRef idx="2">
-            <a:schemeClr val="accent1">
-              <a:shade val="50000"/>
-            </a:schemeClr>
-          </a:lnRef>
-          <a:fillRef idx="1">
-            <a:schemeClr val="accent1"/>
-          </a:fillRef>
-          <a:effectRef idx="0">
-            <a:schemeClr val="accent1"/>
-          </a:effectRef>
-          <a:fontRef idx="minor">
-            <a:schemeClr val="lt1"/>
-          </a:fontRef>
-        </p:style>
-        <p:txBody>
-          <a:bodyPr rtlCol="0" anchor="ctr"/>
-          <a:lstStyle/>
-          <a:p>
-            <a:pPr algn="ctr"/>
-            <a:endParaRPr lang="en-VI"/>
-          </a:p>
-        </p:txBody>
-      </p:sp>
-      <p:pic>
-        <p:nvPicPr>
-          <p:cNvPr id="6" name="Picture 5">
-            <a:extLst>
-              <a:ext uri="{FF2B5EF4-FFF2-40B4-BE49-F238E27FC236}">
-                <a16:creationId xmlns:a16="http://schemas.microsoft.com/office/drawing/2014/main" id="{FDF0A98D-02DE-433E-ABE6-B33D8A25D2A4}"/>
-              </a:ext>
-            </a:extLst>
-          </p:cNvPr>
-          <p:cNvPicPr>
-            <a:picLocks noChangeAspect="1"/>
-          </p:cNvPicPr>
-          <p:nvPr/>
-        </p:nvPicPr>
-        <p:blipFill>
-          <a:blip r:embed="rId3"/>
-          <a:stretch>
-            <a:fillRect/>
-          </a:stretch>
-        </p:blipFill>
-        <p:spPr>
-          <a:xfrm>
-            <a:off x="4419600" y="3128446"/>
-            <a:ext cx="6295571" cy="3446955"/>
-          </a:xfrm>
-          <a:prstGeom prst="rect">
-            <a:avLst/>
-          </a:prstGeom>
-          <a:ln>
-            <a:noFill/>
-          </a:ln>
-          <a:effectLst>
-            <a:outerShdw blurRad="292100" dist="139700" dir="2700000" algn="tl" rotWithShape="0">
-              <a:srgbClr val="333333">
-                <a:alpha val="65000"/>
-              </a:srgbClr>
-            </a:outerShdw>
-          </a:effectLst>
-        </p:spPr>
-      </p:pic>
-    </p:spTree>
-    <p:extLst>
-      <p:ext uri="{BB962C8B-B14F-4D97-AF65-F5344CB8AC3E}">
-        <p14:creationId xmlns:p14="http://schemas.microsoft.com/office/powerpoint/2010/main" val="3340198902"/>
-      </p:ext>
-    </p:extLst>
-  </p:cSld>
-  <p:clrMapOvr>
-    <a:masterClrMapping/>
-  </p:clrMapOvr>
-</p:sld>
-</file>
-
-<file path=ppt/slides/slide21.xml><?xml version="1.0" encoding="utf-8"?>
-<p:sld xmlns:a="http://schemas.openxmlformats.org/drawingml/2006/main" xmlns:r="http://schemas.openxmlformats.org/officeDocument/2006/relationships" xmlns:p="http://schemas.openxmlformats.org/presentationml/2006/main">
-  <p:cSld>
-    <p:spTree>
-      <p:nvGrpSpPr>
-        <p:cNvPr id="1" name=""/>
-        <p:cNvGrpSpPr/>
-        <p:nvPr/>
-      </p:nvGrpSpPr>
-      <p:grpSpPr>
-        <a:xfrm>
-          <a:off x="0" y="0"/>
-          <a:ext cx="0" cy="0"/>
-          <a:chOff x="0" y="0"/>
-          <a:chExt cx="0" cy="0"/>
-        </a:xfrm>
-      </p:grpSpPr>
-      <p:sp>
-        <p:nvSpPr>
-          <p:cNvPr id="2" name="Title 1">
-            <a:extLst>
-              <a:ext uri="{FF2B5EF4-FFF2-40B4-BE49-F238E27FC236}">
-                <a16:creationId xmlns:a16="http://schemas.microsoft.com/office/drawing/2014/main" id="{6F1EB3BC-371E-4329-8FEF-E01B9346B487}"/>
-              </a:ext>
-            </a:extLst>
-          </p:cNvPr>
-          <p:cNvSpPr>
-            <a:spLocks noGrp="1"/>
-          </p:cNvSpPr>
-          <p:nvPr>
-            <p:ph type="title"/>
-          </p:nvPr>
-        </p:nvSpPr>
-        <p:spPr>
-          <a:xfrm>
-            <a:off x="609600" y="274638"/>
-            <a:ext cx="10972800" cy="1143000"/>
-          </a:xfrm>
-        </p:spPr>
-        <p:txBody>
-          <a:bodyPr>
-            <a:normAutofit/>
-          </a:bodyPr>
-          <a:lstStyle/>
-          <a:p>
-            <a:r>
-              <a:rPr lang="en-GB" dirty="0"/>
-              <a:t>Lab03: </a:t>
-            </a:r>
-            <a:r>
-              <a:rPr lang="en-GB" dirty="0" err="1"/>
-              <a:t>ScannerInput</a:t>
-            </a:r>
-            <a:r>
-              <a:rPr lang="en-GB" dirty="0"/>
-              <a:t> Class is Introduced</a:t>
-            </a:r>
-            <a:endParaRPr lang="en-VI" dirty="0"/>
-          </a:p>
-        </p:txBody>
-      </p:sp>
-      <p:pic>
-        <p:nvPicPr>
-          <p:cNvPr id="5" name="Picture 4">
-            <a:extLst>
-              <a:ext uri="{FF2B5EF4-FFF2-40B4-BE49-F238E27FC236}">
-                <a16:creationId xmlns:a16="http://schemas.microsoft.com/office/drawing/2014/main" id="{D6CF5AE8-B8DF-4C97-A273-EAEBEDC437A0}"/>
-              </a:ext>
-            </a:extLst>
-          </p:cNvPr>
-          <p:cNvPicPr>
-            <a:picLocks noChangeAspect="1"/>
-          </p:cNvPicPr>
-          <p:nvPr/>
-        </p:nvPicPr>
-        <p:blipFill>
-          <a:blip r:embed="rId2"/>
-          <a:stretch>
-            <a:fillRect/>
-          </a:stretch>
-        </p:blipFill>
-        <p:spPr>
-          <a:xfrm>
-            <a:off x="457200" y="1676400"/>
-            <a:ext cx="3513665" cy="1524000"/>
-          </a:xfrm>
-          <a:prstGeom prst="rect">
-            <a:avLst/>
-          </a:prstGeom>
-          <a:ln>
-            <a:noFill/>
-          </a:ln>
-          <a:effectLst>
-            <a:outerShdw blurRad="292100" dist="139700" dir="2700000" algn="tl" rotWithShape="0">
-              <a:srgbClr val="333333">
-                <a:alpha val="65000"/>
-              </a:srgbClr>
-            </a:outerShdw>
-          </a:effectLst>
-        </p:spPr>
-      </p:pic>
-      <p:sp>
-        <p:nvSpPr>
-          <p:cNvPr id="12" name="TextBox 11">
-            <a:extLst>
-              <a:ext uri="{FF2B5EF4-FFF2-40B4-BE49-F238E27FC236}">
-                <a16:creationId xmlns:a16="http://schemas.microsoft.com/office/drawing/2014/main" id="{652E5CD2-81FD-4FDD-8C04-7FD702BFC861}"/>
-              </a:ext>
-            </a:extLst>
-          </p:cNvPr>
-          <p:cNvSpPr txBox="1"/>
-          <p:nvPr/>
-        </p:nvSpPr>
-        <p:spPr>
-          <a:xfrm>
-            <a:off x="4199465" y="1783012"/>
-            <a:ext cx="7010400" cy="2554545"/>
-          </a:xfrm>
-          <a:prstGeom prst="rect">
-            <a:avLst/>
-          </a:prstGeom>
-          <a:noFill/>
-        </p:spPr>
-        <p:txBody>
-          <a:bodyPr wrap="square">
-            <a:spAutoFit/>
-          </a:bodyPr>
-          <a:lstStyle/>
-          <a:p>
-            <a:pPr marL="0" marR="0" lvl="0" indent="0" algn="l" defTabSz="914400" rtl="0" eaLnBrk="0" fontAlgn="base" latinLnBrk="0" hangingPunct="0">
-              <a:lnSpc>
-                <a:spcPct val="100000"/>
-              </a:lnSpc>
-              <a:spcBef>
-                <a:spcPct val="0"/>
-              </a:spcBef>
-              <a:spcAft>
-                <a:spcPct val="0"/>
-              </a:spcAft>
-              <a:buClrTx/>
-              <a:buSzTx/>
-              <a:tabLst/>
-            </a:pPr>
-            <a:r>
-              <a:rPr kumimoji="0" lang="en-VI" altLang="en-VI" sz="2000" b="1" i="0" u="none" strike="noStrike" cap="none" normalizeH="0" baseline="0" dirty="0" err="1">
-                <a:ln>
-                  <a:noFill/>
-                </a:ln>
-                <a:solidFill>
-                  <a:srgbClr val="1F2937"/>
-                </a:solidFill>
-                <a:effectLst/>
-              </a:rPr>
-              <a:t>readNextLine</a:t>
-            </a:r>
-            <a:r>
-              <a:rPr kumimoji="0" lang="en-GB" altLang="en-VI" sz="2000" b="1" i="0" u="none" strike="noStrike" cap="none" normalizeH="0" baseline="0" dirty="0">
-                <a:ln>
-                  <a:noFill/>
-                </a:ln>
-                <a:solidFill>
-                  <a:srgbClr val="1F2937"/>
-                </a:solidFill>
-                <a:effectLst/>
-              </a:rPr>
-              <a:t>:</a:t>
-            </a:r>
-          </a:p>
-          <a:p>
-            <a:pPr marL="0" marR="0" lvl="0" indent="0" algn="l" defTabSz="914400" rtl="0" eaLnBrk="0" fontAlgn="base" latinLnBrk="0" hangingPunct="0">
-              <a:lnSpc>
-                <a:spcPct val="100000"/>
-              </a:lnSpc>
-              <a:spcBef>
-                <a:spcPct val="0"/>
-              </a:spcBef>
-              <a:spcAft>
-                <a:spcPct val="0"/>
-              </a:spcAft>
-              <a:buClrTx/>
-              <a:buSzTx/>
-              <a:tabLst/>
-            </a:pPr>
-            <a:endParaRPr lang="en-GB" altLang="en-VI" sz="2000" b="1" dirty="0">
-              <a:solidFill>
-                <a:srgbClr val="1F2937"/>
-              </a:solidFill>
-            </a:endParaRPr>
-          </a:p>
-          <a:p>
-            <a:pPr marL="342900" marR="0" lvl="0" indent="-342900" algn="l" defTabSz="914400" rtl="0" eaLnBrk="0" fontAlgn="base" latinLnBrk="0" hangingPunct="0">
-              <a:lnSpc>
-                <a:spcPct val="100000"/>
-              </a:lnSpc>
-              <a:spcBef>
-                <a:spcPct val="0"/>
-              </a:spcBef>
-              <a:spcAft>
-                <a:spcPct val="0"/>
-              </a:spcAft>
-              <a:buClrTx/>
-              <a:buSzTx/>
-              <a:buFont typeface="Arial" panose="020B0604020202020204" pitchFamily="34" charset="0"/>
-              <a:buChar char="•"/>
-              <a:tabLst/>
-            </a:pPr>
-            <a:r>
-              <a:rPr kumimoji="0" lang="en-GB" altLang="en-VI" sz="2000" i="0" u="none" strike="noStrike" cap="none" normalizeH="0" baseline="0" dirty="0">
-                <a:ln>
-                  <a:noFill/>
-                </a:ln>
-                <a:solidFill>
-                  <a:srgbClr val="1F2937"/>
-                </a:solidFill>
-                <a:effectLst/>
-              </a:rPr>
-              <a:t>T</a:t>
-            </a:r>
-            <a:r>
-              <a:rPr kumimoji="0" lang="en-VI" altLang="en-VI" sz="2000" b="0" i="0" u="none" strike="noStrike" cap="none" normalizeH="0" baseline="0" dirty="0">
-                <a:ln>
-                  <a:noFill/>
-                </a:ln>
-                <a:solidFill>
-                  <a:srgbClr val="1F2937"/>
-                </a:solidFill>
-                <a:effectLst/>
-              </a:rPr>
-              <a:t>his method takes in a String </a:t>
-            </a:r>
-            <a:r>
-              <a:rPr kumimoji="0" lang="en-VI" altLang="en-VI" sz="2000" b="0" i="0" u="none" strike="noStrike" cap="none" normalizeH="0" baseline="0" dirty="0">
-                <a:ln>
-                  <a:noFill/>
-                </a:ln>
-                <a:solidFill>
-                  <a:srgbClr val="C00000"/>
-                </a:solidFill>
-                <a:effectLst/>
-              </a:rPr>
-              <a:t>prompt</a:t>
-            </a:r>
-            <a:r>
-              <a:rPr kumimoji="0" lang="en-VI" altLang="en-VI" sz="2000" b="0" i="0" u="none" strike="noStrike" cap="none" normalizeH="0" baseline="0" dirty="0">
-                <a:ln>
-                  <a:noFill/>
-                </a:ln>
-                <a:solidFill>
-                  <a:srgbClr val="1F2937"/>
-                </a:solidFill>
-                <a:effectLst/>
-              </a:rPr>
-              <a:t> and prints it to the console. </a:t>
-            </a:r>
-            <a:endParaRPr kumimoji="0" lang="en-GB" altLang="en-VI" sz="2000" b="0" i="0" u="none" strike="noStrike" cap="none" normalizeH="0" baseline="0" dirty="0">
-              <a:ln>
-                <a:noFill/>
-              </a:ln>
-              <a:solidFill>
-                <a:srgbClr val="1F2937"/>
-              </a:solidFill>
-              <a:effectLst/>
-            </a:endParaRPr>
-          </a:p>
-          <a:p>
-            <a:pPr marL="342900" marR="0" lvl="0" indent="-342900" algn="l" defTabSz="914400" rtl="0" eaLnBrk="0" fontAlgn="base" latinLnBrk="0" hangingPunct="0">
-              <a:lnSpc>
-                <a:spcPct val="100000"/>
-              </a:lnSpc>
-              <a:spcBef>
-                <a:spcPct val="0"/>
-              </a:spcBef>
-              <a:spcAft>
-                <a:spcPct val="0"/>
-              </a:spcAft>
-              <a:buClrTx/>
-              <a:buSzTx/>
-              <a:buFont typeface="Arial" panose="020B0604020202020204" pitchFamily="34" charset="0"/>
-              <a:buChar char="•"/>
-              <a:tabLst/>
-            </a:pPr>
-            <a:r>
-              <a:rPr kumimoji="0" lang="en-VI" altLang="en-VI" sz="2000" b="0" i="0" u="none" strike="noStrike" cap="none" normalizeH="0" baseline="0" dirty="0">
-                <a:ln>
-                  <a:noFill/>
-                </a:ln>
-                <a:solidFill>
-                  <a:srgbClr val="1F2937"/>
-                </a:solidFill>
-                <a:effectLst/>
-              </a:rPr>
-              <a:t>The full user input is then read using the</a:t>
-            </a:r>
-            <a:r>
-              <a:rPr lang="en-GB" altLang="en-VI" sz="2000" dirty="0">
-                <a:solidFill>
-                  <a:srgbClr val="1F2937"/>
-                </a:solidFill>
-              </a:rPr>
-              <a:t> </a:t>
-            </a:r>
-            <a:r>
-              <a:rPr kumimoji="0" lang="en-VI" altLang="en-VI" sz="2000" b="0" i="0" u="none" strike="noStrike" cap="none" normalizeH="0" baseline="0" dirty="0">
-                <a:ln>
-                  <a:noFill/>
-                </a:ln>
-                <a:solidFill>
-                  <a:srgbClr val="1F2937"/>
-                </a:solidFill>
-                <a:effectLst/>
-              </a:rPr>
-              <a:t>Scanner </a:t>
-            </a:r>
-            <a:r>
-              <a:rPr kumimoji="0" lang="en-VI" altLang="en-VI" sz="2000" b="1" i="0" u="none" strike="noStrike" cap="none" normalizeH="0" baseline="0" dirty="0" err="1">
-                <a:ln>
-                  <a:noFill/>
-                </a:ln>
-                <a:solidFill>
-                  <a:srgbClr val="1F2937"/>
-                </a:solidFill>
-                <a:effectLst/>
-              </a:rPr>
-              <a:t>nextLine</a:t>
-            </a:r>
-            <a:r>
-              <a:rPr kumimoji="0" lang="en-GB" altLang="en-VI" sz="2000" b="1" i="0" u="none" strike="noStrike" cap="none" normalizeH="0" baseline="0" dirty="0">
-                <a:ln>
-                  <a:noFill/>
-                </a:ln>
-                <a:solidFill>
-                  <a:srgbClr val="1F2937"/>
-                </a:solidFill>
-                <a:effectLst/>
-              </a:rPr>
-              <a:t>()</a:t>
-            </a:r>
-            <a:r>
-              <a:rPr kumimoji="0" lang="en-VI" altLang="en-VI" sz="2000" b="0" i="0" u="none" strike="noStrike" cap="none" normalizeH="0" baseline="0" dirty="0">
-                <a:ln>
-                  <a:noFill/>
-                </a:ln>
-                <a:solidFill>
-                  <a:srgbClr val="1F2937"/>
-                </a:solidFill>
-                <a:effectLst/>
-              </a:rPr>
-              <a:t> method. </a:t>
-            </a:r>
-            <a:endParaRPr kumimoji="0" lang="en-GB" altLang="en-VI" sz="2000" b="0" i="0" u="none" strike="noStrike" cap="none" normalizeH="0" baseline="0" dirty="0">
-              <a:ln>
-                <a:noFill/>
-              </a:ln>
-              <a:solidFill>
-                <a:srgbClr val="1F2937"/>
-              </a:solidFill>
-              <a:effectLst/>
-            </a:endParaRPr>
-          </a:p>
-          <a:p>
-            <a:pPr marL="342900" marR="0" lvl="0" indent="-342900" algn="l" defTabSz="914400" rtl="0" eaLnBrk="0" fontAlgn="base" latinLnBrk="0" hangingPunct="0">
-              <a:lnSpc>
-                <a:spcPct val="100000"/>
-              </a:lnSpc>
-              <a:spcBef>
-                <a:spcPct val="0"/>
-              </a:spcBef>
-              <a:spcAft>
-                <a:spcPct val="0"/>
-              </a:spcAft>
-              <a:buClrTx/>
-              <a:buSzTx/>
-              <a:buFont typeface="Arial" panose="020B0604020202020204" pitchFamily="34" charset="0"/>
-              <a:buChar char="•"/>
-              <a:tabLst/>
-            </a:pPr>
-            <a:r>
-              <a:rPr kumimoji="0" lang="en-VI" altLang="en-VI" sz="2000" b="0" i="0" u="none" strike="noStrike" cap="none" normalizeH="0" baseline="0" dirty="0">
-                <a:ln>
-                  <a:noFill/>
-                </a:ln>
-                <a:solidFill>
-                  <a:srgbClr val="1F2937"/>
-                </a:solidFill>
-                <a:effectLst/>
-              </a:rPr>
-              <a:t>The </a:t>
-            </a:r>
-            <a:r>
-              <a:rPr kumimoji="0" lang="en-GB" altLang="en-VI" sz="2000" b="1" i="0" u="none" strike="noStrike" cap="none" normalizeH="0" baseline="0" dirty="0">
-                <a:ln>
-                  <a:noFill/>
-                </a:ln>
-                <a:solidFill>
-                  <a:srgbClr val="00B050"/>
-                </a:solidFill>
-                <a:effectLst/>
-              </a:rPr>
-              <a:t>String</a:t>
-            </a:r>
-            <a:r>
-              <a:rPr kumimoji="0" lang="en-GB" altLang="en-VI" sz="2000" b="0" i="0" u="none" strike="noStrike" cap="none" normalizeH="0" baseline="0" dirty="0">
-                <a:ln>
-                  <a:noFill/>
-                </a:ln>
-                <a:solidFill>
-                  <a:srgbClr val="1F2937"/>
-                </a:solidFill>
-                <a:effectLst/>
-              </a:rPr>
-              <a:t> </a:t>
-            </a:r>
-            <a:r>
-              <a:rPr kumimoji="0" lang="en-VI" altLang="en-VI" sz="2000" b="0" i="0" u="none" strike="noStrike" cap="none" normalizeH="0" baseline="0" dirty="0">
-                <a:ln>
-                  <a:noFill/>
-                </a:ln>
-                <a:solidFill>
-                  <a:srgbClr val="1F2937"/>
-                </a:solidFill>
-                <a:effectLst/>
-              </a:rPr>
-              <a:t>value is returned with no validation.</a:t>
-            </a:r>
-          </a:p>
-          <a:p>
-            <a:pPr marL="0" marR="0" lvl="0" indent="0" algn="l" defTabSz="914400" rtl="0" eaLnBrk="0" fontAlgn="base" latinLnBrk="0" hangingPunct="0">
-              <a:lnSpc>
-                <a:spcPct val="100000"/>
-              </a:lnSpc>
-              <a:spcBef>
-                <a:spcPct val="0"/>
-              </a:spcBef>
-              <a:spcAft>
-                <a:spcPct val="0"/>
-              </a:spcAft>
-              <a:buClrTx/>
-              <a:buSzTx/>
-              <a:tabLst/>
-            </a:pPr>
-            <a:endParaRPr kumimoji="0" lang="en-GB" altLang="en-VI" sz="2000" b="1" i="0" u="none" strike="noStrike" cap="none" normalizeH="0" baseline="0" dirty="0">
-              <a:ln>
-                <a:noFill/>
-              </a:ln>
-              <a:solidFill>
-                <a:srgbClr val="1F2937"/>
-              </a:solidFill>
-              <a:effectLst/>
-            </a:endParaRPr>
-          </a:p>
-        </p:txBody>
-      </p:sp>
-      <p:sp>
-        <p:nvSpPr>
-          <p:cNvPr id="11" name="Rectangle: Rounded Corners 10">
-            <a:extLst>
-              <a:ext uri="{FF2B5EF4-FFF2-40B4-BE49-F238E27FC236}">
-                <a16:creationId xmlns:a16="http://schemas.microsoft.com/office/drawing/2014/main" id="{234E1E0E-ADCD-4532-9583-018116FF1B14}"/>
-              </a:ext>
-            </a:extLst>
-          </p:cNvPr>
-          <p:cNvSpPr/>
-          <p:nvPr/>
-        </p:nvSpPr>
-        <p:spPr>
-          <a:xfrm>
-            <a:off x="685800" y="2514600"/>
-            <a:ext cx="2667000" cy="304800"/>
-          </a:xfrm>
-          <a:prstGeom prst="roundRect">
-            <a:avLst/>
-          </a:prstGeom>
-          <a:noFill/>
-          <a:ln>
-            <a:solidFill>
-              <a:srgbClr val="C00000"/>
-            </a:solidFill>
-          </a:ln>
-        </p:spPr>
-        <p:style>
-          <a:lnRef idx="2">
-            <a:schemeClr val="accent1">
-              <a:shade val="50000"/>
-            </a:schemeClr>
-          </a:lnRef>
-          <a:fillRef idx="1">
-            <a:schemeClr val="accent1"/>
-          </a:fillRef>
-          <a:effectRef idx="0">
-            <a:schemeClr val="accent1"/>
-          </a:effectRef>
-          <a:fontRef idx="minor">
-            <a:schemeClr val="lt1"/>
-          </a:fontRef>
-        </p:style>
-        <p:txBody>
-          <a:bodyPr rtlCol="0" anchor="ctr"/>
-          <a:lstStyle/>
-          <a:p>
-            <a:pPr algn="ctr"/>
-            <a:endParaRPr lang="en-VI"/>
-          </a:p>
-        </p:txBody>
-      </p:sp>
-      <p:pic>
-        <p:nvPicPr>
-          <p:cNvPr id="6" name="Picture 5">
-            <a:extLst>
-              <a:ext uri="{FF2B5EF4-FFF2-40B4-BE49-F238E27FC236}">
-                <a16:creationId xmlns:a16="http://schemas.microsoft.com/office/drawing/2014/main" id="{7E7C09F9-740D-4742-8E52-A77AE0974AD1}"/>
-              </a:ext>
-            </a:extLst>
-          </p:cNvPr>
-          <p:cNvPicPr>
-            <a:picLocks noChangeAspect="1"/>
-          </p:cNvPicPr>
-          <p:nvPr/>
-        </p:nvPicPr>
-        <p:blipFill>
-          <a:blip r:embed="rId3"/>
-          <a:stretch>
-            <a:fillRect/>
-          </a:stretch>
-        </p:blipFill>
-        <p:spPr>
-          <a:xfrm>
-            <a:off x="4219937" y="4495800"/>
-            <a:ext cx="6172488" cy="1600275"/>
-          </a:xfrm>
-          <a:prstGeom prst="rect">
-            <a:avLst/>
-          </a:prstGeom>
-          <a:ln>
-            <a:noFill/>
-          </a:ln>
-          <a:effectLst>
-            <a:outerShdw blurRad="292100" dist="139700" dir="2700000" algn="tl" rotWithShape="0">
-              <a:srgbClr val="333333">
-                <a:alpha val="65000"/>
-              </a:srgbClr>
-            </a:outerShdw>
-          </a:effectLst>
-        </p:spPr>
-      </p:pic>
-    </p:spTree>
-    <p:extLst>
-      <p:ext uri="{BB962C8B-B14F-4D97-AF65-F5344CB8AC3E}">
-        <p14:creationId xmlns:p14="http://schemas.microsoft.com/office/powerpoint/2010/main" val="4153431899"/>
-      </p:ext>
-    </p:extLst>
-  </p:cSld>
-  <p:clrMapOvr>
-    <a:masterClrMapping/>
-  </p:clrMapOvr>
-</p:sld>
-</file>
-
-<file path=ppt/slides/slide22.xml><?xml version="1.0" encoding="utf-8"?>
-<p:sld xmlns:a="http://schemas.openxmlformats.org/drawingml/2006/main" xmlns:r="http://schemas.openxmlformats.org/officeDocument/2006/relationships" xmlns:p="http://schemas.openxmlformats.org/presentationml/2006/main">
-  <p:cSld>
-    <p:spTree>
-      <p:nvGrpSpPr>
-        <p:cNvPr id="1" name=""/>
-        <p:cNvGrpSpPr/>
-        <p:nvPr/>
-      </p:nvGrpSpPr>
-      <p:grpSpPr>
-        <a:xfrm>
-          <a:off x="0" y="0"/>
-          <a:ext cx="0" cy="0"/>
-          <a:chOff x="0" y="0"/>
-          <a:chExt cx="0" cy="0"/>
-        </a:xfrm>
-      </p:grpSpPr>
-      <p:sp>
-        <p:nvSpPr>
-          <p:cNvPr id="2" name="Title 1">
-            <a:extLst>
-              <a:ext uri="{FF2B5EF4-FFF2-40B4-BE49-F238E27FC236}">
-                <a16:creationId xmlns:a16="http://schemas.microsoft.com/office/drawing/2014/main" id="{6F1EB3BC-371E-4329-8FEF-E01B9346B487}"/>
-              </a:ext>
-            </a:extLst>
-          </p:cNvPr>
-          <p:cNvSpPr>
-            <a:spLocks noGrp="1"/>
-          </p:cNvSpPr>
-          <p:nvPr>
-            <p:ph type="title"/>
-          </p:nvPr>
-        </p:nvSpPr>
-        <p:spPr>
-          <a:xfrm>
-            <a:off x="609600" y="274638"/>
-            <a:ext cx="10972800" cy="1143000"/>
-          </a:xfrm>
-        </p:spPr>
-        <p:txBody>
-          <a:bodyPr>
-            <a:normAutofit/>
-          </a:bodyPr>
-          <a:lstStyle/>
-          <a:p>
-            <a:r>
-              <a:rPr lang="en-GB" dirty="0"/>
-              <a:t>Lab03: </a:t>
-            </a:r>
-            <a:r>
-              <a:rPr lang="en-GB" dirty="0" err="1"/>
-              <a:t>ScannerInput</a:t>
-            </a:r>
-            <a:r>
-              <a:rPr lang="en-GB" dirty="0"/>
-              <a:t> Class is Introduced</a:t>
-            </a:r>
-            <a:endParaRPr lang="en-VI" dirty="0"/>
-          </a:p>
-        </p:txBody>
-      </p:sp>
-      <p:pic>
-        <p:nvPicPr>
-          <p:cNvPr id="5" name="Picture 4">
-            <a:extLst>
-              <a:ext uri="{FF2B5EF4-FFF2-40B4-BE49-F238E27FC236}">
-                <a16:creationId xmlns:a16="http://schemas.microsoft.com/office/drawing/2014/main" id="{D6CF5AE8-B8DF-4C97-A273-EAEBEDC437A0}"/>
-              </a:ext>
-            </a:extLst>
-          </p:cNvPr>
-          <p:cNvPicPr>
-            <a:picLocks noChangeAspect="1"/>
-          </p:cNvPicPr>
-          <p:nvPr/>
-        </p:nvPicPr>
-        <p:blipFill>
-          <a:blip r:embed="rId2"/>
-          <a:stretch>
-            <a:fillRect/>
-          </a:stretch>
-        </p:blipFill>
-        <p:spPr>
-          <a:xfrm>
-            <a:off x="457200" y="1676400"/>
-            <a:ext cx="3513665" cy="1524000"/>
-          </a:xfrm>
-          <a:prstGeom prst="rect">
-            <a:avLst/>
-          </a:prstGeom>
-          <a:ln>
-            <a:noFill/>
-          </a:ln>
-          <a:effectLst>
-            <a:outerShdw blurRad="292100" dist="139700" dir="2700000" algn="tl" rotWithShape="0">
-              <a:srgbClr val="333333">
-                <a:alpha val="65000"/>
-              </a:srgbClr>
-            </a:outerShdw>
-          </a:effectLst>
-        </p:spPr>
-      </p:pic>
-      <p:sp>
-        <p:nvSpPr>
-          <p:cNvPr id="12" name="TextBox 11">
-            <a:extLst>
-              <a:ext uri="{FF2B5EF4-FFF2-40B4-BE49-F238E27FC236}">
-                <a16:creationId xmlns:a16="http://schemas.microsoft.com/office/drawing/2014/main" id="{652E5CD2-81FD-4FDD-8C04-7FD702BFC861}"/>
-              </a:ext>
-            </a:extLst>
-          </p:cNvPr>
-          <p:cNvSpPr txBox="1"/>
-          <p:nvPr/>
-        </p:nvSpPr>
-        <p:spPr>
-          <a:xfrm>
-            <a:off x="4199465" y="1783012"/>
-            <a:ext cx="7010400" cy="2554545"/>
-          </a:xfrm>
-          <a:prstGeom prst="rect">
-            <a:avLst/>
-          </a:prstGeom>
-          <a:noFill/>
-        </p:spPr>
-        <p:txBody>
-          <a:bodyPr wrap="square">
-            <a:spAutoFit/>
-          </a:bodyPr>
-          <a:lstStyle/>
-          <a:p>
-            <a:pPr marL="0" marR="0" lvl="0" indent="0" algn="l" defTabSz="914400" rtl="0" eaLnBrk="0" fontAlgn="base" latinLnBrk="0" hangingPunct="0">
-              <a:lnSpc>
-                <a:spcPct val="100000"/>
-              </a:lnSpc>
-              <a:spcBef>
-                <a:spcPct val="0"/>
-              </a:spcBef>
-              <a:spcAft>
-                <a:spcPct val="0"/>
-              </a:spcAft>
-              <a:buClrTx/>
-              <a:buSzTx/>
-              <a:tabLst/>
-            </a:pPr>
-            <a:r>
-              <a:rPr kumimoji="0" lang="en-VI" altLang="en-VI" sz="2000" b="1" i="0" u="none" strike="noStrike" cap="none" normalizeH="0" baseline="0" dirty="0" err="1">
-                <a:ln>
-                  <a:noFill/>
-                </a:ln>
-                <a:solidFill>
-                  <a:srgbClr val="1F2937"/>
-                </a:solidFill>
-                <a:effectLst/>
-              </a:rPr>
-              <a:t>readNextChar</a:t>
-            </a:r>
-            <a:r>
-              <a:rPr kumimoji="0" lang="en-GB" altLang="en-VI" sz="2000" b="1" i="0" u="none" strike="noStrike" cap="none" normalizeH="0" baseline="0" dirty="0">
-                <a:ln>
-                  <a:noFill/>
-                </a:ln>
-                <a:solidFill>
-                  <a:srgbClr val="1F2937"/>
-                </a:solidFill>
-                <a:effectLst/>
-              </a:rPr>
-              <a:t>:</a:t>
-            </a:r>
-            <a:endParaRPr lang="en-GB" altLang="en-VI" sz="2000" dirty="0">
-              <a:solidFill>
-                <a:srgbClr val="1F2937"/>
-              </a:solidFill>
-            </a:endParaRPr>
-          </a:p>
-          <a:p>
-            <a:pPr marL="0" marR="0" lvl="0" indent="0" algn="l" defTabSz="914400" rtl="0" eaLnBrk="0" fontAlgn="base" latinLnBrk="0" hangingPunct="0">
-              <a:lnSpc>
-                <a:spcPct val="100000"/>
-              </a:lnSpc>
-              <a:spcBef>
-                <a:spcPct val="0"/>
-              </a:spcBef>
-              <a:spcAft>
-                <a:spcPct val="0"/>
-              </a:spcAft>
-              <a:buClrTx/>
-              <a:buSzTx/>
-              <a:tabLst/>
-            </a:pPr>
-            <a:endParaRPr kumimoji="0" lang="en-GB" altLang="en-VI" sz="2000" b="0" i="0" u="none" strike="noStrike" cap="none" normalizeH="0" baseline="0" dirty="0">
-              <a:ln>
-                <a:noFill/>
-              </a:ln>
-              <a:solidFill>
-                <a:srgbClr val="1F2937"/>
-              </a:solidFill>
-              <a:effectLst/>
-            </a:endParaRPr>
-          </a:p>
-          <a:p>
-            <a:pPr marL="342900" marR="0" lvl="0" indent="-342900" algn="l" defTabSz="914400" rtl="0" eaLnBrk="0" fontAlgn="base" latinLnBrk="0" hangingPunct="0">
-              <a:lnSpc>
-                <a:spcPct val="100000"/>
-              </a:lnSpc>
-              <a:spcBef>
-                <a:spcPct val="0"/>
-              </a:spcBef>
-              <a:spcAft>
-                <a:spcPct val="0"/>
-              </a:spcAft>
-              <a:buClrTx/>
-              <a:buSzTx/>
-              <a:buFont typeface="Arial" panose="020B0604020202020204" pitchFamily="34" charset="0"/>
-              <a:buChar char="•"/>
-              <a:tabLst/>
-            </a:pPr>
-            <a:r>
-              <a:rPr lang="en-GB" altLang="en-VI" sz="2000" dirty="0">
-                <a:solidFill>
-                  <a:srgbClr val="1F2937"/>
-                </a:solidFill>
-              </a:rPr>
-              <a:t>T</a:t>
-            </a:r>
-            <a:r>
-              <a:rPr kumimoji="0" lang="en-VI" altLang="en-VI" sz="2000" b="0" i="0" u="none" strike="noStrike" cap="none" normalizeH="0" baseline="0" dirty="0">
-                <a:ln>
-                  <a:noFill/>
-                </a:ln>
-                <a:solidFill>
-                  <a:srgbClr val="1F2937"/>
-                </a:solidFill>
-                <a:effectLst/>
-              </a:rPr>
-              <a:t>his method takes in a String </a:t>
-            </a:r>
-            <a:r>
-              <a:rPr kumimoji="0" lang="en-VI" altLang="en-VI" sz="2000" b="0" i="0" u="none" strike="noStrike" cap="none" normalizeH="0" baseline="0" dirty="0">
-                <a:ln>
-                  <a:noFill/>
-                </a:ln>
-                <a:solidFill>
-                  <a:srgbClr val="C00000"/>
-                </a:solidFill>
-                <a:effectLst/>
-              </a:rPr>
-              <a:t>prompt</a:t>
-            </a:r>
-            <a:r>
-              <a:rPr kumimoji="0" lang="en-VI" altLang="en-VI" sz="2000" b="0" i="0" u="none" strike="noStrike" cap="none" normalizeH="0" baseline="0" dirty="0">
-                <a:ln>
-                  <a:noFill/>
-                </a:ln>
-                <a:solidFill>
-                  <a:srgbClr val="1F2937"/>
-                </a:solidFill>
-                <a:effectLst/>
-              </a:rPr>
-              <a:t> and prints it to the console. </a:t>
-            </a:r>
-            <a:endParaRPr kumimoji="0" lang="en-GB" altLang="en-VI" sz="2000" b="0" i="0" u="none" strike="noStrike" cap="none" normalizeH="0" baseline="0" dirty="0">
-              <a:ln>
-                <a:noFill/>
-              </a:ln>
-              <a:solidFill>
-                <a:srgbClr val="1F2937"/>
-              </a:solidFill>
-              <a:effectLst/>
-            </a:endParaRPr>
-          </a:p>
-          <a:p>
-            <a:pPr marL="342900" marR="0" lvl="0" indent="-342900" algn="l" defTabSz="914400" rtl="0" eaLnBrk="0" fontAlgn="base" latinLnBrk="0" hangingPunct="0">
-              <a:lnSpc>
-                <a:spcPct val="100000"/>
-              </a:lnSpc>
-              <a:spcBef>
-                <a:spcPct val="0"/>
-              </a:spcBef>
-              <a:spcAft>
-                <a:spcPct val="0"/>
-              </a:spcAft>
-              <a:buClrTx/>
-              <a:buSzTx/>
-              <a:buFont typeface="Arial" panose="020B0604020202020204" pitchFamily="34" charset="0"/>
-              <a:buChar char="•"/>
-              <a:tabLst/>
-            </a:pPr>
-            <a:r>
-              <a:rPr kumimoji="0" lang="en-VI" altLang="en-VI" sz="2000" b="0" i="0" u="none" strike="noStrike" cap="none" normalizeH="0" baseline="0" dirty="0">
-                <a:ln>
-                  <a:noFill/>
-                </a:ln>
-                <a:solidFill>
-                  <a:srgbClr val="1F2937"/>
-                </a:solidFill>
-                <a:effectLst/>
-              </a:rPr>
-              <a:t>The first </a:t>
-            </a:r>
-            <a:r>
-              <a:rPr kumimoji="0" lang="en-VI" altLang="en-VI" sz="2000" b="1" i="0" u="none" strike="noStrike" cap="none" normalizeH="0" baseline="0" dirty="0">
-                <a:ln>
-                  <a:noFill/>
-                </a:ln>
-                <a:solidFill>
-                  <a:srgbClr val="00B050"/>
-                </a:solidFill>
-                <a:effectLst/>
-              </a:rPr>
-              <a:t>char</a:t>
-            </a:r>
-            <a:r>
-              <a:rPr kumimoji="0" lang="en-VI" altLang="en-VI" sz="2000" b="0" i="0" u="none" strike="noStrike" cap="none" normalizeH="0" baseline="0" dirty="0">
-                <a:ln>
-                  <a:noFill/>
-                </a:ln>
-                <a:solidFill>
-                  <a:srgbClr val="1F2937"/>
-                </a:solidFill>
-                <a:effectLst/>
-              </a:rPr>
-              <a:t> the user entered is then read using the Scanner</a:t>
-            </a:r>
-            <a:r>
-              <a:rPr kumimoji="0" lang="en-VI" altLang="en-VI" sz="2000" b="0" i="0" u="none" strike="noStrike" cap="none" normalizeH="0" baseline="0" dirty="0">
-                <a:ln>
-                  <a:noFill/>
-                </a:ln>
-                <a:solidFill>
-                  <a:srgbClr val="00B050"/>
-                </a:solidFill>
-                <a:effectLst/>
-              </a:rPr>
-              <a:t> </a:t>
-            </a:r>
-            <a:r>
-              <a:rPr kumimoji="0" lang="en-VI" altLang="en-VI" sz="2000" b="1" i="0" u="none" strike="noStrike" cap="none" normalizeH="0" baseline="0" dirty="0">
-                <a:ln>
-                  <a:noFill/>
-                </a:ln>
-                <a:solidFill>
-                  <a:srgbClr val="00B050"/>
-                </a:solidFill>
-                <a:effectLst/>
-              </a:rPr>
-              <a:t>next().</a:t>
-            </a:r>
-            <a:r>
-              <a:rPr kumimoji="0" lang="en-VI" altLang="en-VI" sz="2000" b="1" i="0" u="none" strike="noStrike" cap="none" normalizeH="0" baseline="0" dirty="0" err="1">
-                <a:ln>
-                  <a:noFill/>
-                </a:ln>
-                <a:solidFill>
-                  <a:srgbClr val="00B050"/>
-                </a:solidFill>
-                <a:effectLst/>
-              </a:rPr>
-              <a:t>charAt</a:t>
-            </a:r>
-            <a:r>
-              <a:rPr kumimoji="0" lang="en-VI" altLang="en-VI" sz="2000" b="1" i="0" u="none" strike="noStrike" cap="none" normalizeH="0" baseline="0" dirty="0">
-                <a:ln>
-                  <a:noFill/>
-                </a:ln>
-                <a:solidFill>
-                  <a:srgbClr val="00B050"/>
-                </a:solidFill>
-                <a:effectLst/>
-              </a:rPr>
-              <a:t>(0)</a:t>
-            </a:r>
-            <a:r>
-              <a:rPr kumimoji="0" lang="en-VI" altLang="en-VI" sz="2000" b="0" i="0" u="none" strike="noStrike" cap="none" normalizeH="0" baseline="0" dirty="0">
-                <a:ln>
-                  <a:noFill/>
-                </a:ln>
-                <a:solidFill>
-                  <a:srgbClr val="00B050"/>
-                </a:solidFill>
-                <a:effectLst/>
-              </a:rPr>
-              <a:t> </a:t>
-            </a:r>
-            <a:r>
-              <a:rPr kumimoji="0" lang="en-VI" altLang="en-VI" sz="2000" b="0" i="0" u="none" strike="noStrike" cap="none" normalizeH="0" baseline="0" dirty="0">
-                <a:ln>
-                  <a:noFill/>
-                </a:ln>
-                <a:solidFill>
-                  <a:srgbClr val="1F2937"/>
-                </a:solidFill>
-                <a:effectLst/>
-              </a:rPr>
-              <a:t>method. </a:t>
-            </a:r>
-            <a:endParaRPr kumimoji="0" lang="en-GB" altLang="en-VI" sz="2000" b="0" i="0" u="none" strike="noStrike" cap="none" normalizeH="0" baseline="0" dirty="0">
-              <a:ln>
-                <a:noFill/>
-              </a:ln>
-              <a:solidFill>
-                <a:srgbClr val="1F2937"/>
-              </a:solidFill>
-              <a:effectLst/>
-            </a:endParaRPr>
-          </a:p>
-          <a:p>
-            <a:pPr marL="342900" marR="0" lvl="0" indent="-342900" algn="l" defTabSz="914400" rtl="0" eaLnBrk="0" fontAlgn="base" latinLnBrk="0" hangingPunct="0">
-              <a:lnSpc>
-                <a:spcPct val="100000"/>
-              </a:lnSpc>
-              <a:spcBef>
-                <a:spcPct val="0"/>
-              </a:spcBef>
-              <a:spcAft>
-                <a:spcPct val="0"/>
-              </a:spcAft>
-              <a:buClrTx/>
-              <a:buSzTx/>
-              <a:buFont typeface="Arial" panose="020B0604020202020204" pitchFamily="34" charset="0"/>
-              <a:buChar char="•"/>
-              <a:tabLst/>
-            </a:pPr>
-            <a:r>
-              <a:rPr kumimoji="0" lang="en-VI" altLang="en-VI" sz="2000" b="0" i="0" u="none" strike="noStrike" cap="none" normalizeH="0" baseline="0" dirty="0">
-                <a:ln>
-                  <a:noFill/>
-                </a:ln>
-                <a:solidFill>
-                  <a:srgbClr val="1F2937"/>
-                </a:solidFill>
-                <a:effectLst/>
-              </a:rPr>
-              <a:t>The </a:t>
-            </a:r>
-            <a:r>
-              <a:rPr kumimoji="0" lang="en-VI" altLang="en-VI" sz="2000" b="1" i="0" u="none" strike="noStrike" cap="none" normalizeH="0" baseline="0" dirty="0">
-                <a:ln>
-                  <a:noFill/>
-                </a:ln>
-                <a:solidFill>
-                  <a:srgbClr val="00B050"/>
-                </a:solidFill>
-                <a:effectLst/>
-              </a:rPr>
-              <a:t>char</a:t>
-            </a:r>
-            <a:r>
-              <a:rPr kumimoji="0" lang="en-VI" altLang="en-VI" sz="2000" b="0" i="0" u="none" strike="noStrike" cap="none" normalizeH="0" baseline="0" dirty="0">
-                <a:ln>
-                  <a:noFill/>
-                </a:ln>
-                <a:solidFill>
-                  <a:srgbClr val="1F2937"/>
-                </a:solidFill>
-                <a:effectLst/>
-              </a:rPr>
-              <a:t> is returned with no validation.</a:t>
-            </a:r>
-          </a:p>
-          <a:p>
-            <a:pPr marL="0" marR="0" lvl="0" indent="0" algn="l" defTabSz="914400" rtl="0" eaLnBrk="0" fontAlgn="base" latinLnBrk="0" hangingPunct="0">
-              <a:lnSpc>
-                <a:spcPct val="100000"/>
-              </a:lnSpc>
-              <a:spcBef>
-                <a:spcPct val="0"/>
-              </a:spcBef>
-              <a:spcAft>
-                <a:spcPct val="0"/>
-              </a:spcAft>
-              <a:buClrTx/>
-              <a:buSzTx/>
-              <a:tabLst/>
-            </a:pPr>
-            <a:endParaRPr kumimoji="0" lang="en-GB" altLang="en-VI" sz="2000" b="1" i="0" u="none" strike="noStrike" cap="none" normalizeH="0" baseline="0" dirty="0">
-              <a:ln>
-                <a:noFill/>
-              </a:ln>
-              <a:solidFill>
-                <a:srgbClr val="1F2937"/>
-              </a:solidFill>
-              <a:effectLst/>
-            </a:endParaRPr>
-          </a:p>
-        </p:txBody>
-      </p:sp>
-      <p:sp>
-        <p:nvSpPr>
-          <p:cNvPr id="11" name="Rectangle: Rounded Corners 10">
-            <a:extLst>
-              <a:ext uri="{FF2B5EF4-FFF2-40B4-BE49-F238E27FC236}">
-                <a16:creationId xmlns:a16="http://schemas.microsoft.com/office/drawing/2014/main" id="{234E1E0E-ADCD-4532-9583-018116FF1B14}"/>
-              </a:ext>
-            </a:extLst>
-          </p:cNvPr>
-          <p:cNvSpPr/>
-          <p:nvPr/>
-        </p:nvSpPr>
-        <p:spPr>
-          <a:xfrm>
-            <a:off x="685800" y="2819400"/>
-            <a:ext cx="2667000" cy="304800"/>
-          </a:xfrm>
-          <a:prstGeom prst="roundRect">
-            <a:avLst/>
-          </a:prstGeom>
-          <a:noFill/>
-          <a:ln>
-            <a:solidFill>
-              <a:srgbClr val="C00000"/>
-            </a:solidFill>
-          </a:ln>
-        </p:spPr>
-        <p:style>
-          <a:lnRef idx="2">
-            <a:schemeClr val="accent1">
-              <a:shade val="50000"/>
-            </a:schemeClr>
-          </a:lnRef>
-          <a:fillRef idx="1">
-            <a:schemeClr val="accent1"/>
-          </a:fillRef>
-          <a:effectRef idx="0">
-            <a:schemeClr val="accent1"/>
-          </a:effectRef>
-          <a:fontRef idx="minor">
-            <a:schemeClr val="lt1"/>
-          </a:fontRef>
-        </p:style>
-        <p:txBody>
-          <a:bodyPr rtlCol="0" anchor="ctr"/>
-          <a:lstStyle/>
-          <a:p>
-            <a:pPr algn="ctr"/>
-            <a:endParaRPr lang="en-VI"/>
-          </a:p>
-        </p:txBody>
-      </p:sp>
-      <p:pic>
-        <p:nvPicPr>
-          <p:cNvPr id="6" name="Picture 5">
-            <a:extLst>
-              <a:ext uri="{FF2B5EF4-FFF2-40B4-BE49-F238E27FC236}">
-                <a16:creationId xmlns:a16="http://schemas.microsoft.com/office/drawing/2014/main" id="{7D43B9FA-51CC-4361-98FA-A75418F8ADA8}"/>
-              </a:ext>
-            </a:extLst>
-          </p:cNvPr>
-          <p:cNvPicPr>
-            <a:picLocks noChangeAspect="1"/>
-          </p:cNvPicPr>
-          <p:nvPr/>
-        </p:nvPicPr>
-        <p:blipFill>
-          <a:blip r:embed="rId3"/>
-          <a:stretch>
-            <a:fillRect/>
-          </a:stretch>
-        </p:blipFill>
-        <p:spPr>
-          <a:xfrm>
-            <a:off x="4199465" y="4337557"/>
-            <a:ext cx="5829571" cy="1686004"/>
-          </a:xfrm>
-          <a:prstGeom prst="rect">
-            <a:avLst/>
-          </a:prstGeom>
-          <a:ln>
-            <a:noFill/>
-          </a:ln>
-          <a:effectLst>
-            <a:outerShdw blurRad="292100" dist="139700" dir="2700000" algn="tl" rotWithShape="0">
-              <a:srgbClr val="333333">
-                <a:alpha val="65000"/>
-              </a:srgbClr>
-            </a:outerShdw>
-          </a:effectLst>
-        </p:spPr>
-      </p:pic>
-    </p:spTree>
-    <p:extLst>
-      <p:ext uri="{BB962C8B-B14F-4D97-AF65-F5344CB8AC3E}">
-        <p14:creationId xmlns:p14="http://schemas.microsoft.com/office/powerpoint/2010/main" val="1221785499"/>
-      </p:ext>
-    </p:extLst>
-  </p:cSld>
-  <p:clrMapOvr>
-    <a:masterClrMapping/>
-  </p:clrMapOvr>
-</p:sld>
-</file>
-
-<file path=ppt/slides/slide23.xml><?xml version="1.0" encoding="utf-8"?>
-<p:sld xmlns:a="http://schemas.openxmlformats.org/drawingml/2006/main" xmlns:r="http://schemas.openxmlformats.org/officeDocument/2006/relationships" xmlns:p="http://schemas.openxmlformats.org/presentationml/2006/main">
-  <p:cSld>
     <p:bg>
       <p:bgPr>
         <a:solidFill>
@@ -10400,7 +8730,7 @@
                 <a16:creationId xmlns:a16="http://schemas.microsoft.com/office/drawing/2014/main" id="{6F5A5072-7B47-4D32-B52A-4EBBF590B8A5}"/>
               </a:ext>
               <a:ext uri="{C183D7F6-B498-43B3-948B-1728B52AA6E4}">
-                <adec:decorative xmlns:adec="http://schemas.microsoft.com/office/drawing/2017/decorative" xmlns="" val="1"/>
+                <adec:decorative xmlns:adec="http://schemas.microsoft.com/office/drawing/2017/decorative" val="1"/>
               </a:ext>
             </a:extLst>
           </p:cNvPr>
@@ -10476,7 +8806,7 @@
                 <a16:creationId xmlns:a16="http://schemas.microsoft.com/office/drawing/2014/main" id="{9715DAF0-AE1B-46C9-8A6B-DB2AA05AB91D}"/>
               </a:ext>
               <a:ext uri="{C183D7F6-B498-43B3-948B-1728B52AA6E4}">
-                <adec:decorative xmlns:adec="http://schemas.microsoft.com/office/drawing/2017/decorative" xmlns="" val="1"/>
+                <adec:decorative xmlns:adec="http://schemas.microsoft.com/office/drawing/2017/decorative" val="1"/>
               </a:ext>
             </a:extLst>
           </p:cNvPr>
@@ -10549,7 +8879,7 @@
                 <a16:creationId xmlns:a16="http://schemas.microsoft.com/office/drawing/2014/main" id="{6016219D-510E-4184-9090-6D5578A87BD1}"/>
               </a:ext>
               <a:ext uri="{C183D7F6-B498-43B3-948B-1728B52AA6E4}">
-                <adec:decorative xmlns:adec="http://schemas.microsoft.com/office/drawing/2017/decorative" xmlns="" val="1"/>
+                <adec:decorative xmlns:adec="http://schemas.microsoft.com/office/drawing/2017/decorative" val="1"/>
               </a:ext>
             </a:extLst>
           </p:cNvPr>
@@ -10625,7 +8955,7 @@
                 <a16:creationId xmlns:a16="http://schemas.microsoft.com/office/drawing/2014/main" id="{AFF4A713-7B75-4B21-90D7-5AB19547C728}"/>
               </a:ext>
               <a:ext uri="{C183D7F6-B498-43B3-948B-1728B52AA6E4}">
-                <adec:decorative xmlns:adec="http://schemas.microsoft.com/office/drawing/2017/decorative" xmlns="" val="1"/>
+                <adec:decorative xmlns:adec="http://schemas.microsoft.com/office/drawing/2017/decorative" val="1"/>
               </a:ext>
             </a:extLst>
           </p:cNvPr>
@@ -10700,7 +9030,7 @@
                 <a16:creationId xmlns:a16="http://schemas.microsoft.com/office/drawing/2014/main" id="{DC631C0B-6DA6-4E57-8231-CE32B3434A7E}"/>
               </a:ext>
               <a:ext uri="{C183D7F6-B498-43B3-948B-1728B52AA6E4}">
-                <adec:decorative xmlns:adec="http://schemas.microsoft.com/office/drawing/2017/decorative" xmlns="" val="1"/>
+                <adec:decorative xmlns:adec="http://schemas.microsoft.com/office/drawing/2017/decorative" val="1"/>
               </a:ext>
             </a:extLst>
           </p:cNvPr>
@@ -10776,7 +9106,7 @@
                 <a16:creationId xmlns:a16="http://schemas.microsoft.com/office/drawing/2014/main" id="{C29501E6-A978-4A61-9689-9085AF97A53A}"/>
               </a:ext>
               <a:ext uri="{C183D7F6-B498-43B3-948B-1728B52AA6E4}">
-                <adec:decorative xmlns:adec="http://schemas.microsoft.com/office/drawing/2017/decorative" xmlns="" val="1"/>
+                <adec:decorative xmlns:adec="http://schemas.microsoft.com/office/drawing/2017/decorative" val="1"/>
               </a:ext>
             </a:extLst>
           </p:cNvPr>
@@ -10942,1279 +9272,6 @@
           <a:p>
             <a:pPr algn="l"/>
             <a:r>
-              <a:rPr lang="en-GB" sz="4800" dirty="0">
-                <a:solidFill>
-                  <a:srgbClr val="FFFFFF"/>
-                </a:solidFill>
-              </a:rPr>
-              <a:t>Using </a:t>
-            </a:r>
-            <a:r>
-              <a:rPr lang="en-GB" sz="4800" dirty="0" err="1">
-                <a:solidFill>
-                  <a:srgbClr val="FFFFFF"/>
-                </a:solidFill>
-              </a:rPr>
-              <a:t>ScannerInput</a:t>
-            </a:r>
-            <a:r>
-              <a:rPr lang="en-GB" sz="4800" dirty="0">
-                <a:solidFill>
-                  <a:srgbClr val="FFFFFF"/>
-                </a:solidFill>
-              </a:rPr>
-              <a:t> Utility in our Driver</a:t>
-            </a:r>
-            <a:endParaRPr lang="en-VI" sz="4800" dirty="0">
-              <a:solidFill>
-                <a:srgbClr val="FFFFFF"/>
-              </a:solidFill>
-            </a:endParaRPr>
-          </a:p>
-        </p:txBody>
-      </p:sp>
-      <p:sp>
-        <p:nvSpPr>
-          <p:cNvPr id="3" name="Content Placeholder 2">
-            <a:extLst>
-              <a:ext uri="{FF2B5EF4-FFF2-40B4-BE49-F238E27FC236}">
-                <a16:creationId xmlns:a16="http://schemas.microsoft.com/office/drawing/2014/main" id="{6A61F733-1F08-47D8-98A7-2968F4C31BE2}"/>
-              </a:ext>
-            </a:extLst>
-          </p:cNvPr>
-          <p:cNvSpPr>
-            <a:spLocks noGrp="1"/>
-          </p:cNvSpPr>
-          <p:nvPr>
-            <p:ph type="subTitle" idx="1"/>
-          </p:nvPr>
-        </p:nvSpPr>
-        <p:spPr>
-          <a:xfrm>
-            <a:off x="1350682" y="4870824"/>
-            <a:ext cx="10005951" cy="1458258"/>
-          </a:xfrm>
-        </p:spPr>
-        <p:txBody>
-          <a:bodyPr anchor="ctr">
-            <a:normAutofit/>
-          </a:bodyPr>
-          <a:lstStyle/>
-          <a:p>
-            <a:pPr algn="l">
-              <a:lnSpc>
-                <a:spcPct val="90000"/>
-              </a:lnSpc>
-            </a:pPr>
-            <a:r>
-              <a:rPr lang="en-GB" sz="3000" dirty="0"/>
-              <a:t>Now that we know what the </a:t>
-            </a:r>
-            <a:r>
-              <a:rPr lang="en-GB" sz="3000" dirty="0" err="1"/>
-              <a:t>ScannerInput</a:t>
-            </a:r>
-            <a:r>
-              <a:rPr lang="en-GB" sz="3000" dirty="0"/>
-              <a:t> can recover from </a:t>
-            </a:r>
-            <a:r>
-              <a:rPr lang="en-GB" sz="3000" dirty="0" err="1"/>
-              <a:t>InputMismatchExceptions</a:t>
-            </a:r>
-            <a:r>
-              <a:rPr lang="en-GB" sz="3000" dirty="0"/>
-              <a:t> and also gets rid of the Scanner bug, we will now look at using it in our Driver class.</a:t>
-            </a:r>
-            <a:endParaRPr lang="en-VI" sz="3000" dirty="0"/>
-          </a:p>
-        </p:txBody>
-      </p:sp>
-    </p:spTree>
-    <p:extLst>
-      <p:ext uri="{BB962C8B-B14F-4D97-AF65-F5344CB8AC3E}">
-        <p14:creationId xmlns:p14="http://schemas.microsoft.com/office/powerpoint/2010/main" val="853130105"/>
-      </p:ext>
-    </p:extLst>
-  </p:cSld>
-  <p:clrMapOvr>
-    <a:masterClrMapping/>
-  </p:clrMapOvr>
-</p:sld>
-</file>
-
-<file path=ppt/slides/slide24.xml><?xml version="1.0" encoding="utf-8"?>
-<p:sld xmlns:a="http://schemas.openxmlformats.org/drawingml/2006/main" xmlns:r="http://schemas.openxmlformats.org/officeDocument/2006/relationships" xmlns:p="http://schemas.openxmlformats.org/presentationml/2006/main">
-  <p:cSld>
-    <p:spTree>
-      <p:nvGrpSpPr>
-        <p:cNvPr id="1" name=""/>
-        <p:cNvGrpSpPr/>
-        <p:nvPr/>
-      </p:nvGrpSpPr>
-      <p:grpSpPr>
-        <a:xfrm>
-          <a:off x="0" y="0"/>
-          <a:ext cx="0" cy="0"/>
-          <a:chOff x="0" y="0"/>
-          <a:chExt cx="0" cy="0"/>
-        </a:xfrm>
-      </p:grpSpPr>
-      <p:sp>
-        <p:nvSpPr>
-          <p:cNvPr id="2" name="Title 1">
-            <a:extLst>
-              <a:ext uri="{FF2B5EF4-FFF2-40B4-BE49-F238E27FC236}">
-                <a16:creationId xmlns:a16="http://schemas.microsoft.com/office/drawing/2014/main" id="{9F1DE9F3-92CA-4A98-B097-4415606C04CF}"/>
-              </a:ext>
-            </a:extLst>
-          </p:cNvPr>
-          <p:cNvSpPr>
-            <a:spLocks noGrp="1"/>
-          </p:cNvSpPr>
-          <p:nvPr>
-            <p:ph type="title"/>
-          </p:nvPr>
-        </p:nvSpPr>
-        <p:spPr/>
-        <p:txBody>
-          <a:bodyPr/>
-          <a:lstStyle/>
-          <a:p>
-            <a:r>
-              <a:rPr lang="en-GB" dirty="0"/>
-              <a:t>Remove the old Scanner object</a:t>
-            </a:r>
-            <a:endParaRPr lang="en-VI" dirty="0"/>
-          </a:p>
-        </p:txBody>
-      </p:sp>
-      <p:pic>
-        <p:nvPicPr>
-          <p:cNvPr id="5" name="Picture 4">
-            <a:extLst>
-              <a:ext uri="{FF2B5EF4-FFF2-40B4-BE49-F238E27FC236}">
-                <a16:creationId xmlns:a16="http://schemas.microsoft.com/office/drawing/2014/main" id="{A9CB89E4-273F-4563-947F-6F22C25675CE}"/>
-              </a:ext>
-            </a:extLst>
-          </p:cNvPr>
-          <p:cNvPicPr>
-            <a:picLocks noChangeAspect="1"/>
-          </p:cNvPicPr>
-          <p:nvPr/>
-        </p:nvPicPr>
-        <p:blipFill>
-          <a:blip r:embed="rId2"/>
-          <a:stretch>
-            <a:fillRect/>
-          </a:stretch>
-        </p:blipFill>
-        <p:spPr>
-          <a:xfrm>
-            <a:off x="1539868" y="1752600"/>
-            <a:ext cx="9112263" cy="2062248"/>
-          </a:xfrm>
-          <a:prstGeom prst="rect">
-            <a:avLst/>
-          </a:prstGeom>
-          <a:ln>
-            <a:noFill/>
-          </a:ln>
-          <a:effectLst>
-            <a:outerShdw blurRad="292100" dist="139700" dir="2700000" algn="tl" rotWithShape="0">
-              <a:srgbClr val="333333">
-                <a:alpha val="65000"/>
-              </a:srgbClr>
-            </a:outerShdw>
-          </a:effectLst>
-        </p:spPr>
-      </p:pic>
-      <p:sp>
-        <p:nvSpPr>
-          <p:cNvPr id="6" name="TextBox 5">
-            <a:extLst>
-              <a:ext uri="{FF2B5EF4-FFF2-40B4-BE49-F238E27FC236}">
-                <a16:creationId xmlns:a16="http://schemas.microsoft.com/office/drawing/2014/main" id="{696BD491-C9AC-476F-9DDD-8A546707B078}"/>
-              </a:ext>
-            </a:extLst>
-          </p:cNvPr>
-          <p:cNvSpPr txBox="1"/>
-          <p:nvPr/>
-        </p:nvSpPr>
-        <p:spPr>
-          <a:xfrm>
-            <a:off x="914399" y="4149810"/>
-            <a:ext cx="10363200" cy="1569660"/>
-          </a:xfrm>
-          <a:prstGeom prst="rect">
-            <a:avLst/>
-          </a:prstGeom>
-          <a:noFill/>
-        </p:spPr>
-        <p:txBody>
-          <a:bodyPr wrap="square" rtlCol="0">
-            <a:spAutoFit/>
-          </a:bodyPr>
-          <a:lstStyle/>
-          <a:p>
-            <a:pPr algn="ctr"/>
-            <a:r>
-              <a:rPr lang="en-GB" sz="2400" dirty="0"/>
-              <a:t>We no longer want to use the Scanner class like this, </a:t>
-            </a:r>
-          </a:p>
-          <a:p>
-            <a:pPr algn="ctr"/>
-            <a:r>
-              <a:rPr lang="en-GB" sz="2400" dirty="0"/>
-              <a:t>we want to use our </a:t>
-            </a:r>
-            <a:r>
-              <a:rPr lang="en-GB" sz="2400" dirty="0" err="1"/>
-              <a:t>ScannerInput</a:t>
-            </a:r>
-            <a:r>
-              <a:rPr lang="en-GB" sz="2400" dirty="0"/>
-              <a:t> class instead.</a:t>
-            </a:r>
-          </a:p>
-          <a:p>
-            <a:pPr algn="ctr"/>
-            <a:endParaRPr lang="en-GB" sz="2400" dirty="0"/>
-          </a:p>
-          <a:p>
-            <a:pPr algn="ctr"/>
-            <a:r>
-              <a:rPr lang="en-GB" sz="2400" dirty="0"/>
-              <a:t>Deleting this line of code will cause a LOT of syntax errors!</a:t>
-            </a:r>
-            <a:endParaRPr lang="en-VI" sz="2400" dirty="0"/>
-          </a:p>
-        </p:txBody>
-      </p:sp>
-    </p:spTree>
-    <p:extLst>
-      <p:ext uri="{BB962C8B-B14F-4D97-AF65-F5344CB8AC3E}">
-        <p14:creationId xmlns:p14="http://schemas.microsoft.com/office/powerpoint/2010/main" val="2450156976"/>
-      </p:ext>
-    </p:extLst>
-  </p:cSld>
-  <p:clrMapOvr>
-    <a:masterClrMapping/>
-  </p:clrMapOvr>
-</p:sld>
-</file>
-
-<file path=ppt/slides/slide25.xml><?xml version="1.0" encoding="utf-8"?>
-<p:sld xmlns:a="http://schemas.openxmlformats.org/drawingml/2006/main" xmlns:r="http://schemas.openxmlformats.org/officeDocument/2006/relationships" xmlns:p="http://schemas.openxmlformats.org/presentationml/2006/main">
-  <p:cSld>
-    <p:spTree>
-      <p:nvGrpSpPr>
-        <p:cNvPr id="1" name=""/>
-        <p:cNvGrpSpPr/>
-        <p:nvPr/>
-      </p:nvGrpSpPr>
-      <p:grpSpPr>
-        <a:xfrm>
-          <a:off x="0" y="0"/>
-          <a:ext cx="0" cy="0"/>
-          <a:chOff x="0" y="0"/>
-          <a:chExt cx="0" cy="0"/>
-        </a:xfrm>
-      </p:grpSpPr>
-      <p:sp>
-        <p:nvSpPr>
-          <p:cNvPr id="2" name="Title 1">
-            <a:extLst>
-              <a:ext uri="{FF2B5EF4-FFF2-40B4-BE49-F238E27FC236}">
-                <a16:creationId xmlns:a16="http://schemas.microsoft.com/office/drawing/2014/main" id="{9F1DE9F3-92CA-4A98-B097-4415606C04CF}"/>
-              </a:ext>
-            </a:extLst>
-          </p:cNvPr>
-          <p:cNvSpPr>
-            <a:spLocks noGrp="1"/>
-          </p:cNvSpPr>
-          <p:nvPr>
-            <p:ph type="title"/>
-          </p:nvPr>
-        </p:nvSpPr>
-        <p:spPr/>
-        <p:txBody>
-          <a:bodyPr/>
-          <a:lstStyle/>
-          <a:p>
-            <a:r>
-              <a:rPr lang="en-GB" dirty="0"/>
-              <a:t>Using </a:t>
-            </a:r>
-            <a:r>
-              <a:rPr lang="en-GB" dirty="0" err="1"/>
-              <a:t>ScannerInput</a:t>
-            </a:r>
-            <a:r>
-              <a:rPr lang="en-GB" dirty="0"/>
-              <a:t> in a method</a:t>
-            </a:r>
-            <a:endParaRPr lang="en-VI" dirty="0"/>
-          </a:p>
-        </p:txBody>
-      </p:sp>
-      <p:pic>
-        <p:nvPicPr>
-          <p:cNvPr id="8" name="Picture 7">
-            <a:extLst>
-              <a:ext uri="{FF2B5EF4-FFF2-40B4-BE49-F238E27FC236}">
-                <a16:creationId xmlns:a16="http://schemas.microsoft.com/office/drawing/2014/main" id="{D51DA587-A78C-447D-A8E8-6D9456711244}"/>
-              </a:ext>
-            </a:extLst>
-          </p:cNvPr>
-          <p:cNvPicPr>
-            <a:picLocks noChangeAspect="1"/>
-          </p:cNvPicPr>
-          <p:nvPr/>
-        </p:nvPicPr>
-        <p:blipFill>
-          <a:blip r:embed="rId3"/>
-          <a:stretch>
-            <a:fillRect/>
-          </a:stretch>
-        </p:blipFill>
-        <p:spPr>
-          <a:xfrm>
-            <a:off x="609600" y="1538362"/>
-            <a:ext cx="6826854" cy="2784496"/>
-          </a:xfrm>
-          <a:prstGeom prst="rect">
-            <a:avLst/>
-          </a:prstGeom>
-          <a:ln>
-            <a:noFill/>
-          </a:ln>
-          <a:effectLst>
-            <a:outerShdw blurRad="292100" dist="139700" dir="2700000" algn="tl" rotWithShape="0">
-              <a:srgbClr val="333333">
-                <a:alpha val="65000"/>
-              </a:srgbClr>
-            </a:outerShdw>
-          </a:effectLst>
-        </p:spPr>
-      </p:pic>
-      <p:pic>
-        <p:nvPicPr>
-          <p:cNvPr id="10" name="Picture 9">
-            <a:extLst>
-              <a:ext uri="{FF2B5EF4-FFF2-40B4-BE49-F238E27FC236}">
-                <a16:creationId xmlns:a16="http://schemas.microsoft.com/office/drawing/2014/main" id="{174B6A03-4290-419C-8DE4-47754FE675E4}"/>
-              </a:ext>
-            </a:extLst>
-          </p:cNvPr>
-          <p:cNvPicPr>
-            <a:picLocks noChangeAspect="1"/>
-          </p:cNvPicPr>
-          <p:nvPr/>
-        </p:nvPicPr>
-        <p:blipFill>
-          <a:blip r:embed="rId4"/>
-          <a:stretch>
-            <a:fillRect/>
-          </a:stretch>
-        </p:blipFill>
-        <p:spPr>
-          <a:xfrm>
-            <a:off x="1981200" y="4511763"/>
-            <a:ext cx="9911427" cy="2163762"/>
-          </a:xfrm>
-          <a:prstGeom prst="rect">
-            <a:avLst/>
-          </a:prstGeom>
-          <a:ln>
-            <a:noFill/>
-          </a:ln>
-          <a:effectLst>
-            <a:outerShdw blurRad="292100" dist="139700" dir="2700000" algn="tl" rotWithShape="0">
-              <a:srgbClr val="333333">
-                <a:alpha val="65000"/>
-              </a:srgbClr>
-            </a:outerShdw>
-          </a:effectLst>
-        </p:spPr>
-      </p:pic>
-      <p:cxnSp>
-        <p:nvCxnSpPr>
-          <p:cNvPr id="13" name="Connector: Elbow 12">
-            <a:extLst>
-              <a:ext uri="{FF2B5EF4-FFF2-40B4-BE49-F238E27FC236}">
-                <a16:creationId xmlns:a16="http://schemas.microsoft.com/office/drawing/2014/main" id="{9AA2FC48-26FC-4782-96F1-FA063211C7E2}"/>
-              </a:ext>
-            </a:extLst>
-          </p:cNvPr>
-          <p:cNvCxnSpPr>
-            <a:cxnSpLocks/>
-            <a:stCxn id="8" idx="3"/>
-          </p:cNvCxnSpPr>
-          <p:nvPr/>
-        </p:nvCxnSpPr>
-        <p:spPr>
-          <a:xfrm>
-            <a:off x="7436454" y="2930610"/>
-            <a:ext cx="762000" cy="1460428"/>
-          </a:xfrm>
-          <a:prstGeom prst="bentConnector2">
-            <a:avLst/>
-          </a:prstGeom>
-          <a:ln w="76200">
-            <a:tailEnd type="triangle"/>
-          </a:ln>
-        </p:spPr>
-        <p:style>
-          <a:lnRef idx="1">
-            <a:schemeClr val="accent1"/>
-          </a:lnRef>
-          <a:fillRef idx="0">
-            <a:schemeClr val="accent1"/>
-          </a:fillRef>
-          <a:effectRef idx="0">
-            <a:schemeClr val="accent1"/>
-          </a:effectRef>
-          <a:fontRef idx="minor">
-            <a:schemeClr val="tx1"/>
-          </a:fontRef>
-        </p:style>
-      </p:cxnSp>
-    </p:spTree>
-    <p:extLst>
-      <p:ext uri="{BB962C8B-B14F-4D97-AF65-F5344CB8AC3E}">
-        <p14:creationId xmlns:p14="http://schemas.microsoft.com/office/powerpoint/2010/main" val="3036560077"/>
-      </p:ext>
-    </p:extLst>
-  </p:cSld>
-  <p:clrMapOvr>
-    <a:masterClrMapping/>
-  </p:clrMapOvr>
-</p:sld>
-</file>
-
-<file path=ppt/slides/slide26.xml><?xml version="1.0" encoding="utf-8"?>
-<p:sld xmlns:a="http://schemas.openxmlformats.org/drawingml/2006/main" xmlns:r="http://schemas.openxmlformats.org/officeDocument/2006/relationships" xmlns:p="http://schemas.openxmlformats.org/presentationml/2006/main">
-  <p:cSld>
-    <p:spTree>
-      <p:nvGrpSpPr>
-        <p:cNvPr id="1" name=""/>
-        <p:cNvGrpSpPr/>
-        <p:nvPr/>
-      </p:nvGrpSpPr>
-      <p:grpSpPr>
-        <a:xfrm>
-          <a:off x="0" y="0"/>
-          <a:ext cx="0" cy="0"/>
-          <a:chOff x="0" y="0"/>
-          <a:chExt cx="0" cy="0"/>
-        </a:xfrm>
-      </p:grpSpPr>
-      <p:sp>
-        <p:nvSpPr>
-          <p:cNvPr id="2" name="Title 1">
-            <a:extLst>
-              <a:ext uri="{FF2B5EF4-FFF2-40B4-BE49-F238E27FC236}">
-                <a16:creationId xmlns:a16="http://schemas.microsoft.com/office/drawing/2014/main" id="{9F1DE9F3-92CA-4A98-B097-4415606C04CF}"/>
-              </a:ext>
-            </a:extLst>
-          </p:cNvPr>
-          <p:cNvSpPr>
-            <a:spLocks noGrp="1"/>
-          </p:cNvSpPr>
-          <p:nvPr>
-            <p:ph type="title" idx="4294967295"/>
-          </p:nvPr>
-        </p:nvSpPr>
-        <p:spPr>
-          <a:xfrm>
-            <a:off x="-8888" y="0"/>
-            <a:ext cx="2447288" cy="1271926"/>
-          </a:xfrm>
-        </p:spPr>
-        <p:txBody>
-          <a:bodyPr>
-            <a:normAutofit fontScale="90000"/>
-          </a:bodyPr>
-          <a:lstStyle/>
-          <a:p>
-            <a:r>
-              <a:rPr lang="en-GB" sz="3000" dirty="0"/>
-              <a:t>Using </a:t>
-            </a:r>
-            <a:r>
-              <a:rPr lang="en-GB" sz="3000" dirty="0" err="1"/>
-              <a:t>ScannerInput</a:t>
-            </a:r>
-            <a:r>
-              <a:rPr lang="en-GB" sz="3000" dirty="0"/>
-              <a:t> in </a:t>
-            </a:r>
-            <a:br>
-              <a:rPr lang="en-GB" sz="3000" dirty="0"/>
-            </a:br>
-            <a:r>
-              <a:rPr lang="en-GB" sz="3000" dirty="0"/>
-              <a:t>add Product()</a:t>
-            </a:r>
-            <a:endParaRPr lang="en-VI" sz="3000" dirty="0"/>
-          </a:p>
-        </p:txBody>
-      </p:sp>
-      <p:pic>
-        <p:nvPicPr>
-          <p:cNvPr id="4" name="Picture 3">
-            <a:extLst>
-              <a:ext uri="{FF2B5EF4-FFF2-40B4-BE49-F238E27FC236}">
-                <a16:creationId xmlns:a16="http://schemas.microsoft.com/office/drawing/2014/main" id="{69402AA7-68CB-4827-8BB5-9E8A92BF6D8C}"/>
-              </a:ext>
-            </a:extLst>
-          </p:cNvPr>
-          <p:cNvPicPr>
-            <a:picLocks noChangeAspect="1"/>
-          </p:cNvPicPr>
-          <p:nvPr/>
-        </p:nvPicPr>
-        <p:blipFill>
-          <a:blip r:embed="rId2"/>
-          <a:stretch>
-            <a:fillRect/>
-          </a:stretch>
-        </p:blipFill>
-        <p:spPr>
-          <a:xfrm>
-            <a:off x="2277112" y="959216"/>
-            <a:ext cx="9305288" cy="5746384"/>
-          </a:xfrm>
-          <a:prstGeom prst="rect">
-            <a:avLst/>
-          </a:prstGeom>
-          <a:ln>
-            <a:noFill/>
-          </a:ln>
-          <a:effectLst>
-            <a:outerShdw blurRad="292100" dist="139700" dir="2700000" algn="tl" rotWithShape="0">
-              <a:srgbClr val="333333">
-                <a:alpha val="65000"/>
-              </a:srgbClr>
-            </a:outerShdw>
-          </a:effectLst>
-        </p:spPr>
-      </p:pic>
-    </p:spTree>
-    <p:extLst>
-      <p:ext uri="{BB962C8B-B14F-4D97-AF65-F5344CB8AC3E}">
-        <p14:creationId xmlns:p14="http://schemas.microsoft.com/office/powerpoint/2010/main" val="875794051"/>
-      </p:ext>
-    </p:extLst>
-  </p:cSld>
-  <p:clrMapOvr>
-    <a:masterClrMapping/>
-  </p:clrMapOvr>
-</p:sld>
-</file>
-
-<file path=ppt/slides/slide27.xml><?xml version="1.0" encoding="utf-8"?>
-<p:sld xmlns:a="http://schemas.openxmlformats.org/drawingml/2006/main" xmlns:r="http://schemas.openxmlformats.org/officeDocument/2006/relationships" xmlns:p="http://schemas.openxmlformats.org/presentationml/2006/main">
-  <p:cSld>
-    <p:spTree>
-      <p:nvGrpSpPr>
-        <p:cNvPr id="1" name=""/>
-        <p:cNvGrpSpPr/>
-        <p:nvPr/>
-      </p:nvGrpSpPr>
-      <p:grpSpPr>
-        <a:xfrm>
-          <a:off x="0" y="0"/>
-          <a:ext cx="0" cy="0"/>
-          <a:chOff x="0" y="0"/>
-          <a:chExt cx="0" cy="0"/>
-        </a:xfrm>
-      </p:grpSpPr>
-      <p:sp>
-        <p:nvSpPr>
-          <p:cNvPr id="2" name="Title 1">
-            <a:extLst>
-              <a:ext uri="{FF2B5EF4-FFF2-40B4-BE49-F238E27FC236}">
-                <a16:creationId xmlns:a16="http://schemas.microsoft.com/office/drawing/2014/main" id="{9F1DE9F3-92CA-4A98-B097-4415606C04CF}"/>
-              </a:ext>
-            </a:extLst>
-          </p:cNvPr>
-          <p:cNvSpPr>
-            <a:spLocks noGrp="1"/>
-          </p:cNvSpPr>
-          <p:nvPr>
-            <p:ph type="title" idx="4294967295"/>
-          </p:nvPr>
-        </p:nvSpPr>
-        <p:spPr>
-          <a:xfrm>
-            <a:off x="67312" y="323253"/>
-            <a:ext cx="2523488" cy="1271926"/>
-          </a:xfrm>
-        </p:spPr>
-        <p:txBody>
-          <a:bodyPr>
-            <a:normAutofit fontScale="90000"/>
-          </a:bodyPr>
-          <a:lstStyle/>
-          <a:p>
-            <a:r>
-              <a:rPr lang="en-GB" sz="3000" dirty="0"/>
-              <a:t>Using </a:t>
-            </a:r>
-            <a:r>
-              <a:rPr lang="en-GB" sz="3000" dirty="0" err="1"/>
-              <a:t>ScannerInput</a:t>
-            </a:r>
-            <a:r>
-              <a:rPr lang="en-GB" sz="3000" dirty="0"/>
-              <a:t> in </a:t>
-            </a:r>
-            <a:br>
-              <a:rPr lang="en-GB" sz="3000" dirty="0"/>
-            </a:br>
-            <a:r>
-              <a:rPr lang="en-GB" sz="3000" dirty="0" err="1"/>
-              <a:t>mainMenu</a:t>
-            </a:r>
-            <a:r>
-              <a:rPr lang="en-GB" sz="3000" dirty="0"/>
-              <a:t>()</a:t>
-            </a:r>
-            <a:endParaRPr lang="en-VI" sz="3000" dirty="0"/>
-          </a:p>
-        </p:txBody>
-      </p:sp>
-      <p:pic>
-        <p:nvPicPr>
-          <p:cNvPr id="5" name="Picture 4">
-            <a:extLst>
-              <a:ext uri="{FF2B5EF4-FFF2-40B4-BE49-F238E27FC236}">
-                <a16:creationId xmlns:a16="http://schemas.microsoft.com/office/drawing/2014/main" id="{CFC79591-1A95-4F3B-BA0F-3C164AE95DF8}"/>
-              </a:ext>
-            </a:extLst>
-          </p:cNvPr>
-          <p:cNvPicPr>
-            <a:picLocks noChangeAspect="1"/>
-          </p:cNvPicPr>
-          <p:nvPr/>
-        </p:nvPicPr>
-        <p:blipFill>
-          <a:blip r:embed="rId2"/>
-          <a:stretch>
-            <a:fillRect/>
-          </a:stretch>
-        </p:blipFill>
-        <p:spPr>
-          <a:xfrm>
-            <a:off x="2774984" y="838200"/>
-            <a:ext cx="8121615" cy="5447252"/>
-          </a:xfrm>
-          <a:prstGeom prst="rect">
-            <a:avLst/>
-          </a:prstGeom>
-          <a:ln>
-            <a:noFill/>
-          </a:ln>
-          <a:effectLst>
-            <a:outerShdw blurRad="292100" dist="139700" dir="2700000" algn="tl" rotWithShape="0">
-              <a:srgbClr val="333333">
-                <a:alpha val="65000"/>
-              </a:srgbClr>
-            </a:outerShdw>
-          </a:effectLst>
-        </p:spPr>
-      </p:pic>
-    </p:spTree>
-    <p:extLst>
-      <p:ext uri="{BB962C8B-B14F-4D97-AF65-F5344CB8AC3E}">
-        <p14:creationId xmlns:p14="http://schemas.microsoft.com/office/powerpoint/2010/main" val="358051282"/>
-      </p:ext>
-    </p:extLst>
-  </p:cSld>
-  <p:clrMapOvr>
-    <a:masterClrMapping/>
-  </p:clrMapOvr>
-</p:sld>
-</file>
-
-<file path=ppt/slides/slide28.xml><?xml version="1.0" encoding="utf-8"?>
-<p:sld xmlns:a="http://schemas.openxmlformats.org/drawingml/2006/main" xmlns:r="http://schemas.openxmlformats.org/officeDocument/2006/relationships" xmlns:p="http://schemas.openxmlformats.org/presentationml/2006/main">
-  <p:cSld>
-    <p:bg>
-      <p:bgPr>
-        <a:solidFill>
-          <a:schemeClr val="bg1"/>
-        </a:solidFill>
-        <a:effectLst/>
-      </p:bgPr>
-    </p:bg>
-    <p:spTree>
-      <p:nvGrpSpPr>
-        <p:cNvPr id="1" name=""/>
-        <p:cNvGrpSpPr/>
-        <p:nvPr/>
-      </p:nvGrpSpPr>
-      <p:grpSpPr>
-        <a:xfrm>
-          <a:off x="0" y="0"/>
-          <a:ext cx="0" cy="0"/>
-          <a:chOff x="0" y="0"/>
-          <a:chExt cx="0" cy="0"/>
-        </a:xfrm>
-      </p:grpSpPr>
-      <p:sp useBgFill="1">
-        <p:nvSpPr>
-          <p:cNvPr id="8" name="Rectangle 7">
-            <a:extLst>
-              <a:ext uri="{FF2B5EF4-FFF2-40B4-BE49-F238E27FC236}">
-                <a16:creationId xmlns:a16="http://schemas.microsoft.com/office/drawing/2014/main" id="{6F5A5072-7B47-4D32-B52A-4EBBF590B8A5}"/>
-              </a:ext>
-              <a:ext uri="{C183D7F6-B498-43B3-948B-1728B52AA6E4}">
-                <adec:decorative xmlns:adec="http://schemas.microsoft.com/office/drawing/2017/decorative" xmlns="" val="1"/>
-              </a:ext>
-            </a:extLst>
-          </p:cNvPr>
-          <p:cNvSpPr>
-            <a:spLocks noGrp="1" noRot="1" noChangeAspect="1" noMove="1" noResize="1" noEditPoints="1" noAdjustHandles="1" noChangeArrowheads="1" noChangeShapeType="1" noTextEdit="1"/>
-          </p:cNvSpPr>
-          <p:nvPr>
-            <p:extLst>
-              <p:ext uri="{386F3935-93C4-4BCD-93E2-E3B085C9AB24}">
-                <p16:designElem xmlns:p16="http://schemas.microsoft.com/office/powerpoint/2015/main" val="1"/>
-              </p:ext>
-            </p:extLst>
-          </p:nvPr>
-        </p:nvSpPr>
-        <p:spPr>
-          <a:xfrm>
-            <a:off x="0" y="0"/>
-            <a:ext cx="12192000" cy="6858000"/>
-          </a:xfrm>
-          <a:prstGeom prst="rect">
-            <a:avLst/>
-          </a:prstGeom>
-          <a:ln w="12700" cap="flat" cmpd="sng" algn="ctr">
-            <a:noFill/>
-            <a:prstDash val="solid"/>
-            <a:miter lim="800000"/>
-          </a:ln>
-          <a:effectLst/>
-          <a:extLst>
-            <a:ext uri="{91240B29-F687-4F45-9708-019B960494DF}">
-              <a14:hiddenLine xmlns:a14="http://schemas.microsoft.com/office/drawing/2010/main" w="12700" cap="flat" cmpd="sng" algn="ctr">
-                <a:solidFill>
-                  <a:schemeClr val="accent1">
-                    <a:shade val="50000"/>
-                  </a:schemeClr>
-                </a:solidFill>
-                <a:prstDash val="solid"/>
-                <a:miter lim="800000"/>
-              </a14:hiddenLine>
-            </a:ext>
-          </a:extLst>
-        </p:spPr>
-        <p:style>
-          <a:lnRef idx="2">
-            <a:schemeClr val="accent1">
-              <a:shade val="50000"/>
-            </a:schemeClr>
-          </a:lnRef>
-          <a:fillRef idx="1">
-            <a:schemeClr val="accent1"/>
-          </a:fillRef>
-          <a:effectRef idx="0">
-            <a:schemeClr val="accent1"/>
-          </a:effectRef>
-          <a:fontRef idx="minor">
-            <a:schemeClr val="lt1"/>
-          </a:fontRef>
-        </p:style>
-        <p:txBody>
-          <a:bodyPr rtlCol="0" anchor="ctr"/>
-          <a:lstStyle/>
-          <a:p>
-            <a:pPr algn="ctr"/>
-            <a:endParaRPr lang="en-US"/>
-          </a:p>
-        </p:txBody>
-      </p:sp>
-      <p:sp>
-        <p:nvSpPr>
-          <p:cNvPr id="10" name="Rectangle 9">
-            <a:extLst>
-              <a:ext uri="{FF2B5EF4-FFF2-40B4-BE49-F238E27FC236}">
-                <a16:creationId xmlns:a16="http://schemas.microsoft.com/office/drawing/2014/main" id="{9715DAF0-AE1B-46C9-8A6B-DB2AA05AB91D}"/>
-              </a:ext>
-              <a:ext uri="{C183D7F6-B498-43B3-948B-1728B52AA6E4}">
-                <adec:decorative xmlns:adec="http://schemas.microsoft.com/office/drawing/2017/decorative" xmlns="" val="1"/>
-              </a:ext>
-            </a:extLst>
-          </p:cNvPr>
-          <p:cNvSpPr>
-            <a:spLocks noGrp="1" noRot="1" noChangeAspect="1" noMove="1" noResize="1" noEditPoints="1" noAdjustHandles="1" noChangeArrowheads="1" noChangeShapeType="1" noTextEdit="1"/>
-          </p:cNvSpPr>
-          <p:nvPr>
-            <p:extLst>
-              <p:ext uri="{386F3935-93C4-4BCD-93E2-E3B085C9AB24}">
-                <p16:designElem xmlns:p16="http://schemas.microsoft.com/office/powerpoint/2015/main" val="1"/>
-              </p:ext>
-            </p:extLst>
-          </p:nvPr>
-        </p:nvSpPr>
-        <p:spPr>
-          <a:xfrm rot="10800000">
-            <a:off x="-2" y="-22693"/>
-            <a:ext cx="12191999" cy="4374129"/>
-          </a:xfrm>
-          <a:prstGeom prst="rect">
-            <a:avLst/>
-          </a:prstGeom>
-          <a:gradFill>
-            <a:gsLst>
-              <a:gs pos="0">
-                <a:schemeClr val="accent1">
-                  <a:lumMod val="75000"/>
-                </a:schemeClr>
-              </a:gs>
-              <a:gs pos="100000">
-                <a:srgbClr val="000000"/>
-              </a:gs>
-            </a:gsLst>
-            <a:lin ang="15000000" scaled="0"/>
-          </a:gradFill>
-          <a:ln>
-            <a:noFill/>
-          </a:ln>
-        </p:spPr>
-        <p:style>
-          <a:lnRef idx="2">
-            <a:schemeClr val="accent1">
-              <a:shade val="50000"/>
-            </a:schemeClr>
-          </a:lnRef>
-          <a:fillRef idx="1">
-            <a:schemeClr val="accent1"/>
-          </a:fillRef>
-          <a:effectRef idx="0">
-            <a:schemeClr val="accent1"/>
-          </a:effectRef>
-          <a:fontRef idx="minor">
-            <a:schemeClr val="lt1"/>
-          </a:fontRef>
-        </p:style>
-        <p:txBody>
-          <a:bodyPr rtlCol="0" anchor="ctr"/>
-          <a:lstStyle/>
-          <a:p>
-            <a:pPr algn="ctr"/>
-            <a:endParaRPr lang="en-US"/>
-          </a:p>
-        </p:txBody>
-      </p:sp>
-      <p:sp>
-        <p:nvSpPr>
-          <p:cNvPr id="12" name="Rectangle 11">
-            <a:extLst>
-              <a:ext uri="{FF2B5EF4-FFF2-40B4-BE49-F238E27FC236}">
-                <a16:creationId xmlns:a16="http://schemas.microsoft.com/office/drawing/2014/main" id="{6016219D-510E-4184-9090-6D5578A87BD1}"/>
-              </a:ext>
-              <a:ext uri="{C183D7F6-B498-43B3-948B-1728B52AA6E4}">
-                <adec:decorative xmlns:adec="http://schemas.microsoft.com/office/drawing/2017/decorative" xmlns="" val="1"/>
-              </a:ext>
-            </a:extLst>
-          </p:cNvPr>
-          <p:cNvSpPr>
-            <a:spLocks noGrp="1" noRot="1" noChangeAspect="1" noMove="1" noResize="1" noEditPoints="1" noAdjustHandles="1" noChangeArrowheads="1" noChangeShapeType="1" noTextEdit="1"/>
-          </p:cNvSpPr>
-          <p:nvPr>
-            <p:extLst>
-              <p:ext uri="{386F3935-93C4-4BCD-93E2-E3B085C9AB24}">
-                <p16:designElem xmlns:p16="http://schemas.microsoft.com/office/powerpoint/2015/main" val="1"/>
-              </p:ext>
-            </p:extLst>
-          </p:nvPr>
-        </p:nvSpPr>
-        <p:spPr>
-          <a:xfrm rot="5400000">
-            <a:off x="3908719" y="-3931841"/>
-            <a:ext cx="4374557" cy="12192000"/>
-          </a:xfrm>
-          <a:prstGeom prst="rect">
-            <a:avLst/>
-          </a:prstGeom>
-          <a:gradFill>
-            <a:gsLst>
-              <a:gs pos="40000">
-                <a:schemeClr val="accent1">
-                  <a:alpha val="0"/>
-                </a:schemeClr>
-              </a:gs>
-              <a:gs pos="100000">
-                <a:schemeClr val="accent1">
-                  <a:lumMod val="75000"/>
-                  <a:alpha val="52000"/>
-                </a:schemeClr>
-              </a:gs>
-            </a:gsLst>
-            <a:lin ang="2400000" scaled="0"/>
-          </a:gradFill>
-          <a:ln>
-            <a:noFill/>
-          </a:ln>
-        </p:spPr>
-        <p:style>
-          <a:lnRef idx="2">
-            <a:schemeClr val="accent1">
-              <a:shade val="50000"/>
-            </a:schemeClr>
-          </a:lnRef>
-          <a:fillRef idx="1">
-            <a:schemeClr val="accent1"/>
-          </a:fillRef>
-          <a:effectRef idx="0">
-            <a:schemeClr val="accent1"/>
-          </a:effectRef>
-          <a:fontRef idx="minor">
-            <a:schemeClr val="lt1"/>
-          </a:fontRef>
-        </p:style>
-        <p:txBody>
-          <a:bodyPr rtlCol="0" anchor="ctr"/>
-          <a:lstStyle/>
-          <a:p>
-            <a:pPr algn="ctr"/>
-            <a:endParaRPr lang="en-US"/>
-          </a:p>
-        </p:txBody>
-      </p:sp>
-      <p:sp>
-        <p:nvSpPr>
-          <p:cNvPr id="14" name="Rectangle 13">
-            <a:extLst>
-              <a:ext uri="{FF2B5EF4-FFF2-40B4-BE49-F238E27FC236}">
-                <a16:creationId xmlns:a16="http://schemas.microsoft.com/office/drawing/2014/main" id="{AFF4A713-7B75-4B21-90D7-5AB19547C728}"/>
-              </a:ext>
-              <a:ext uri="{C183D7F6-B498-43B3-948B-1728B52AA6E4}">
-                <adec:decorative xmlns:adec="http://schemas.microsoft.com/office/drawing/2017/decorative" xmlns="" val="1"/>
-              </a:ext>
-            </a:extLst>
-          </p:cNvPr>
-          <p:cNvSpPr>
-            <a:spLocks noGrp="1" noRot="1" noChangeAspect="1" noMove="1" noResize="1" noEditPoints="1" noAdjustHandles="1" noChangeArrowheads="1" noChangeShapeType="1" noTextEdit="1"/>
-          </p:cNvSpPr>
-          <p:nvPr>
-            <p:extLst>
-              <p:ext uri="{386F3935-93C4-4BCD-93E2-E3B085C9AB24}">
-                <p16:designElem xmlns:p16="http://schemas.microsoft.com/office/powerpoint/2015/main" val="1"/>
-              </p:ext>
-            </p:extLst>
-          </p:nvPr>
-        </p:nvSpPr>
-        <p:spPr>
-          <a:xfrm rot="5400000">
-            <a:off x="4136696" y="-3703868"/>
-            <a:ext cx="4374128" cy="11736479"/>
-          </a:xfrm>
-          <a:prstGeom prst="rect">
-            <a:avLst/>
-          </a:prstGeom>
-          <a:gradFill>
-            <a:gsLst>
-              <a:gs pos="17000">
-                <a:schemeClr val="accent1">
-                  <a:alpha val="0"/>
-                </a:schemeClr>
-              </a:gs>
-              <a:gs pos="100000">
-                <a:srgbClr val="000000">
-                  <a:alpha val="37000"/>
-                </a:srgbClr>
-              </a:gs>
-            </a:gsLst>
-            <a:lin ang="7800000" scaled="0"/>
-          </a:gradFill>
-          <a:ln>
-            <a:noFill/>
-          </a:ln>
-        </p:spPr>
-        <p:style>
-          <a:lnRef idx="2">
-            <a:schemeClr val="accent1">
-              <a:shade val="50000"/>
-            </a:schemeClr>
-          </a:lnRef>
-          <a:fillRef idx="1">
-            <a:schemeClr val="accent1"/>
-          </a:fillRef>
-          <a:effectRef idx="0">
-            <a:schemeClr val="accent1"/>
-          </a:effectRef>
-          <a:fontRef idx="minor">
-            <a:schemeClr val="lt1"/>
-          </a:fontRef>
-        </p:style>
-        <p:txBody>
-          <a:bodyPr rtlCol="0" anchor="ctr"/>
-          <a:lstStyle/>
-          <a:p>
-            <a:pPr algn="ctr"/>
-            <a:endParaRPr lang="en-US"/>
-          </a:p>
-        </p:txBody>
-      </p:sp>
-      <p:sp>
-        <p:nvSpPr>
-          <p:cNvPr id="16" name="Rectangle 15">
-            <a:extLst>
-              <a:ext uri="{FF2B5EF4-FFF2-40B4-BE49-F238E27FC236}">
-                <a16:creationId xmlns:a16="http://schemas.microsoft.com/office/drawing/2014/main" id="{DC631C0B-6DA6-4E57-8231-CE32B3434A7E}"/>
-              </a:ext>
-              <a:ext uri="{C183D7F6-B498-43B3-948B-1728B52AA6E4}">
-                <adec:decorative xmlns:adec="http://schemas.microsoft.com/office/drawing/2017/decorative" xmlns="" val="1"/>
-              </a:ext>
-            </a:extLst>
-          </p:cNvPr>
-          <p:cNvSpPr>
-            <a:spLocks noGrp="1" noRot="1" noChangeAspect="1" noMove="1" noResize="1" noEditPoints="1" noAdjustHandles="1" noChangeArrowheads="1" noChangeShapeType="1" noTextEdit="1"/>
-          </p:cNvSpPr>
-          <p:nvPr>
-            <p:extLst>
-              <p:ext uri="{386F3935-93C4-4BCD-93E2-E3B085C9AB24}">
-                <p16:designElem xmlns:p16="http://schemas.microsoft.com/office/powerpoint/2015/main" val="1"/>
-              </p:ext>
-            </p:extLst>
-          </p:nvPr>
-        </p:nvSpPr>
-        <p:spPr>
-          <a:xfrm>
-            <a:off x="-5" y="-22690"/>
-            <a:ext cx="8542485" cy="4374126"/>
-          </a:xfrm>
-          <a:prstGeom prst="rect">
-            <a:avLst/>
-          </a:prstGeom>
-          <a:gradFill>
-            <a:gsLst>
-              <a:gs pos="0">
-                <a:schemeClr val="accent1">
-                  <a:lumMod val="50000"/>
-                  <a:alpha val="0"/>
-                </a:schemeClr>
-              </a:gs>
-              <a:gs pos="100000">
-                <a:srgbClr val="000000">
-                  <a:alpha val="25000"/>
-                </a:srgbClr>
-              </a:gs>
-            </a:gsLst>
-            <a:lin ang="18600000" scaled="0"/>
-          </a:gradFill>
-          <a:ln>
-            <a:noFill/>
-          </a:ln>
-        </p:spPr>
-        <p:style>
-          <a:lnRef idx="2">
-            <a:schemeClr val="accent1">
-              <a:shade val="50000"/>
-            </a:schemeClr>
-          </a:lnRef>
-          <a:fillRef idx="1">
-            <a:schemeClr val="accent1"/>
-          </a:fillRef>
-          <a:effectRef idx="0">
-            <a:schemeClr val="accent1"/>
-          </a:effectRef>
-          <a:fontRef idx="minor">
-            <a:schemeClr val="lt1"/>
-          </a:fontRef>
-        </p:style>
-        <p:txBody>
-          <a:bodyPr rtlCol="0" anchor="ctr"/>
-          <a:lstStyle/>
-          <a:p>
-            <a:pPr algn="ctr"/>
-            <a:endParaRPr lang="en-US"/>
-          </a:p>
-        </p:txBody>
-      </p:sp>
-      <p:sp>
-        <p:nvSpPr>
-          <p:cNvPr id="18" name="Freeform: Shape 17">
-            <a:extLst>
-              <a:ext uri="{FF2B5EF4-FFF2-40B4-BE49-F238E27FC236}">
-                <a16:creationId xmlns:a16="http://schemas.microsoft.com/office/drawing/2014/main" id="{C29501E6-A978-4A61-9689-9085AF97A53A}"/>
-              </a:ext>
-              <a:ext uri="{C183D7F6-B498-43B3-948B-1728B52AA6E4}">
-                <adec:decorative xmlns:adec="http://schemas.microsoft.com/office/drawing/2017/decorative" xmlns="" val="1"/>
-              </a:ext>
-            </a:extLst>
-          </p:cNvPr>
-          <p:cNvSpPr>
-            <a:spLocks noGrp="1" noRot="1" noChangeAspect="1" noMove="1" noResize="1" noEditPoints="1" noAdjustHandles="1" noChangeArrowheads="1" noChangeShapeType="1" noTextEdit="1"/>
-          </p:cNvSpPr>
-          <p:nvPr>
-            <p:extLst>
-              <p:ext uri="{386F3935-93C4-4BCD-93E2-E3B085C9AB24}">
-                <p16:designElem xmlns:p16="http://schemas.microsoft.com/office/powerpoint/2015/main" val="1"/>
-              </p:ext>
-            </p:extLst>
-          </p:nvPr>
-        </p:nvSpPr>
-        <p:spPr>
-          <a:xfrm rot="12508972">
-            <a:off x="5945431" y="-1032053"/>
-            <a:ext cx="4990147" cy="4439131"/>
-          </a:xfrm>
-          <a:custGeom>
-            <a:avLst/>
-            <a:gdLst>
-              <a:gd name="connsiteX0" fmla="*/ 4990147 w 4990147"/>
-              <a:gd name="connsiteY0" fmla="*/ 2229378 h 4439131"/>
-              <a:gd name="connsiteX1" fmla="*/ 917384 w 4990147"/>
-              <a:gd name="connsiteY1" fmla="*/ 4439131 h 4439131"/>
-              <a:gd name="connsiteX2" fmla="*/ 910814 w 4990147"/>
-              <a:gd name="connsiteY2" fmla="*/ 4434219 h 4439131"/>
-              <a:gd name="connsiteX3" fmla="*/ 0 w 4990147"/>
-              <a:gd name="connsiteY3" fmla="*/ 2502877 h 4439131"/>
-              <a:gd name="connsiteX4" fmla="*/ 2502877 w 4990147"/>
-              <a:gd name="connsiteY4" fmla="*/ 0 h 4439131"/>
-              <a:gd name="connsiteX5" fmla="*/ 4954904 w 4990147"/>
-              <a:gd name="connsiteY5" fmla="*/ 1998460 h 4439131"/>
-            </a:gdLst>
-            <a:ahLst/>
-            <a:cxnLst>
-              <a:cxn ang="0">
-                <a:pos x="connsiteX0" y="connsiteY0"/>
-              </a:cxn>
-              <a:cxn ang="0">
-                <a:pos x="connsiteX1" y="connsiteY1"/>
-              </a:cxn>
-              <a:cxn ang="0">
-                <a:pos x="connsiteX2" y="connsiteY2"/>
-              </a:cxn>
-              <a:cxn ang="0">
-                <a:pos x="connsiteX3" y="connsiteY3"/>
-              </a:cxn>
-              <a:cxn ang="0">
-                <a:pos x="connsiteX4" y="connsiteY4"/>
-              </a:cxn>
-              <a:cxn ang="0">
-                <a:pos x="connsiteX5" y="connsiteY5"/>
-              </a:cxn>
-            </a:cxnLst>
-            <a:rect l="l" t="t" r="r" b="b"/>
-            <a:pathLst>
-              <a:path w="4990147" h="4439131">
-                <a:moveTo>
-                  <a:pt x="4990147" y="2229378"/>
-                </a:moveTo>
-                <a:lnTo>
-                  <a:pt x="917384" y="4439131"/>
-                </a:lnTo>
-                <a:lnTo>
-                  <a:pt x="910814" y="4434219"/>
-                </a:lnTo>
-                <a:cubicBezTo>
-                  <a:pt x="354557" y="3975154"/>
-                  <a:pt x="0" y="3280421"/>
-                  <a:pt x="0" y="2502877"/>
-                </a:cubicBezTo>
-                <a:cubicBezTo>
-                  <a:pt x="0" y="1120576"/>
-                  <a:pt x="1120576" y="0"/>
-                  <a:pt x="2502877" y="0"/>
-                </a:cubicBezTo>
-                <a:cubicBezTo>
-                  <a:pt x="3712390" y="0"/>
-                  <a:pt x="4721520" y="857941"/>
-                  <a:pt x="4954904" y="1998460"/>
-                </a:cubicBezTo>
-                <a:close/>
-              </a:path>
-            </a:pathLst>
-          </a:custGeom>
-          <a:gradFill>
-            <a:gsLst>
-              <a:gs pos="0">
-                <a:schemeClr val="accent1">
-                  <a:alpha val="22000"/>
-                </a:schemeClr>
-              </a:gs>
-              <a:gs pos="87000">
-                <a:schemeClr val="accent1">
-                  <a:lumMod val="60000"/>
-                  <a:lumOff val="40000"/>
-                  <a:alpha val="2000"/>
-                </a:schemeClr>
-              </a:gs>
-            </a:gsLst>
-            <a:lin ang="8400000" scaled="0"/>
-          </a:gradFill>
-          <a:ln>
-            <a:noFill/>
-          </a:ln>
-        </p:spPr>
-        <p:style>
-          <a:lnRef idx="2">
-            <a:schemeClr val="accent1">
-              <a:shade val="50000"/>
-            </a:schemeClr>
-          </a:lnRef>
-          <a:fillRef idx="1">
-            <a:schemeClr val="accent1"/>
-          </a:fillRef>
-          <a:effectRef idx="0">
-            <a:schemeClr val="accent1"/>
-          </a:effectRef>
-          <a:fontRef idx="minor">
-            <a:schemeClr val="lt1"/>
-          </a:fontRef>
-        </p:style>
-        <p:txBody>
-          <a:bodyPr wrap="square" rtlCol="0" anchor="ctr">
-            <a:noAutofit/>
-          </a:bodyPr>
-          <a:lstStyle/>
-          <a:p>
-            <a:pPr algn="ctr"/>
-            <a:endParaRPr lang="en-US" dirty="0"/>
-          </a:p>
-        </p:txBody>
-      </p:sp>
-      <p:sp>
-        <p:nvSpPr>
-          <p:cNvPr id="2" name="Title 1">
-            <a:extLst>
-              <a:ext uri="{FF2B5EF4-FFF2-40B4-BE49-F238E27FC236}">
-                <a16:creationId xmlns:a16="http://schemas.microsoft.com/office/drawing/2014/main" id="{25E3E588-C57D-4460-8197-4223C11CA718}"/>
-              </a:ext>
-            </a:extLst>
-          </p:cNvPr>
-          <p:cNvSpPr>
-            <a:spLocks noGrp="1"/>
-          </p:cNvSpPr>
-          <p:nvPr>
-            <p:ph type="ctrTitle"/>
-          </p:nvPr>
-        </p:nvSpPr>
-        <p:spPr>
-          <a:xfrm>
-            <a:off x="1314824" y="735106"/>
-            <a:ext cx="10053763" cy="2928470"/>
-          </a:xfrm>
-        </p:spPr>
-        <p:txBody>
-          <a:bodyPr anchor="b">
-            <a:normAutofit/>
-          </a:bodyPr>
-          <a:lstStyle/>
-          <a:p>
-            <a:pPr algn="l"/>
-            <a:r>
               <a:rPr lang="en-GB" sz="4800" dirty="0" err="1">
                 <a:solidFill>
                   <a:srgbClr val="FFFFFF"/>
@@ -12348,7 +9405,7 @@
 </p:sld>
 </file>
 
-<file path=ppt/slides/slide29.xml><?xml version="1.0" encoding="utf-8"?>
+<file path=ppt/slides/slide21.xml><?xml version="1.0" encoding="utf-8"?>
 <p:sld xmlns:a="http://schemas.openxmlformats.org/drawingml/2006/main" xmlns:r="http://schemas.openxmlformats.org/officeDocument/2006/relationships" xmlns:p="http://schemas.openxmlformats.org/presentationml/2006/main">
   <p:cSld>
     <p:spTree>
@@ -12687,19 +9744,6 @@
               </a:rPr>
               <a:t>    </a:t>
             </a:r>
-            <a:r>
-              <a:rPr kumimoji="0" lang="en-VI" altLang="en-VI" b="0" i="0" u="none" strike="noStrike" cap="none" normalizeH="0" baseline="0" dirty="0">
-                <a:ln>
-                  <a:noFill/>
-                </a:ln>
-                <a:solidFill>
-                  <a:srgbClr val="080808"/>
-                </a:solidFill>
-                <a:effectLst/>
-                <a:latin typeface="JetBrains Mono"/>
-              </a:rPr>
-              <a:t/>
-            </a:r>
             <a:br>
               <a:rPr kumimoji="0" lang="en-VI" altLang="en-VI" b="0" i="0" u="none" strike="noStrike" cap="none" normalizeH="0" baseline="0" dirty="0">
                 <a:ln>
@@ -12918,19 +9962,6 @@
               </a:rPr>
               <a:t>   </a:t>
             </a:r>
-            <a:r>
-              <a:rPr kumimoji="0" lang="en-VI" altLang="en-VI" b="0" i="0" u="none" strike="noStrike" cap="none" normalizeH="0" baseline="0" dirty="0">
-                <a:ln>
-                  <a:noFill/>
-                </a:ln>
-                <a:solidFill>
-                  <a:srgbClr val="080808"/>
-                </a:solidFill>
-                <a:effectLst/>
-                <a:latin typeface="JetBrains Mono"/>
-              </a:rPr>
-              <a:t/>
-            </a:r>
             <a:br>
               <a:rPr kumimoji="0" lang="en-VI" altLang="en-VI" b="0" i="0" u="none" strike="noStrike" cap="none" normalizeH="0" baseline="0" dirty="0">
                 <a:ln>
@@ -13034,19 +10065,6 @@
               </a:rPr>
               <a:t>    </a:t>
             </a:r>
-            <a:r>
-              <a:rPr kumimoji="0" lang="en-VI" altLang="en-VI" b="0" i="0" u="none" strike="noStrike" cap="none" normalizeH="0" baseline="0" dirty="0">
-                <a:ln>
-                  <a:noFill/>
-                </a:ln>
-                <a:solidFill>
-                  <a:srgbClr val="080808"/>
-                </a:solidFill>
-                <a:effectLst/>
-                <a:latin typeface="JetBrains Mono"/>
-              </a:rPr>
-              <a:t/>
-            </a:r>
             <a:br>
               <a:rPr kumimoji="0" lang="en-VI" altLang="en-VI" b="0" i="0" u="none" strike="noStrike" cap="none" normalizeH="0" baseline="0" dirty="0">
                 <a:ln>
@@ -13123,19 +10141,6 @@
                 <a:latin typeface="JetBrains Mono"/>
               </a:rPr>
               <a:t>      </a:t>
-            </a:r>
-            <a:r>
-              <a:rPr kumimoji="0" lang="en-VI" altLang="en-VI" b="0" i="0" u="none" strike="noStrike" cap="none" normalizeH="0" baseline="0" dirty="0">
-                <a:ln>
-                  <a:noFill/>
-                </a:ln>
-                <a:solidFill>
-                  <a:srgbClr val="080808"/>
-                </a:solidFill>
-                <a:effectLst/>
-                <a:latin typeface="JetBrains Mono"/>
-              </a:rPr>
-              <a:t/>
             </a:r>
             <a:br>
               <a:rPr kumimoji="0" lang="en-VI" altLang="en-VI" b="0" i="0" u="none" strike="noStrike" cap="none" normalizeH="0" baseline="0" dirty="0">
@@ -13639,19 +10644,6 @@
               </a:rPr>
               <a:t>     </a:t>
             </a:r>
-            <a:r>
-              <a:rPr kumimoji="0" lang="en-VI" altLang="en-VI" b="0" i="0" u="none" strike="noStrike" cap="none" normalizeH="0" baseline="0" dirty="0">
-                <a:ln>
-                  <a:noFill/>
-                </a:ln>
-                <a:solidFill>
-                  <a:srgbClr val="080808"/>
-                </a:solidFill>
-                <a:effectLst/>
-                <a:latin typeface="JetBrains Mono"/>
-              </a:rPr>
-              <a:t/>
-            </a:r>
             <a:br>
               <a:rPr kumimoji="0" lang="en-VI" altLang="en-VI" b="0" i="0" u="none" strike="noStrike" cap="none" normalizeH="0" baseline="0" dirty="0">
                 <a:ln>
@@ -13664,19 +10656,6 @@
                 <a:latin typeface="JetBrains Mono"/>
               </a:rPr>
             </a:br>
-            <a:r>
-              <a:rPr kumimoji="0" lang="en-VI" altLang="en-VI" b="0" i="0" u="none" strike="noStrike" cap="none" normalizeH="0" baseline="0" dirty="0">
-                <a:ln>
-                  <a:noFill/>
-                </a:ln>
-                <a:solidFill>
-                  <a:srgbClr val="080808"/>
-                </a:solidFill>
-                <a:effectLst/>
-                <a:latin typeface="JetBrains Mono"/>
-              </a:rPr>
-              <a:t/>
-            </a:r>
             <a:br>
               <a:rPr kumimoji="0" lang="en-VI" altLang="en-VI" b="0" i="0" u="none" strike="noStrike" cap="none" normalizeH="0" baseline="0" dirty="0">
                 <a:ln>
@@ -13922,19 +10901,6 @@
               </a:rPr>
               <a:t>    </a:t>
             </a:r>
-            <a:r>
-              <a:rPr kumimoji="0" lang="en-VI" altLang="en-VI" b="0" i="0" u="none" strike="noStrike" cap="none" normalizeH="0" baseline="0" dirty="0">
-                <a:ln>
-                  <a:noFill/>
-                </a:ln>
-                <a:solidFill>
-                  <a:srgbClr val="080808"/>
-                </a:solidFill>
-                <a:effectLst/>
-                <a:latin typeface="JetBrains Mono"/>
-              </a:rPr>
-              <a:t/>
-            </a:r>
             <a:br>
               <a:rPr kumimoji="0" lang="en-VI" altLang="en-VI" b="0" i="0" u="none" strike="noStrike" cap="none" normalizeH="0" baseline="0" dirty="0">
                 <a:ln>
@@ -14051,19 +11017,6 @@
               </a:rPr>
               <a:t>                                </a:t>
             </a:r>
-            <a:r>
-              <a:rPr kumimoji="0" lang="en-VI" altLang="en-VI" b="0" i="0" u="none" strike="noStrike" cap="none" normalizeH="0" baseline="0" dirty="0">
-                <a:ln>
-                  <a:noFill/>
-                </a:ln>
-                <a:solidFill>
-                  <a:srgbClr val="080808"/>
-                </a:solidFill>
-                <a:effectLst/>
-                <a:latin typeface="JetBrains Mono"/>
-              </a:rPr>
-              <a:t/>
-            </a:r>
             <a:br>
               <a:rPr kumimoji="0" lang="en-VI" altLang="en-VI" b="0" i="0" u="none" strike="noStrike" cap="none" normalizeH="0" baseline="0" dirty="0">
                 <a:ln>
@@ -14166,19 +11119,6 @@
                 <a:latin typeface="JetBrains Mono"/>
               </a:rPr>
             </a:br>
-            <a:r>
-              <a:rPr kumimoji="0" lang="en-VI" altLang="en-VI" b="0" i="0" u="none" strike="noStrike" cap="none" normalizeH="0" baseline="0" dirty="0">
-                <a:ln>
-                  <a:noFill/>
-                </a:ln>
-                <a:solidFill>
-                  <a:srgbClr val="080808"/>
-                </a:solidFill>
-                <a:effectLst/>
-                <a:latin typeface="JetBrains Mono"/>
-              </a:rPr>
-              <a:t/>
-            </a:r>
             <a:br>
               <a:rPr kumimoji="0" lang="en-VI" altLang="en-VI" b="0" i="0" u="none" strike="noStrike" cap="none" normalizeH="0" baseline="0" dirty="0">
                 <a:ln>
@@ -14559,19 +11499,6 @@
               </a:rPr>
               <a:t>  </a:t>
             </a:r>
-            <a:r>
-              <a:rPr kumimoji="0" lang="en-VI" altLang="en-VI" b="0" i="0" u="none" strike="noStrike" cap="none" normalizeH="0" baseline="0" dirty="0">
-                <a:ln>
-                  <a:noFill/>
-                </a:ln>
-                <a:solidFill>
-                  <a:srgbClr val="080808"/>
-                </a:solidFill>
-                <a:effectLst/>
-                <a:latin typeface="JetBrains Mono"/>
-              </a:rPr>
-              <a:t/>
-            </a:r>
             <a:br>
               <a:rPr kumimoji="0" lang="en-VI" altLang="en-VI" b="0" i="0" u="none" strike="noStrike" cap="none" normalizeH="0" baseline="0" dirty="0">
                 <a:ln>
@@ -14648,19 +11575,6 @@
                 <a:latin typeface="JetBrains Mono"/>
               </a:rPr>
               <a:t>    </a:t>
-            </a:r>
-            <a:r>
-              <a:rPr kumimoji="0" lang="en-VI" altLang="en-VI" b="0" i="0" u="none" strike="noStrike" cap="none" normalizeH="0" baseline="0" dirty="0">
-                <a:ln>
-                  <a:noFill/>
-                </a:ln>
-                <a:solidFill>
-                  <a:srgbClr val="080808"/>
-                </a:solidFill>
-                <a:effectLst/>
-                <a:latin typeface="JetBrains Mono"/>
-              </a:rPr>
-              <a:t/>
             </a:r>
             <a:br>
               <a:rPr kumimoji="0" lang="en-VI" altLang="en-VI" b="0" i="0" u="none" strike="noStrike" cap="none" normalizeH="0" baseline="0" dirty="0">
@@ -14916,6 +11830,1863 @@
     <p:extLst>
       <p:ext uri="{BB962C8B-B14F-4D97-AF65-F5344CB8AC3E}">
         <p14:creationId xmlns:p14="http://schemas.microsoft.com/office/powerpoint/2010/main" val="2096968426"/>
+      </p:ext>
+    </p:extLst>
+  </p:cSld>
+  <p:clrMapOvr>
+    <a:masterClrMapping/>
+  </p:clrMapOvr>
+</p:sld>
+</file>
+
+<file path=ppt/slides/slide22.xml><?xml version="1.0" encoding="utf-8"?>
+<p:sld xmlns:a="http://schemas.openxmlformats.org/drawingml/2006/main" xmlns:r="http://schemas.openxmlformats.org/officeDocument/2006/relationships" xmlns:p="http://schemas.openxmlformats.org/presentationml/2006/main">
+  <p:cSld>
+    <p:spTree>
+      <p:nvGrpSpPr>
+        <p:cNvPr id="1" name=""/>
+        <p:cNvGrpSpPr/>
+        <p:nvPr/>
+      </p:nvGrpSpPr>
+      <p:grpSpPr>
+        <a:xfrm>
+          <a:off x="0" y="0"/>
+          <a:ext cx="0" cy="0"/>
+          <a:chOff x="0" y="0"/>
+          <a:chExt cx="0" cy="0"/>
+        </a:xfrm>
+      </p:grpSpPr>
+      <p:sp>
+        <p:nvSpPr>
+          <p:cNvPr id="3" name="Content Placeholder 2"/>
+          <p:cNvSpPr>
+            <a:spLocks noGrp="1"/>
+          </p:cNvSpPr>
+          <p:nvPr>
+            <p:ph sz="half" idx="4294967295"/>
+          </p:nvPr>
+        </p:nvSpPr>
+        <p:spPr>
+          <a:xfrm>
+            <a:off x="3810000" y="261787"/>
+            <a:ext cx="6650169" cy="412741"/>
+          </a:xfrm>
+          <a:solidFill>
+            <a:schemeClr val="accent6"/>
+          </a:solidFill>
+        </p:spPr>
+        <p:style>
+          <a:lnRef idx="2">
+            <a:schemeClr val="accent6">
+              <a:shade val="50000"/>
+            </a:schemeClr>
+          </a:lnRef>
+          <a:fillRef idx="1">
+            <a:schemeClr val="accent6"/>
+          </a:fillRef>
+          <a:effectRef idx="0">
+            <a:schemeClr val="accent6"/>
+          </a:effectRef>
+          <a:fontRef idx="minor">
+            <a:schemeClr val="lt1"/>
+          </a:fontRef>
+        </p:style>
+        <p:txBody>
+          <a:bodyPr>
+            <a:noAutofit/>
+          </a:bodyPr>
+          <a:lstStyle/>
+          <a:p>
+            <a:pPr marL="0" indent="0" algn="ctr">
+              <a:buNone/>
+            </a:pPr>
+            <a:r>
+              <a:rPr lang="en-IE" sz="2000" dirty="0"/>
+              <a:t>Adding </a:t>
+            </a:r>
+            <a:r>
+              <a:rPr lang="en-IE" sz="2000" b="1" dirty="0">
+                <a:solidFill>
+                  <a:srgbClr val="FF0000"/>
+                </a:solidFill>
+              </a:rPr>
+              <a:t>Save</a:t>
+            </a:r>
+            <a:r>
+              <a:rPr lang="en-IE" sz="2000" dirty="0"/>
+              <a:t> and </a:t>
+            </a:r>
+            <a:r>
+              <a:rPr lang="en-IE" sz="2000" b="1" dirty="0">
+                <a:solidFill>
+                  <a:srgbClr val="FF0000"/>
+                </a:solidFill>
+              </a:rPr>
+              <a:t>Load</a:t>
+            </a:r>
+            <a:r>
+              <a:rPr lang="en-IE" sz="2000" dirty="0">
+                <a:solidFill>
+                  <a:srgbClr val="FF0000"/>
+                </a:solidFill>
+              </a:rPr>
+              <a:t> </a:t>
+            </a:r>
+            <a:r>
+              <a:rPr lang="en-IE" sz="2000" dirty="0"/>
+              <a:t>functionality to the </a:t>
+            </a:r>
+            <a:r>
+              <a:rPr lang="en-IE" sz="2000" b="1" dirty="0"/>
+              <a:t>menu</a:t>
+            </a:r>
+            <a:r>
+              <a:rPr lang="en-IE" sz="2000" dirty="0"/>
+              <a:t>.</a:t>
+            </a:r>
+          </a:p>
+          <a:p>
+            <a:pPr marL="457200" lvl="1" indent="0" algn="ctr">
+              <a:buNone/>
+            </a:pPr>
+            <a:endParaRPr lang="en-IE" sz="2000" dirty="0"/>
+          </a:p>
+          <a:p>
+            <a:pPr algn="ctr"/>
+            <a:endParaRPr lang="en-US" sz="2000" dirty="0"/>
+          </a:p>
+        </p:txBody>
+      </p:sp>
+      <p:pic>
+        <p:nvPicPr>
+          <p:cNvPr id="11" name="Picture 10">
+            <a:extLst>
+              <a:ext uri="{FF2B5EF4-FFF2-40B4-BE49-F238E27FC236}">
+                <a16:creationId xmlns:a16="http://schemas.microsoft.com/office/drawing/2014/main" id="{C965D4E2-B20A-44A6-AD94-FCBD65CC51F0}"/>
+              </a:ext>
+            </a:extLst>
+          </p:cNvPr>
+          <p:cNvPicPr>
+            <a:picLocks noChangeAspect="1"/>
+          </p:cNvPicPr>
+          <p:nvPr/>
+        </p:nvPicPr>
+        <p:blipFill>
+          <a:blip r:embed="rId3"/>
+          <a:stretch>
+            <a:fillRect/>
+          </a:stretch>
+        </p:blipFill>
+        <p:spPr>
+          <a:xfrm>
+            <a:off x="357024" y="154228"/>
+            <a:ext cx="2614776" cy="3468580"/>
+          </a:xfrm>
+          <a:prstGeom prst="rect">
+            <a:avLst/>
+          </a:prstGeom>
+          <a:ln>
+            <a:noFill/>
+          </a:ln>
+          <a:effectLst>
+            <a:outerShdw blurRad="292100" dist="139700" dir="2700000" algn="tl" rotWithShape="0">
+              <a:srgbClr val="333333">
+                <a:alpha val="65000"/>
+              </a:srgbClr>
+            </a:outerShdw>
+          </a:effectLst>
+        </p:spPr>
+      </p:pic>
+      <p:sp>
+        <p:nvSpPr>
+          <p:cNvPr id="13" name="Rectangle: Rounded Corners 12">
+            <a:extLst>
+              <a:ext uri="{FF2B5EF4-FFF2-40B4-BE49-F238E27FC236}">
+                <a16:creationId xmlns:a16="http://schemas.microsoft.com/office/drawing/2014/main" id="{721696B5-2FB1-4326-9F41-87341094A66A}"/>
+              </a:ext>
+            </a:extLst>
+          </p:cNvPr>
+          <p:cNvSpPr/>
+          <p:nvPr/>
+        </p:nvSpPr>
+        <p:spPr>
+          <a:xfrm>
+            <a:off x="457200" y="990600"/>
+            <a:ext cx="1828800" cy="228600"/>
+          </a:xfrm>
+          <a:prstGeom prst="roundRect">
+            <a:avLst/>
+          </a:prstGeom>
+          <a:noFill/>
+          <a:ln>
+            <a:solidFill>
+              <a:srgbClr val="C00000"/>
+            </a:solidFill>
+          </a:ln>
+        </p:spPr>
+        <p:style>
+          <a:lnRef idx="2">
+            <a:schemeClr val="accent1">
+              <a:shade val="50000"/>
+            </a:schemeClr>
+          </a:lnRef>
+          <a:fillRef idx="1">
+            <a:schemeClr val="accent1"/>
+          </a:fillRef>
+          <a:effectRef idx="0">
+            <a:schemeClr val="accent1"/>
+          </a:effectRef>
+          <a:fontRef idx="minor">
+            <a:schemeClr val="lt1"/>
+          </a:fontRef>
+        </p:style>
+        <p:txBody>
+          <a:bodyPr rtlCol="0" anchor="ctr"/>
+          <a:lstStyle/>
+          <a:p>
+            <a:pPr algn="ctr"/>
+            <a:endParaRPr lang="en-VI"/>
+          </a:p>
+        </p:txBody>
+      </p:sp>
+      <p:pic>
+        <p:nvPicPr>
+          <p:cNvPr id="4" name="Picture 3">
+            <a:extLst>
+              <a:ext uri="{FF2B5EF4-FFF2-40B4-BE49-F238E27FC236}">
+                <a16:creationId xmlns:a16="http://schemas.microsoft.com/office/drawing/2014/main" id="{46A3E0AD-4F15-49E7-ADD9-36FDE61F9189}"/>
+              </a:ext>
+            </a:extLst>
+          </p:cNvPr>
+          <p:cNvPicPr>
+            <a:picLocks noChangeAspect="1"/>
+          </p:cNvPicPr>
+          <p:nvPr/>
+        </p:nvPicPr>
+        <p:blipFill>
+          <a:blip r:embed="rId4"/>
+          <a:stretch>
+            <a:fillRect/>
+          </a:stretch>
+        </p:blipFill>
+        <p:spPr>
+          <a:xfrm>
+            <a:off x="3581400" y="1589446"/>
+            <a:ext cx="7638285" cy="3679107"/>
+          </a:xfrm>
+          <a:prstGeom prst="rect">
+            <a:avLst/>
+          </a:prstGeom>
+          <a:ln>
+            <a:noFill/>
+          </a:ln>
+          <a:effectLst>
+            <a:outerShdw blurRad="292100" dist="139700" dir="2700000" algn="tl" rotWithShape="0">
+              <a:srgbClr val="333333">
+                <a:alpha val="65000"/>
+              </a:srgbClr>
+            </a:outerShdw>
+          </a:effectLst>
+        </p:spPr>
+      </p:pic>
+      <p:sp>
+        <p:nvSpPr>
+          <p:cNvPr id="8" name="Arrow: Right 7">
+            <a:extLst>
+              <a:ext uri="{FF2B5EF4-FFF2-40B4-BE49-F238E27FC236}">
+                <a16:creationId xmlns:a16="http://schemas.microsoft.com/office/drawing/2014/main" id="{AD684C83-0898-4336-92B5-D3BF49BA212C}"/>
+              </a:ext>
+            </a:extLst>
+          </p:cNvPr>
+          <p:cNvSpPr/>
+          <p:nvPr/>
+        </p:nvSpPr>
+        <p:spPr>
+          <a:xfrm>
+            <a:off x="2971800" y="4191000"/>
+            <a:ext cx="978408" cy="484632"/>
+          </a:xfrm>
+          <a:prstGeom prst="rightArrow">
+            <a:avLst/>
+          </a:prstGeom>
+        </p:spPr>
+        <p:style>
+          <a:lnRef idx="2">
+            <a:schemeClr val="accent1">
+              <a:shade val="50000"/>
+            </a:schemeClr>
+          </a:lnRef>
+          <a:fillRef idx="1">
+            <a:schemeClr val="accent1"/>
+          </a:fillRef>
+          <a:effectRef idx="0">
+            <a:schemeClr val="accent1"/>
+          </a:effectRef>
+          <a:fontRef idx="minor">
+            <a:schemeClr val="lt1"/>
+          </a:fontRef>
+        </p:style>
+        <p:txBody>
+          <a:bodyPr rtlCol="0" anchor="ctr"/>
+          <a:lstStyle/>
+          <a:p>
+            <a:pPr algn="ctr"/>
+            <a:endParaRPr lang="en-VI"/>
+          </a:p>
+        </p:txBody>
+      </p:sp>
+      <p:sp>
+        <p:nvSpPr>
+          <p:cNvPr id="7" name="Rectangle: Rounded Corners 6">
+            <a:extLst>
+              <a:ext uri="{FF2B5EF4-FFF2-40B4-BE49-F238E27FC236}">
+                <a16:creationId xmlns:a16="http://schemas.microsoft.com/office/drawing/2014/main" id="{278BEBB4-0A7D-4EBB-9030-B9D6DC04BFC9}"/>
+              </a:ext>
+            </a:extLst>
+          </p:cNvPr>
+          <p:cNvSpPr/>
+          <p:nvPr/>
+        </p:nvSpPr>
+        <p:spPr>
+          <a:xfrm>
+            <a:off x="357024" y="154228"/>
+            <a:ext cx="1828800" cy="228600"/>
+          </a:xfrm>
+          <a:prstGeom prst="roundRect">
+            <a:avLst/>
+          </a:prstGeom>
+          <a:noFill/>
+          <a:ln>
+            <a:solidFill>
+              <a:srgbClr val="C00000"/>
+            </a:solidFill>
+          </a:ln>
+        </p:spPr>
+        <p:style>
+          <a:lnRef idx="2">
+            <a:schemeClr val="accent1">
+              <a:shade val="50000"/>
+            </a:schemeClr>
+          </a:lnRef>
+          <a:fillRef idx="1">
+            <a:schemeClr val="accent1"/>
+          </a:fillRef>
+          <a:effectRef idx="0">
+            <a:schemeClr val="accent1"/>
+          </a:effectRef>
+          <a:fontRef idx="minor">
+            <a:schemeClr val="lt1"/>
+          </a:fontRef>
+        </p:style>
+        <p:txBody>
+          <a:bodyPr rtlCol="0" anchor="ctr"/>
+          <a:lstStyle/>
+          <a:p>
+            <a:pPr algn="ctr"/>
+            <a:endParaRPr lang="en-VI"/>
+          </a:p>
+        </p:txBody>
+      </p:sp>
+    </p:spTree>
+    <p:extLst>
+      <p:ext uri="{BB962C8B-B14F-4D97-AF65-F5344CB8AC3E}">
+        <p14:creationId xmlns:p14="http://schemas.microsoft.com/office/powerpoint/2010/main" val="4408826"/>
+      </p:ext>
+    </p:extLst>
+  </p:cSld>
+  <p:clrMapOvr>
+    <a:masterClrMapping/>
+  </p:clrMapOvr>
+</p:sld>
+</file>
+
+<file path=ppt/slides/slide23.xml><?xml version="1.0" encoding="utf-8"?>
+<p:sld xmlns:a="http://schemas.openxmlformats.org/drawingml/2006/main" xmlns:r="http://schemas.openxmlformats.org/officeDocument/2006/relationships" xmlns:p="http://schemas.openxmlformats.org/presentationml/2006/main">
+  <p:cSld>
+    <p:spTree>
+      <p:nvGrpSpPr>
+        <p:cNvPr id="1" name=""/>
+        <p:cNvGrpSpPr/>
+        <p:nvPr/>
+      </p:nvGrpSpPr>
+      <p:grpSpPr>
+        <a:xfrm>
+          <a:off x="0" y="0"/>
+          <a:ext cx="0" cy="0"/>
+          <a:chOff x="0" y="0"/>
+          <a:chExt cx="0" cy="0"/>
+        </a:xfrm>
+      </p:grpSpPr>
+      <p:sp>
+        <p:nvSpPr>
+          <p:cNvPr id="3" name="Content Placeholder 2"/>
+          <p:cNvSpPr>
+            <a:spLocks noGrp="1"/>
+          </p:cNvSpPr>
+          <p:nvPr>
+            <p:ph sz="half" idx="4294967295"/>
+          </p:nvPr>
+        </p:nvSpPr>
+        <p:spPr>
+          <a:xfrm>
+            <a:off x="3810000" y="261787"/>
+            <a:ext cx="6650169" cy="412741"/>
+          </a:xfrm>
+          <a:solidFill>
+            <a:schemeClr val="accent6"/>
+          </a:solidFill>
+        </p:spPr>
+        <p:style>
+          <a:lnRef idx="2">
+            <a:schemeClr val="accent6">
+              <a:shade val="50000"/>
+            </a:schemeClr>
+          </a:lnRef>
+          <a:fillRef idx="1">
+            <a:schemeClr val="accent6"/>
+          </a:fillRef>
+          <a:effectRef idx="0">
+            <a:schemeClr val="accent6"/>
+          </a:effectRef>
+          <a:fontRef idx="minor">
+            <a:schemeClr val="lt1"/>
+          </a:fontRef>
+        </p:style>
+        <p:txBody>
+          <a:bodyPr>
+            <a:noAutofit/>
+          </a:bodyPr>
+          <a:lstStyle/>
+          <a:p>
+            <a:pPr marL="0" indent="0" algn="ctr">
+              <a:buNone/>
+            </a:pPr>
+            <a:r>
+              <a:rPr lang="en-IE" sz="2000" dirty="0"/>
+              <a:t>Adding </a:t>
+            </a:r>
+            <a:r>
+              <a:rPr lang="en-IE" sz="2000" b="1" dirty="0">
+                <a:solidFill>
+                  <a:srgbClr val="FF0000"/>
+                </a:solidFill>
+              </a:rPr>
+              <a:t>Save</a:t>
+            </a:r>
+            <a:r>
+              <a:rPr lang="en-IE" sz="2000" dirty="0"/>
+              <a:t> and </a:t>
+            </a:r>
+            <a:r>
+              <a:rPr lang="en-IE" sz="2000" b="1" dirty="0">
+                <a:solidFill>
+                  <a:srgbClr val="FF0000"/>
+                </a:solidFill>
+              </a:rPr>
+              <a:t>Load</a:t>
+            </a:r>
+            <a:r>
+              <a:rPr lang="en-IE" sz="2000" dirty="0">
+                <a:solidFill>
+                  <a:srgbClr val="FF0000"/>
+                </a:solidFill>
+              </a:rPr>
+              <a:t> </a:t>
+            </a:r>
+            <a:r>
+              <a:rPr lang="en-IE" sz="2000" dirty="0"/>
+              <a:t>functionality to the </a:t>
+            </a:r>
+            <a:r>
+              <a:rPr lang="en-IE" sz="2000" b="1" dirty="0"/>
+              <a:t>menu</a:t>
+            </a:r>
+            <a:r>
+              <a:rPr lang="en-IE" sz="2000" dirty="0"/>
+              <a:t>.</a:t>
+            </a:r>
+          </a:p>
+          <a:p>
+            <a:pPr marL="457200" lvl="1" indent="0" algn="ctr">
+              <a:buNone/>
+            </a:pPr>
+            <a:endParaRPr lang="en-IE" sz="2000" dirty="0"/>
+          </a:p>
+          <a:p>
+            <a:pPr algn="ctr"/>
+            <a:endParaRPr lang="en-US" sz="2000" dirty="0"/>
+          </a:p>
+        </p:txBody>
+      </p:sp>
+      <p:pic>
+        <p:nvPicPr>
+          <p:cNvPr id="11" name="Picture 10">
+            <a:extLst>
+              <a:ext uri="{FF2B5EF4-FFF2-40B4-BE49-F238E27FC236}">
+                <a16:creationId xmlns:a16="http://schemas.microsoft.com/office/drawing/2014/main" id="{C965D4E2-B20A-44A6-AD94-FCBD65CC51F0}"/>
+              </a:ext>
+            </a:extLst>
+          </p:cNvPr>
+          <p:cNvPicPr>
+            <a:picLocks noChangeAspect="1"/>
+          </p:cNvPicPr>
+          <p:nvPr/>
+        </p:nvPicPr>
+        <p:blipFill>
+          <a:blip r:embed="rId3"/>
+          <a:stretch>
+            <a:fillRect/>
+          </a:stretch>
+        </p:blipFill>
+        <p:spPr>
+          <a:xfrm>
+            <a:off x="357024" y="154228"/>
+            <a:ext cx="2614776" cy="3468580"/>
+          </a:xfrm>
+          <a:prstGeom prst="rect">
+            <a:avLst/>
+          </a:prstGeom>
+          <a:ln>
+            <a:noFill/>
+          </a:ln>
+          <a:effectLst>
+            <a:outerShdw blurRad="292100" dist="139700" dir="2700000" algn="tl" rotWithShape="0">
+              <a:srgbClr val="333333">
+                <a:alpha val="65000"/>
+              </a:srgbClr>
+            </a:outerShdw>
+          </a:effectLst>
+        </p:spPr>
+      </p:pic>
+      <p:sp>
+        <p:nvSpPr>
+          <p:cNvPr id="13" name="Rectangle: Rounded Corners 12">
+            <a:extLst>
+              <a:ext uri="{FF2B5EF4-FFF2-40B4-BE49-F238E27FC236}">
+                <a16:creationId xmlns:a16="http://schemas.microsoft.com/office/drawing/2014/main" id="{721696B5-2FB1-4326-9F41-87341094A66A}"/>
+              </a:ext>
+            </a:extLst>
+          </p:cNvPr>
+          <p:cNvSpPr/>
+          <p:nvPr/>
+        </p:nvSpPr>
+        <p:spPr>
+          <a:xfrm>
+            <a:off x="357024" y="2895600"/>
+            <a:ext cx="1828800" cy="457200"/>
+          </a:xfrm>
+          <a:prstGeom prst="roundRect">
+            <a:avLst/>
+          </a:prstGeom>
+          <a:noFill/>
+          <a:ln>
+            <a:solidFill>
+              <a:srgbClr val="C00000"/>
+            </a:solidFill>
+          </a:ln>
+        </p:spPr>
+        <p:style>
+          <a:lnRef idx="2">
+            <a:schemeClr val="accent1">
+              <a:shade val="50000"/>
+            </a:schemeClr>
+          </a:lnRef>
+          <a:fillRef idx="1">
+            <a:schemeClr val="accent1"/>
+          </a:fillRef>
+          <a:effectRef idx="0">
+            <a:schemeClr val="accent1"/>
+          </a:effectRef>
+          <a:fontRef idx="minor">
+            <a:schemeClr val="lt1"/>
+          </a:fontRef>
+        </p:style>
+        <p:txBody>
+          <a:bodyPr rtlCol="0" anchor="ctr"/>
+          <a:lstStyle/>
+          <a:p>
+            <a:pPr algn="ctr"/>
+            <a:endParaRPr lang="en-VI" sz="4400"/>
+          </a:p>
+        </p:txBody>
+      </p:sp>
+      <p:sp>
+        <p:nvSpPr>
+          <p:cNvPr id="4" name="Rectangle 1">
+            <a:extLst>
+              <a:ext uri="{FF2B5EF4-FFF2-40B4-BE49-F238E27FC236}">
+                <a16:creationId xmlns:a16="http://schemas.microsoft.com/office/drawing/2014/main" id="{88D46F7C-9E11-42B8-B3A4-3541544F920B}"/>
+              </a:ext>
+            </a:extLst>
+          </p:cNvPr>
+          <p:cNvSpPr>
+            <a:spLocks noChangeArrowheads="1"/>
+          </p:cNvSpPr>
+          <p:nvPr/>
+        </p:nvSpPr>
+        <p:spPr bwMode="auto">
+          <a:xfrm>
+            <a:off x="3276600" y="3795446"/>
+            <a:ext cx="6793398" cy="2554545"/>
+          </a:xfrm>
+          <a:prstGeom prst="rect">
+            <a:avLst/>
+          </a:prstGeom>
+          <a:ln/>
+        </p:spPr>
+        <p:style>
+          <a:lnRef idx="2">
+            <a:schemeClr val="accent1"/>
+          </a:lnRef>
+          <a:fillRef idx="1">
+            <a:schemeClr val="lt1"/>
+          </a:fillRef>
+          <a:effectRef idx="0">
+            <a:schemeClr val="accent1"/>
+          </a:effectRef>
+          <a:fontRef idx="minor">
+            <a:schemeClr val="dk1"/>
+          </a:fontRef>
+        </p:style>
+        <p:txBody>
+          <a:bodyPr vert="horz" wrap="none" lIns="91440" tIns="45720" rIns="91440" bIns="45720" numCol="1" anchor="ctr" anchorCtr="0" compatLnSpc="1">
+            <a:prstTxWarp prst="textNoShape">
+              <a:avLst/>
+            </a:prstTxWarp>
+            <a:spAutoFit/>
+          </a:bodyPr>
+          <a:lstStyle/>
+          <a:p>
+            <a:pPr marL="0" marR="0" lvl="0" indent="0" algn="l" defTabSz="914400" rtl="0" eaLnBrk="0" fontAlgn="base" latinLnBrk="0" hangingPunct="0">
+              <a:lnSpc>
+                <a:spcPct val="100000"/>
+              </a:lnSpc>
+              <a:spcBef>
+                <a:spcPct val="0"/>
+              </a:spcBef>
+              <a:spcAft>
+                <a:spcPct val="0"/>
+              </a:spcAft>
+              <a:buClrTx/>
+              <a:buSzTx/>
+              <a:buFontTx/>
+              <a:buNone/>
+              <a:tabLst/>
+            </a:pPr>
+            <a:r>
+              <a:rPr kumimoji="0" lang="en-VI" altLang="en-VI" sz="2000" b="0" i="1" u="none" strike="noStrike" cap="none" normalizeH="0" baseline="0" dirty="0">
+                <a:ln>
+                  <a:noFill/>
+                </a:ln>
+                <a:solidFill>
+                  <a:srgbClr val="8C8C8C"/>
+                </a:solidFill>
+                <a:effectLst/>
+                <a:latin typeface="JetBrains Mono"/>
+              </a:rPr>
+              <a:t>//load all the products into the store from a file on the hard disk</a:t>
+            </a:r>
+            <a:br>
+              <a:rPr kumimoji="0" lang="en-VI" altLang="en-VI" sz="2000" b="0" i="1" u="none" strike="noStrike" cap="none" normalizeH="0" baseline="0" dirty="0">
+                <a:ln>
+                  <a:noFill/>
+                </a:ln>
+                <a:solidFill>
+                  <a:srgbClr val="8C8C8C"/>
+                </a:solidFill>
+                <a:effectLst/>
+                <a:latin typeface="JetBrains Mono"/>
+              </a:rPr>
+            </a:br>
+            <a:r>
+              <a:rPr kumimoji="0" lang="en-VI" altLang="en-VI" sz="2000" b="0" i="0" u="none" strike="noStrike" cap="none" normalizeH="0" baseline="0" dirty="0">
+                <a:ln>
+                  <a:noFill/>
+                </a:ln>
+                <a:solidFill>
+                  <a:srgbClr val="0033B3"/>
+                </a:solidFill>
+                <a:effectLst/>
+                <a:latin typeface="JetBrains Mono"/>
+              </a:rPr>
+              <a:t>private void </a:t>
+            </a:r>
+            <a:r>
+              <a:rPr kumimoji="0" lang="en-VI" altLang="en-VI" sz="2000" b="0" i="0" u="none" strike="noStrike" cap="none" normalizeH="0" baseline="0" dirty="0" err="1">
+                <a:ln>
+                  <a:noFill/>
+                </a:ln>
+                <a:solidFill>
+                  <a:srgbClr val="00627A"/>
+                </a:solidFill>
+                <a:effectLst/>
+                <a:latin typeface="JetBrains Mono"/>
+              </a:rPr>
+              <a:t>loadProducts</a:t>
+            </a:r>
+            <a:r>
+              <a:rPr kumimoji="0" lang="en-VI" altLang="en-VI" sz="2000" b="0" i="0" u="none" strike="noStrike" cap="none" normalizeH="0" baseline="0" dirty="0">
+                <a:ln>
+                  <a:noFill/>
+                </a:ln>
+                <a:solidFill>
+                  <a:srgbClr val="080808"/>
+                </a:solidFill>
+                <a:effectLst/>
+                <a:latin typeface="JetBrains Mono"/>
+              </a:rPr>
+              <a:t>() {</a:t>
+            </a:r>
+            <a:br>
+              <a:rPr kumimoji="0" lang="en-VI" altLang="en-VI" sz="2000" b="0" i="0" u="none" strike="noStrike" cap="none" normalizeH="0" baseline="0" dirty="0">
+                <a:ln>
+                  <a:noFill/>
+                </a:ln>
+                <a:solidFill>
+                  <a:srgbClr val="080808"/>
+                </a:solidFill>
+                <a:effectLst/>
+                <a:latin typeface="JetBrains Mono"/>
+              </a:rPr>
+            </a:br>
+            <a:r>
+              <a:rPr kumimoji="0" lang="en-VI" altLang="en-VI" sz="2000" b="0" i="0" u="none" strike="noStrike" cap="none" normalizeH="0" baseline="0" dirty="0">
+                <a:ln>
+                  <a:noFill/>
+                </a:ln>
+                <a:solidFill>
+                  <a:srgbClr val="080808"/>
+                </a:solidFill>
+                <a:effectLst/>
+                <a:latin typeface="JetBrains Mono"/>
+              </a:rPr>
+              <a:t>    </a:t>
+            </a:r>
+            <a:r>
+              <a:rPr kumimoji="0" lang="en-VI" altLang="en-VI" sz="2000" b="0" i="0" u="none" strike="noStrike" cap="none" normalizeH="0" baseline="0" dirty="0">
+                <a:ln>
+                  <a:noFill/>
+                </a:ln>
+                <a:solidFill>
+                  <a:srgbClr val="0033B3"/>
+                </a:solidFill>
+                <a:effectLst/>
+                <a:latin typeface="JetBrains Mono"/>
+              </a:rPr>
+              <a:t>try </a:t>
+            </a:r>
+            <a:r>
+              <a:rPr kumimoji="0" lang="en-VI" altLang="en-VI" sz="2000" b="0" i="0" u="none" strike="noStrike" cap="none" normalizeH="0" baseline="0" dirty="0">
+                <a:ln>
+                  <a:noFill/>
+                </a:ln>
+                <a:solidFill>
+                  <a:srgbClr val="080808"/>
+                </a:solidFill>
+                <a:effectLst/>
+                <a:latin typeface="JetBrains Mono"/>
+              </a:rPr>
+              <a:t>{</a:t>
+            </a:r>
+            <a:br>
+              <a:rPr kumimoji="0" lang="en-VI" altLang="en-VI" sz="2000" b="0" i="0" u="none" strike="noStrike" cap="none" normalizeH="0" baseline="0" dirty="0">
+                <a:ln>
+                  <a:noFill/>
+                </a:ln>
+                <a:solidFill>
+                  <a:srgbClr val="080808"/>
+                </a:solidFill>
+                <a:effectLst/>
+                <a:latin typeface="JetBrains Mono"/>
+              </a:rPr>
+            </a:br>
+            <a:r>
+              <a:rPr kumimoji="0" lang="en-VI" altLang="en-VI" sz="2000" b="0" i="0" u="none" strike="noStrike" cap="none" normalizeH="0" baseline="0" dirty="0">
+                <a:ln>
+                  <a:noFill/>
+                </a:ln>
+                <a:solidFill>
+                  <a:srgbClr val="080808"/>
+                </a:solidFill>
+                <a:effectLst/>
+                <a:latin typeface="JetBrains Mono"/>
+              </a:rPr>
+              <a:t>        </a:t>
+            </a:r>
+            <a:r>
+              <a:rPr kumimoji="0" lang="en-VI" altLang="en-VI" sz="2000" b="0" i="0" u="none" strike="noStrike" cap="none" normalizeH="0" baseline="0" dirty="0" err="1">
+                <a:ln>
+                  <a:noFill/>
+                </a:ln>
+                <a:solidFill>
+                  <a:srgbClr val="871094"/>
+                </a:solidFill>
+                <a:effectLst/>
+                <a:latin typeface="JetBrains Mono"/>
+              </a:rPr>
+              <a:t>store</a:t>
+            </a:r>
+            <a:r>
+              <a:rPr kumimoji="0" lang="en-VI" altLang="en-VI" sz="2000" b="0" i="0" u="none" strike="noStrike" cap="none" normalizeH="0" baseline="0" dirty="0" err="1">
+                <a:ln>
+                  <a:noFill/>
+                </a:ln>
+                <a:solidFill>
+                  <a:srgbClr val="080808"/>
+                </a:solidFill>
+                <a:effectLst/>
+                <a:latin typeface="JetBrains Mono"/>
+              </a:rPr>
+              <a:t>.load</a:t>
+            </a:r>
+            <a:r>
+              <a:rPr kumimoji="0" lang="en-VI" altLang="en-VI" sz="2000" b="0" i="0" u="none" strike="noStrike" cap="none" normalizeH="0" baseline="0" dirty="0">
+                <a:ln>
+                  <a:noFill/>
+                </a:ln>
+                <a:solidFill>
+                  <a:srgbClr val="080808"/>
+                </a:solidFill>
+                <a:effectLst/>
+                <a:latin typeface="JetBrains Mono"/>
+              </a:rPr>
+              <a:t>();</a:t>
+            </a:r>
+            <a:br>
+              <a:rPr kumimoji="0" lang="en-VI" altLang="en-VI" sz="2000" b="0" i="0" u="none" strike="noStrike" cap="none" normalizeH="0" baseline="0" dirty="0">
+                <a:ln>
+                  <a:noFill/>
+                </a:ln>
+                <a:solidFill>
+                  <a:srgbClr val="080808"/>
+                </a:solidFill>
+                <a:effectLst/>
+                <a:latin typeface="JetBrains Mono"/>
+              </a:rPr>
+            </a:br>
+            <a:r>
+              <a:rPr kumimoji="0" lang="en-VI" altLang="en-VI" sz="2000" b="0" i="0" u="none" strike="noStrike" cap="none" normalizeH="0" baseline="0" dirty="0">
+                <a:ln>
+                  <a:noFill/>
+                </a:ln>
+                <a:solidFill>
+                  <a:srgbClr val="080808"/>
+                </a:solidFill>
+                <a:effectLst/>
+                <a:latin typeface="JetBrains Mono"/>
+              </a:rPr>
+              <a:t>    } </a:t>
+            </a:r>
+            <a:r>
+              <a:rPr kumimoji="0" lang="en-VI" altLang="en-VI" sz="2000" b="0" i="0" u="none" strike="noStrike" cap="none" normalizeH="0" baseline="0" dirty="0">
+                <a:ln>
+                  <a:noFill/>
+                </a:ln>
+                <a:solidFill>
+                  <a:srgbClr val="0033B3"/>
+                </a:solidFill>
+                <a:effectLst/>
+                <a:latin typeface="JetBrains Mono"/>
+              </a:rPr>
+              <a:t>catch </a:t>
+            </a:r>
+            <a:r>
+              <a:rPr kumimoji="0" lang="en-VI" altLang="en-VI" sz="2000" b="0" i="0" u="none" strike="noStrike" cap="none" normalizeH="0" baseline="0" dirty="0">
+                <a:ln>
+                  <a:noFill/>
+                </a:ln>
+                <a:solidFill>
+                  <a:srgbClr val="080808"/>
+                </a:solidFill>
+                <a:effectLst/>
+                <a:latin typeface="JetBrains Mono"/>
+              </a:rPr>
+              <a:t>(</a:t>
+            </a:r>
+            <a:r>
+              <a:rPr kumimoji="0" lang="en-VI" altLang="en-VI" sz="2000" b="0" i="0" u="none" strike="noStrike" cap="none" normalizeH="0" baseline="0" dirty="0">
+                <a:ln>
+                  <a:noFill/>
+                </a:ln>
+                <a:solidFill>
+                  <a:srgbClr val="000000"/>
+                </a:solidFill>
+                <a:effectLst/>
+                <a:latin typeface="JetBrains Mono"/>
+              </a:rPr>
+              <a:t>Exception </a:t>
+            </a:r>
+            <a:r>
+              <a:rPr kumimoji="0" lang="en-VI" altLang="en-VI" sz="2000" b="0" i="0" u="none" strike="noStrike" cap="none" normalizeH="0" baseline="0" dirty="0">
+                <a:ln>
+                  <a:noFill/>
+                </a:ln>
+                <a:solidFill>
+                  <a:srgbClr val="080808"/>
+                </a:solidFill>
+                <a:effectLst/>
+                <a:latin typeface="JetBrains Mono"/>
+              </a:rPr>
+              <a:t>e) {</a:t>
+            </a:r>
+            <a:br>
+              <a:rPr kumimoji="0" lang="en-VI" altLang="en-VI" sz="2000" b="0" i="0" u="none" strike="noStrike" cap="none" normalizeH="0" baseline="0" dirty="0">
+                <a:ln>
+                  <a:noFill/>
+                </a:ln>
+                <a:solidFill>
+                  <a:srgbClr val="080808"/>
+                </a:solidFill>
+                <a:effectLst/>
+                <a:latin typeface="JetBrains Mono"/>
+              </a:rPr>
+            </a:br>
+            <a:r>
+              <a:rPr kumimoji="0" lang="en-VI" altLang="en-VI" sz="2000" b="0" i="0" u="none" strike="noStrike" cap="none" normalizeH="0" baseline="0" dirty="0">
+                <a:ln>
+                  <a:noFill/>
+                </a:ln>
+                <a:solidFill>
+                  <a:srgbClr val="080808"/>
+                </a:solidFill>
+                <a:effectLst/>
+                <a:latin typeface="JetBrains Mono"/>
+              </a:rPr>
+              <a:t>        </a:t>
+            </a:r>
+            <a:r>
+              <a:rPr kumimoji="0" lang="en-VI" altLang="en-VI" sz="2000" b="0" i="0" u="none" strike="noStrike" cap="none" normalizeH="0" baseline="0" dirty="0" err="1">
+                <a:ln>
+                  <a:noFill/>
+                </a:ln>
+                <a:solidFill>
+                  <a:srgbClr val="000000"/>
+                </a:solidFill>
+                <a:effectLst/>
+                <a:latin typeface="JetBrains Mono"/>
+              </a:rPr>
+              <a:t>System</a:t>
+            </a:r>
+            <a:r>
+              <a:rPr kumimoji="0" lang="en-VI" altLang="en-VI" sz="2000" b="0" i="0" u="none" strike="noStrike" cap="none" normalizeH="0" baseline="0" dirty="0" err="1">
+                <a:ln>
+                  <a:noFill/>
+                </a:ln>
+                <a:solidFill>
+                  <a:srgbClr val="080808"/>
+                </a:solidFill>
+                <a:effectLst/>
+                <a:latin typeface="JetBrains Mono"/>
+              </a:rPr>
+              <a:t>.</a:t>
+            </a:r>
+            <a:r>
+              <a:rPr kumimoji="0" lang="en-VI" altLang="en-VI" sz="2000" b="0" i="1" u="none" strike="noStrike" cap="none" normalizeH="0" baseline="0" dirty="0" err="1">
+                <a:ln>
+                  <a:noFill/>
+                </a:ln>
+                <a:solidFill>
+                  <a:srgbClr val="871094"/>
+                </a:solidFill>
+                <a:effectLst/>
+                <a:latin typeface="JetBrains Mono"/>
+              </a:rPr>
+              <a:t>err</a:t>
+            </a:r>
+            <a:r>
+              <a:rPr kumimoji="0" lang="en-VI" altLang="en-VI" sz="2000" b="0" i="0" u="none" strike="noStrike" cap="none" normalizeH="0" baseline="0" dirty="0" err="1">
+                <a:ln>
+                  <a:noFill/>
+                </a:ln>
+                <a:solidFill>
+                  <a:srgbClr val="080808"/>
+                </a:solidFill>
+                <a:effectLst/>
+                <a:latin typeface="JetBrains Mono"/>
+              </a:rPr>
+              <a:t>.println</a:t>
+            </a:r>
+            <a:r>
+              <a:rPr kumimoji="0" lang="en-VI" altLang="en-VI" sz="2000" b="0" i="0" u="none" strike="noStrike" cap="none" normalizeH="0" baseline="0" dirty="0">
+                <a:ln>
+                  <a:noFill/>
+                </a:ln>
+                <a:solidFill>
+                  <a:srgbClr val="080808"/>
+                </a:solidFill>
+                <a:effectLst/>
+                <a:latin typeface="JetBrains Mono"/>
+              </a:rPr>
+              <a:t>(</a:t>
+            </a:r>
+            <a:r>
+              <a:rPr kumimoji="0" lang="en-VI" altLang="en-VI" sz="2000" b="0" i="0" u="none" strike="noStrike" cap="none" normalizeH="0" baseline="0" dirty="0">
+                <a:ln>
+                  <a:noFill/>
+                </a:ln>
+                <a:solidFill>
+                  <a:srgbClr val="067D17"/>
+                </a:solidFill>
+                <a:effectLst/>
+                <a:latin typeface="JetBrains Mono"/>
+              </a:rPr>
+              <a:t>"Error reading from file: " </a:t>
+            </a:r>
+            <a:r>
+              <a:rPr kumimoji="0" lang="en-VI" altLang="en-VI" sz="2000" b="0" i="0" u="none" strike="noStrike" cap="none" normalizeH="0" baseline="0" dirty="0">
+                <a:ln>
+                  <a:noFill/>
+                </a:ln>
+                <a:solidFill>
+                  <a:srgbClr val="080808"/>
+                </a:solidFill>
+                <a:effectLst/>
+                <a:latin typeface="JetBrains Mono"/>
+              </a:rPr>
+              <a:t>+ e);</a:t>
+            </a:r>
+            <a:br>
+              <a:rPr kumimoji="0" lang="en-VI" altLang="en-VI" sz="2000" b="0" i="0" u="none" strike="noStrike" cap="none" normalizeH="0" baseline="0" dirty="0">
+                <a:ln>
+                  <a:noFill/>
+                </a:ln>
+                <a:solidFill>
+                  <a:srgbClr val="080808"/>
+                </a:solidFill>
+                <a:effectLst/>
+                <a:latin typeface="JetBrains Mono"/>
+              </a:rPr>
+            </a:br>
+            <a:r>
+              <a:rPr kumimoji="0" lang="en-VI" altLang="en-VI" sz="2000" b="0" i="0" u="none" strike="noStrike" cap="none" normalizeH="0" baseline="0" dirty="0">
+                <a:ln>
+                  <a:noFill/>
+                </a:ln>
+                <a:solidFill>
+                  <a:srgbClr val="080808"/>
+                </a:solidFill>
+                <a:effectLst/>
+                <a:latin typeface="JetBrains Mono"/>
+              </a:rPr>
+              <a:t>    }</a:t>
+            </a:r>
+            <a:br>
+              <a:rPr kumimoji="0" lang="en-VI" altLang="en-VI" sz="2000" b="0" i="0" u="none" strike="noStrike" cap="none" normalizeH="0" baseline="0" dirty="0">
+                <a:ln>
+                  <a:noFill/>
+                </a:ln>
+                <a:solidFill>
+                  <a:srgbClr val="080808"/>
+                </a:solidFill>
+                <a:effectLst/>
+                <a:latin typeface="JetBrains Mono"/>
+              </a:rPr>
+            </a:br>
+            <a:r>
+              <a:rPr kumimoji="0" lang="en-VI" altLang="en-VI" sz="2000" b="0" i="0" u="none" strike="noStrike" cap="none" normalizeH="0" baseline="0" dirty="0">
+                <a:ln>
+                  <a:noFill/>
+                </a:ln>
+                <a:solidFill>
+                  <a:srgbClr val="080808"/>
+                </a:solidFill>
+                <a:effectLst/>
+                <a:latin typeface="JetBrains Mono"/>
+              </a:rPr>
+              <a:t>}</a:t>
+            </a:r>
+            <a:endParaRPr kumimoji="0" lang="en-VI" altLang="en-VI" sz="4800" b="0" i="0" u="none" strike="noStrike" cap="none" normalizeH="0" baseline="0" dirty="0">
+              <a:ln>
+                <a:noFill/>
+              </a:ln>
+              <a:solidFill>
+                <a:schemeClr val="tx1"/>
+              </a:solidFill>
+              <a:effectLst/>
+              <a:latin typeface="Arial" panose="020B0604020202020204" pitchFamily="34" charset="0"/>
+            </a:endParaRPr>
+          </a:p>
+        </p:txBody>
+      </p:sp>
+      <p:sp>
+        <p:nvSpPr>
+          <p:cNvPr id="7" name="Rectangle 6">
+            <a:extLst>
+              <a:ext uri="{FF2B5EF4-FFF2-40B4-BE49-F238E27FC236}">
+                <a16:creationId xmlns:a16="http://schemas.microsoft.com/office/drawing/2014/main" id="{0F31747B-010E-4FC5-855F-F09CE932119B}"/>
+              </a:ext>
+            </a:extLst>
+          </p:cNvPr>
+          <p:cNvSpPr>
+            <a:spLocks noChangeArrowheads="1"/>
+          </p:cNvSpPr>
+          <p:nvPr/>
+        </p:nvSpPr>
+        <p:spPr bwMode="auto">
+          <a:xfrm>
+            <a:off x="3272883" y="874455"/>
+            <a:ext cx="6303072" cy="2554545"/>
+          </a:xfrm>
+          <a:prstGeom prst="rect">
+            <a:avLst/>
+          </a:prstGeom>
+          <a:ln/>
+        </p:spPr>
+        <p:style>
+          <a:lnRef idx="2">
+            <a:schemeClr val="accent1"/>
+          </a:lnRef>
+          <a:fillRef idx="1">
+            <a:schemeClr val="lt1"/>
+          </a:fillRef>
+          <a:effectRef idx="0">
+            <a:schemeClr val="accent1"/>
+          </a:effectRef>
+          <a:fontRef idx="minor">
+            <a:schemeClr val="dk1"/>
+          </a:fontRef>
+        </p:style>
+        <p:txBody>
+          <a:bodyPr vert="horz" wrap="none" lIns="91440" tIns="45720" rIns="91440" bIns="45720" numCol="1" anchor="ctr" anchorCtr="0" compatLnSpc="1">
+            <a:prstTxWarp prst="textNoShape">
+              <a:avLst/>
+            </a:prstTxWarp>
+            <a:spAutoFit/>
+          </a:bodyPr>
+          <a:lstStyle/>
+          <a:p>
+            <a:pPr marL="0" marR="0" lvl="0" indent="0" algn="l" defTabSz="914400" rtl="0" eaLnBrk="0" fontAlgn="base" latinLnBrk="0" hangingPunct="0">
+              <a:lnSpc>
+                <a:spcPct val="100000"/>
+              </a:lnSpc>
+              <a:spcBef>
+                <a:spcPct val="0"/>
+              </a:spcBef>
+              <a:spcAft>
+                <a:spcPct val="0"/>
+              </a:spcAft>
+              <a:buClrTx/>
+              <a:buSzTx/>
+              <a:buFontTx/>
+              <a:buNone/>
+              <a:tabLst/>
+            </a:pPr>
+            <a:r>
+              <a:rPr kumimoji="0" lang="en-VI" altLang="en-VI" sz="2000" b="0" i="1" u="none" strike="noStrike" cap="none" normalizeH="0" baseline="0" dirty="0">
+                <a:ln>
+                  <a:noFill/>
+                </a:ln>
+                <a:solidFill>
+                  <a:srgbClr val="8C8C8C"/>
+                </a:solidFill>
+                <a:effectLst/>
+                <a:latin typeface="JetBrains Mono"/>
+              </a:rPr>
+              <a:t>//save all the products in the store to a file on the hard disk</a:t>
+            </a:r>
+            <a:br>
+              <a:rPr kumimoji="0" lang="en-VI" altLang="en-VI" sz="2000" b="0" i="1" u="none" strike="noStrike" cap="none" normalizeH="0" baseline="0" dirty="0">
+                <a:ln>
+                  <a:noFill/>
+                </a:ln>
+                <a:solidFill>
+                  <a:srgbClr val="8C8C8C"/>
+                </a:solidFill>
+                <a:effectLst/>
+                <a:latin typeface="JetBrains Mono"/>
+              </a:rPr>
+            </a:br>
+            <a:r>
+              <a:rPr kumimoji="0" lang="en-VI" altLang="en-VI" sz="2000" b="0" i="0" u="none" strike="noStrike" cap="none" normalizeH="0" baseline="0" dirty="0">
+                <a:ln>
+                  <a:noFill/>
+                </a:ln>
+                <a:solidFill>
+                  <a:srgbClr val="0033B3"/>
+                </a:solidFill>
+                <a:effectLst/>
+                <a:latin typeface="JetBrains Mono"/>
+              </a:rPr>
+              <a:t>private void </a:t>
+            </a:r>
+            <a:r>
+              <a:rPr kumimoji="0" lang="en-VI" altLang="en-VI" sz="2000" b="0" i="0" u="none" strike="noStrike" cap="none" normalizeH="0" baseline="0" dirty="0" err="1">
+                <a:ln>
+                  <a:noFill/>
+                </a:ln>
+                <a:solidFill>
+                  <a:srgbClr val="00627A"/>
+                </a:solidFill>
+                <a:effectLst/>
+                <a:latin typeface="JetBrains Mono"/>
+              </a:rPr>
+              <a:t>saveProducts</a:t>
+            </a:r>
+            <a:r>
+              <a:rPr kumimoji="0" lang="en-VI" altLang="en-VI" sz="2000" b="0" i="0" u="none" strike="noStrike" cap="none" normalizeH="0" baseline="0" dirty="0">
+                <a:ln>
+                  <a:noFill/>
+                </a:ln>
+                <a:solidFill>
+                  <a:srgbClr val="080808"/>
+                </a:solidFill>
+                <a:effectLst/>
+                <a:latin typeface="JetBrains Mono"/>
+              </a:rPr>
+              <a:t>() {</a:t>
+            </a:r>
+            <a:br>
+              <a:rPr kumimoji="0" lang="en-VI" altLang="en-VI" sz="2000" b="0" i="0" u="none" strike="noStrike" cap="none" normalizeH="0" baseline="0" dirty="0">
+                <a:ln>
+                  <a:noFill/>
+                </a:ln>
+                <a:solidFill>
+                  <a:srgbClr val="080808"/>
+                </a:solidFill>
+                <a:effectLst/>
+                <a:latin typeface="JetBrains Mono"/>
+              </a:rPr>
+            </a:br>
+            <a:r>
+              <a:rPr kumimoji="0" lang="en-VI" altLang="en-VI" sz="2000" b="0" i="0" u="none" strike="noStrike" cap="none" normalizeH="0" baseline="0" dirty="0">
+                <a:ln>
+                  <a:noFill/>
+                </a:ln>
+                <a:solidFill>
+                  <a:srgbClr val="080808"/>
+                </a:solidFill>
+                <a:effectLst/>
+                <a:latin typeface="JetBrains Mono"/>
+              </a:rPr>
+              <a:t>    </a:t>
+            </a:r>
+            <a:r>
+              <a:rPr kumimoji="0" lang="en-VI" altLang="en-VI" sz="2000" b="0" i="0" u="none" strike="noStrike" cap="none" normalizeH="0" baseline="0" dirty="0">
+                <a:ln>
+                  <a:noFill/>
+                </a:ln>
+                <a:solidFill>
+                  <a:srgbClr val="0033B3"/>
+                </a:solidFill>
+                <a:effectLst/>
+                <a:latin typeface="JetBrains Mono"/>
+              </a:rPr>
+              <a:t>try </a:t>
+            </a:r>
+            <a:r>
+              <a:rPr kumimoji="0" lang="en-VI" altLang="en-VI" sz="2000" b="0" i="0" u="none" strike="noStrike" cap="none" normalizeH="0" baseline="0" dirty="0">
+                <a:ln>
+                  <a:noFill/>
+                </a:ln>
+                <a:solidFill>
+                  <a:srgbClr val="080808"/>
+                </a:solidFill>
+                <a:effectLst/>
+                <a:latin typeface="JetBrains Mono"/>
+              </a:rPr>
+              <a:t>{</a:t>
+            </a:r>
+            <a:br>
+              <a:rPr kumimoji="0" lang="en-VI" altLang="en-VI" sz="2000" b="0" i="0" u="none" strike="noStrike" cap="none" normalizeH="0" baseline="0" dirty="0">
+                <a:ln>
+                  <a:noFill/>
+                </a:ln>
+                <a:solidFill>
+                  <a:srgbClr val="080808"/>
+                </a:solidFill>
+                <a:effectLst/>
+                <a:latin typeface="JetBrains Mono"/>
+              </a:rPr>
+            </a:br>
+            <a:r>
+              <a:rPr kumimoji="0" lang="en-VI" altLang="en-VI" sz="2000" b="0" i="0" u="none" strike="noStrike" cap="none" normalizeH="0" baseline="0" dirty="0">
+                <a:ln>
+                  <a:noFill/>
+                </a:ln>
+                <a:solidFill>
+                  <a:srgbClr val="080808"/>
+                </a:solidFill>
+                <a:effectLst/>
+                <a:latin typeface="JetBrains Mono"/>
+              </a:rPr>
+              <a:t>        </a:t>
+            </a:r>
+            <a:r>
+              <a:rPr kumimoji="0" lang="en-VI" altLang="en-VI" sz="2000" b="0" i="0" u="none" strike="noStrike" cap="none" normalizeH="0" baseline="0" dirty="0" err="1">
+                <a:ln>
+                  <a:noFill/>
+                </a:ln>
+                <a:solidFill>
+                  <a:srgbClr val="871094"/>
+                </a:solidFill>
+                <a:effectLst/>
+                <a:latin typeface="JetBrains Mono"/>
+              </a:rPr>
+              <a:t>store</a:t>
+            </a:r>
+            <a:r>
+              <a:rPr kumimoji="0" lang="en-VI" altLang="en-VI" sz="2000" b="0" i="0" u="none" strike="noStrike" cap="none" normalizeH="0" baseline="0" dirty="0" err="1">
+                <a:ln>
+                  <a:noFill/>
+                </a:ln>
+                <a:solidFill>
+                  <a:srgbClr val="080808"/>
+                </a:solidFill>
+                <a:effectLst/>
+                <a:latin typeface="JetBrains Mono"/>
+              </a:rPr>
+              <a:t>.save</a:t>
+            </a:r>
+            <a:r>
+              <a:rPr kumimoji="0" lang="en-VI" altLang="en-VI" sz="2000" b="0" i="0" u="none" strike="noStrike" cap="none" normalizeH="0" baseline="0" dirty="0">
+                <a:ln>
+                  <a:noFill/>
+                </a:ln>
+                <a:solidFill>
+                  <a:srgbClr val="080808"/>
+                </a:solidFill>
+                <a:effectLst/>
+                <a:latin typeface="JetBrains Mono"/>
+              </a:rPr>
+              <a:t>();</a:t>
+            </a:r>
+            <a:br>
+              <a:rPr kumimoji="0" lang="en-VI" altLang="en-VI" sz="2000" b="0" i="0" u="none" strike="noStrike" cap="none" normalizeH="0" baseline="0" dirty="0">
+                <a:ln>
+                  <a:noFill/>
+                </a:ln>
+                <a:solidFill>
+                  <a:srgbClr val="080808"/>
+                </a:solidFill>
+                <a:effectLst/>
+                <a:latin typeface="JetBrains Mono"/>
+              </a:rPr>
+            </a:br>
+            <a:r>
+              <a:rPr kumimoji="0" lang="en-VI" altLang="en-VI" sz="2000" b="0" i="0" u="none" strike="noStrike" cap="none" normalizeH="0" baseline="0" dirty="0">
+                <a:ln>
+                  <a:noFill/>
+                </a:ln>
+                <a:solidFill>
+                  <a:srgbClr val="080808"/>
+                </a:solidFill>
+                <a:effectLst/>
+                <a:latin typeface="JetBrains Mono"/>
+              </a:rPr>
+              <a:t>    } </a:t>
+            </a:r>
+            <a:r>
+              <a:rPr kumimoji="0" lang="en-VI" altLang="en-VI" sz="2000" b="0" i="0" u="none" strike="noStrike" cap="none" normalizeH="0" baseline="0" dirty="0">
+                <a:ln>
+                  <a:noFill/>
+                </a:ln>
+                <a:solidFill>
+                  <a:srgbClr val="0033B3"/>
+                </a:solidFill>
+                <a:effectLst/>
+                <a:latin typeface="JetBrains Mono"/>
+              </a:rPr>
+              <a:t>catch </a:t>
+            </a:r>
+            <a:r>
+              <a:rPr kumimoji="0" lang="en-VI" altLang="en-VI" sz="2000" b="0" i="0" u="none" strike="noStrike" cap="none" normalizeH="0" baseline="0" dirty="0">
+                <a:ln>
+                  <a:noFill/>
+                </a:ln>
+                <a:solidFill>
+                  <a:srgbClr val="080808"/>
+                </a:solidFill>
+                <a:effectLst/>
+                <a:latin typeface="JetBrains Mono"/>
+              </a:rPr>
+              <a:t>(</a:t>
+            </a:r>
+            <a:r>
+              <a:rPr kumimoji="0" lang="en-VI" altLang="en-VI" sz="2000" b="0" i="0" u="none" strike="noStrike" cap="none" normalizeH="0" baseline="0" dirty="0">
+                <a:ln>
+                  <a:noFill/>
+                </a:ln>
+                <a:solidFill>
+                  <a:srgbClr val="000000"/>
+                </a:solidFill>
+                <a:effectLst/>
+                <a:latin typeface="JetBrains Mono"/>
+              </a:rPr>
+              <a:t>Exception </a:t>
+            </a:r>
+            <a:r>
+              <a:rPr kumimoji="0" lang="en-VI" altLang="en-VI" sz="2000" b="0" i="0" u="none" strike="noStrike" cap="none" normalizeH="0" baseline="0" dirty="0">
+                <a:ln>
+                  <a:noFill/>
+                </a:ln>
+                <a:solidFill>
+                  <a:srgbClr val="080808"/>
+                </a:solidFill>
+                <a:effectLst/>
+                <a:latin typeface="JetBrains Mono"/>
+              </a:rPr>
+              <a:t>e) {</a:t>
+            </a:r>
+            <a:br>
+              <a:rPr kumimoji="0" lang="en-VI" altLang="en-VI" sz="2000" b="0" i="0" u="none" strike="noStrike" cap="none" normalizeH="0" baseline="0" dirty="0">
+                <a:ln>
+                  <a:noFill/>
+                </a:ln>
+                <a:solidFill>
+                  <a:srgbClr val="080808"/>
+                </a:solidFill>
+                <a:effectLst/>
+                <a:latin typeface="JetBrains Mono"/>
+              </a:rPr>
+            </a:br>
+            <a:r>
+              <a:rPr kumimoji="0" lang="en-VI" altLang="en-VI" sz="2000" b="0" i="0" u="none" strike="noStrike" cap="none" normalizeH="0" baseline="0" dirty="0">
+                <a:ln>
+                  <a:noFill/>
+                </a:ln>
+                <a:solidFill>
+                  <a:srgbClr val="080808"/>
+                </a:solidFill>
+                <a:effectLst/>
+                <a:latin typeface="JetBrains Mono"/>
+              </a:rPr>
+              <a:t>        </a:t>
+            </a:r>
+            <a:r>
+              <a:rPr kumimoji="0" lang="en-VI" altLang="en-VI" sz="2000" b="0" i="0" u="none" strike="noStrike" cap="none" normalizeH="0" baseline="0" dirty="0" err="1">
+                <a:ln>
+                  <a:noFill/>
+                </a:ln>
+                <a:solidFill>
+                  <a:srgbClr val="000000"/>
+                </a:solidFill>
+                <a:effectLst/>
+                <a:latin typeface="JetBrains Mono"/>
+              </a:rPr>
+              <a:t>System</a:t>
+            </a:r>
+            <a:r>
+              <a:rPr kumimoji="0" lang="en-VI" altLang="en-VI" sz="2000" b="0" i="0" u="none" strike="noStrike" cap="none" normalizeH="0" baseline="0" dirty="0" err="1">
+                <a:ln>
+                  <a:noFill/>
+                </a:ln>
+                <a:solidFill>
+                  <a:srgbClr val="080808"/>
+                </a:solidFill>
+                <a:effectLst/>
+                <a:latin typeface="JetBrains Mono"/>
+              </a:rPr>
+              <a:t>.</a:t>
+            </a:r>
+            <a:r>
+              <a:rPr kumimoji="0" lang="en-VI" altLang="en-VI" sz="2000" b="0" i="1" u="none" strike="noStrike" cap="none" normalizeH="0" baseline="0" dirty="0" err="1">
+                <a:ln>
+                  <a:noFill/>
+                </a:ln>
+                <a:solidFill>
+                  <a:srgbClr val="871094"/>
+                </a:solidFill>
+                <a:effectLst/>
+                <a:latin typeface="JetBrains Mono"/>
+              </a:rPr>
+              <a:t>err</a:t>
+            </a:r>
+            <a:r>
+              <a:rPr kumimoji="0" lang="en-VI" altLang="en-VI" sz="2000" b="0" i="0" u="none" strike="noStrike" cap="none" normalizeH="0" baseline="0" dirty="0" err="1">
+                <a:ln>
+                  <a:noFill/>
+                </a:ln>
+                <a:solidFill>
+                  <a:srgbClr val="080808"/>
+                </a:solidFill>
+                <a:effectLst/>
+                <a:latin typeface="JetBrains Mono"/>
+              </a:rPr>
+              <a:t>.println</a:t>
+            </a:r>
+            <a:r>
+              <a:rPr kumimoji="0" lang="en-VI" altLang="en-VI" sz="2000" b="0" i="0" u="none" strike="noStrike" cap="none" normalizeH="0" baseline="0" dirty="0">
+                <a:ln>
+                  <a:noFill/>
+                </a:ln>
+                <a:solidFill>
+                  <a:srgbClr val="080808"/>
+                </a:solidFill>
+                <a:effectLst/>
+                <a:latin typeface="JetBrains Mono"/>
+              </a:rPr>
+              <a:t>(</a:t>
+            </a:r>
+            <a:r>
+              <a:rPr kumimoji="0" lang="en-VI" altLang="en-VI" sz="2000" b="0" i="0" u="none" strike="noStrike" cap="none" normalizeH="0" baseline="0" dirty="0">
+                <a:ln>
+                  <a:noFill/>
+                </a:ln>
+                <a:solidFill>
+                  <a:srgbClr val="067D17"/>
+                </a:solidFill>
+                <a:effectLst/>
+                <a:latin typeface="JetBrains Mono"/>
+              </a:rPr>
+              <a:t>"Error writing to file: " </a:t>
+            </a:r>
+            <a:r>
+              <a:rPr kumimoji="0" lang="en-VI" altLang="en-VI" sz="2000" b="0" i="0" u="none" strike="noStrike" cap="none" normalizeH="0" baseline="0" dirty="0">
+                <a:ln>
+                  <a:noFill/>
+                </a:ln>
+                <a:solidFill>
+                  <a:srgbClr val="080808"/>
+                </a:solidFill>
+                <a:effectLst/>
+                <a:latin typeface="JetBrains Mono"/>
+              </a:rPr>
+              <a:t>+ e);</a:t>
+            </a:r>
+            <a:br>
+              <a:rPr kumimoji="0" lang="en-VI" altLang="en-VI" sz="2000" b="0" i="0" u="none" strike="noStrike" cap="none" normalizeH="0" baseline="0" dirty="0">
+                <a:ln>
+                  <a:noFill/>
+                </a:ln>
+                <a:solidFill>
+                  <a:srgbClr val="080808"/>
+                </a:solidFill>
+                <a:effectLst/>
+                <a:latin typeface="JetBrains Mono"/>
+              </a:rPr>
+            </a:br>
+            <a:r>
+              <a:rPr kumimoji="0" lang="en-VI" altLang="en-VI" sz="2000" b="0" i="0" u="none" strike="noStrike" cap="none" normalizeH="0" baseline="0" dirty="0">
+                <a:ln>
+                  <a:noFill/>
+                </a:ln>
+                <a:solidFill>
+                  <a:srgbClr val="080808"/>
+                </a:solidFill>
+                <a:effectLst/>
+                <a:latin typeface="JetBrains Mono"/>
+              </a:rPr>
+              <a:t>    }</a:t>
+            </a:r>
+            <a:br>
+              <a:rPr kumimoji="0" lang="en-VI" altLang="en-VI" sz="2000" b="0" i="0" u="none" strike="noStrike" cap="none" normalizeH="0" baseline="0" dirty="0">
+                <a:ln>
+                  <a:noFill/>
+                </a:ln>
+                <a:solidFill>
+                  <a:srgbClr val="080808"/>
+                </a:solidFill>
+                <a:effectLst/>
+                <a:latin typeface="JetBrains Mono"/>
+              </a:rPr>
+            </a:br>
+            <a:r>
+              <a:rPr kumimoji="0" lang="en-VI" altLang="en-VI" sz="2000" b="0" i="0" u="none" strike="noStrike" cap="none" normalizeH="0" baseline="0" dirty="0">
+                <a:ln>
+                  <a:noFill/>
+                </a:ln>
+                <a:solidFill>
+                  <a:srgbClr val="080808"/>
+                </a:solidFill>
+                <a:effectLst/>
+                <a:latin typeface="JetBrains Mono"/>
+              </a:rPr>
+              <a:t>}</a:t>
+            </a:r>
+            <a:endParaRPr kumimoji="0" lang="en-VI" altLang="en-VI" sz="4800" b="0" i="0" u="none" strike="noStrike" cap="none" normalizeH="0" baseline="0" dirty="0">
+              <a:ln>
+                <a:noFill/>
+              </a:ln>
+              <a:solidFill>
+                <a:schemeClr val="tx1"/>
+              </a:solidFill>
+              <a:effectLst/>
+              <a:latin typeface="Arial" panose="020B0604020202020204" pitchFamily="34" charset="0"/>
+            </a:endParaRPr>
+          </a:p>
+        </p:txBody>
+      </p:sp>
+      <p:sp>
+        <p:nvSpPr>
+          <p:cNvPr id="8" name="Rectangle: Rounded Corners 7">
+            <a:extLst>
+              <a:ext uri="{FF2B5EF4-FFF2-40B4-BE49-F238E27FC236}">
+                <a16:creationId xmlns:a16="http://schemas.microsoft.com/office/drawing/2014/main" id="{31FB60E5-414E-4854-A5CB-E09F8B75FD3D}"/>
+              </a:ext>
+            </a:extLst>
+          </p:cNvPr>
+          <p:cNvSpPr/>
+          <p:nvPr/>
+        </p:nvSpPr>
+        <p:spPr>
+          <a:xfrm>
+            <a:off x="357024" y="154228"/>
+            <a:ext cx="1828800" cy="228600"/>
+          </a:xfrm>
+          <a:prstGeom prst="roundRect">
+            <a:avLst/>
+          </a:prstGeom>
+          <a:noFill/>
+          <a:ln>
+            <a:solidFill>
+              <a:srgbClr val="C00000"/>
+            </a:solidFill>
+          </a:ln>
+        </p:spPr>
+        <p:style>
+          <a:lnRef idx="2">
+            <a:schemeClr val="accent1">
+              <a:shade val="50000"/>
+            </a:schemeClr>
+          </a:lnRef>
+          <a:fillRef idx="1">
+            <a:schemeClr val="accent1"/>
+          </a:fillRef>
+          <a:effectRef idx="0">
+            <a:schemeClr val="accent1"/>
+          </a:effectRef>
+          <a:fontRef idx="minor">
+            <a:schemeClr val="lt1"/>
+          </a:fontRef>
+        </p:style>
+        <p:txBody>
+          <a:bodyPr rtlCol="0" anchor="ctr"/>
+          <a:lstStyle/>
+          <a:p>
+            <a:pPr algn="ctr"/>
+            <a:endParaRPr lang="en-VI"/>
+          </a:p>
+        </p:txBody>
+      </p:sp>
+    </p:spTree>
+    <p:extLst>
+      <p:ext uri="{BB962C8B-B14F-4D97-AF65-F5344CB8AC3E}">
+        <p14:creationId xmlns:p14="http://schemas.microsoft.com/office/powerpoint/2010/main" val="192138280"/>
+      </p:ext>
+    </p:extLst>
+  </p:cSld>
+  <p:clrMapOvr>
+    <a:masterClrMapping/>
+  </p:clrMapOvr>
+</p:sld>
+</file>
+
+<file path=ppt/slides/slide24.xml><?xml version="1.0" encoding="utf-8"?>
+<p:sld xmlns:a="http://schemas.openxmlformats.org/drawingml/2006/main" xmlns:r="http://schemas.openxmlformats.org/officeDocument/2006/relationships" xmlns:p="http://schemas.openxmlformats.org/presentationml/2006/main">
+  <p:cSld>
+    <p:spTree>
+      <p:nvGrpSpPr>
+        <p:cNvPr id="1" name=""/>
+        <p:cNvGrpSpPr/>
+        <p:nvPr/>
+      </p:nvGrpSpPr>
+      <p:grpSpPr>
+        <a:xfrm>
+          <a:off x="0" y="0"/>
+          <a:ext cx="0" cy="0"/>
+          <a:chOff x="0" y="0"/>
+          <a:chExt cx="0" cy="0"/>
+        </a:xfrm>
+      </p:grpSpPr>
+      <p:sp>
+        <p:nvSpPr>
+          <p:cNvPr id="2" name="Title 1"/>
+          <p:cNvSpPr>
+            <a:spLocks noGrp="1"/>
+          </p:cNvSpPr>
+          <p:nvPr>
+            <p:ph type="title"/>
+          </p:nvPr>
+        </p:nvSpPr>
+        <p:spPr/>
+        <p:txBody>
+          <a:bodyPr/>
+          <a:lstStyle/>
+          <a:p>
+            <a:r>
+              <a:rPr lang="en-GB" dirty="0"/>
+              <a:t>Summary</a:t>
+            </a:r>
+          </a:p>
+        </p:txBody>
+      </p:sp>
+      <p:sp>
+        <p:nvSpPr>
+          <p:cNvPr id="3" name="Content Placeholder 2"/>
+          <p:cNvSpPr>
+            <a:spLocks noGrp="1"/>
+          </p:cNvSpPr>
+          <p:nvPr>
+            <p:ph idx="1"/>
+          </p:nvPr>
+        </p:nvSpPr>
+        <p:spPr>
+          <a:xfrm>
+            <a:off x="609600" y="1600200"/>
+            <a:ext cx="9601200" cy="5029200"/>
+          </a:xfrm>
+        </p:spPr>
+        <p:txBody>
+          <a:bodyPr>
+            <a:normAutofit/>
+          </a:bodyPr>
+          <a:lstStyle/>
+          <a:p>
+            <a:r>
+              <a:rPr lang="en-GB" dirty="0"/>
+              <a:t>Crash v Exceptions</a:t>
+            </a:r>
+          </a:p>
+          <a:p>
+            <a:r>
+              <a:rPr lang="en-GB" dirty="0"/>
+              <a:t>Detect and Handle</a:t>
+            </a:r>
+          </a:p>
+          <a:p>
+            <a:pPr lvl="1"/>
+            <a:r>
+              <a:rPr lang="en-GB" dirty="0"/>
+              <a:t>Enables program to continue</a:t>
+            </a:r>
+          </a:p>
+          <a:p>
+            <a:r>
+              <a:rPr lang="en-GB" dirty="0"/>
+              <a:t>Java’s predefined Exception objects</a:t>
+            </a:r>
+          </a:p>
+          <a:p>
+            <a:r>
+              <a:rPr lang="en-GB" dirty="0"/>
+              <a:t>try / catch block</a:t>
+            </a:r>
+          </a:p>
+          <a:p>
+            <a:r>
+              <a:rPr lang="en-GB" dirty="0"/>
+              <a:t>Introduction to </a:t>
+            </a:r>
+          </a:p>
+          <a:p>
+            <a:pPr lvl="1"/>
+            <a:r>
+              <a:rPr lang="en-GB" dirty="0"/>
+              <a:t>do while loop</a:t>
+            </a:r>
+          </a:p>
+          <a:p>
+            <a:pPr lvl="2"/>
+            <a:r>
+              <a:rPr lang="en-GB" dirty="0"/>
+              <a:t>Always runs once</a:t>
+            </a:r>
+          </a:p>
+          <a:p>
+            <a:pPr lvl="2"/>
+            <a:r>
+              <a:rPr lang="en-GB" dirty="0"/>
+              <a:t>Condition is test at the end</a:t>
+            </a:r>
+          </a:p>
+          <a:p>
+            <a:endParaRPr lang="en-GB" dirty="0"/>
+          </a:p>
+        </p:txBody>
+      </p:sp>
+    </p:spTree>
+    <p:extLst>
+      <p:ext uri="{BB962C8B-B14F-4D97-AF65-F5344CB8AC3E}">
+        <p14:creationId xmlns:p14="http://schemas.microsoft.com/office/powerpoint/2010/main" val="1047752017"/>
+      </p:ext>
+    </p:extLst>
+  </p:cSld>
+  <p:clrMapOvr>
+    <a:masterClrMapping/>
+  </p:clrMapOvr>
+</p:sld>
+</file>
+
+<file path=ppt/slides/slide25.xml><?xml version="1.0" encoding="utf-8"?>
+<p:sld xmlns:a="http://schemas.openxmlformats.org/drawingml/2006/main" xmlns:r="http://schemas.openxmlformats.org/officeDocument/2006/relationships" xmlns:p="http://schemas.openxmlformats.org/presentationml/2006/main">
+  <p:cSld>
+    <p:spTree>
+      <p:nvGrpSpPr>
+        <p:cNvPr id="1" name=""/>
+        <p:cNvGrpSpPr/>
+        <p:nvPr/>
+      </p:nvGrpSpPr>
+      <p:grpSpPr>
+        <a:xfrm>
+          <a:off x="0" y="0"/>
+          <a:ext cx="0" cy="0"/>
+          <a:chOff x="0" y="0"/>
+          <a:chExt cx="0" cy="0"/>
+        </a:xfrm>
+      </p:grpSpPr>
+      <p:sp>
+        <p:nvSpPr>
+          <p:cNvPr id="2" name="Title 1"/>
+          <p:cNvSpPr>
+            <a:spLocks noGrp="1"/>
+          </p:cNvSpPr>
+          <p:nvPr>
+            <p:ph type="title"/>
+          </p:nvPr>
+        </p:nvSpPr>
+        <p:spPr/>
+        <p:txBody>
+          <a:bodyPr/>
+          <a:lstStyle/>
+          <a:p>
+            <a:r>
+              <a:rPr lang="en-IE" dirty="0"/>
+              <a:t>Questions?</a:t>
+            </a:r>
+          </a:p>
+        </p:txBody>
+      </p:sp>
+      <p:pic>
+        <p:nvPicPr>
+          <p:cNvPr id="3" name="Picture 2" descr="A green question mark in a circle&#10;&#10;AI-generated content may be incorrect.">
+            <a:extLst>
+              <a:ext uri="{FF2B5EF4-FFF2-40B4-BE49-F238E27FC236}">
+                <a16:creationId xmlns:a16="http://schemas.microsoft.com/office/drawing/2014/main" id="{5A9D487F-3157-9FE9-7E30-C739B06EAF9D}"/>
+              </a:ext>
+            </a:extLst>
+          </p:cNvPr>
+          <p:cNvPicPr>
+            <a:picLocks noChangeAspect="1"/>
+          </p:cNvPicPr>
+          <p:nvPr/>
+        </p:nvPicPr>
+        <p:blipFill>
+          <a:blip r:embed="rId2">
+            <a:extLst>
+              <a:ext uri="{28A0092B-C50C-407E-A947-70E740481C1C}">
+                <a14:useLocalDpi xmlns:a14="http://schemas.microsoft.com/office/drawing/2010/main" val="0"/>
+              </a:ext>
+            </a:extLst>
+          </a:blip>
+          <a:stretch>
+            <a:fillRect/>
+          </a:stretch>
+        </p:blipFill>
+        <p:spPr>
+          <a:xfrm>
+            <a:off x="3833019" y="1166019"/>
+            <a:ext cx="4525963" cy="4525963"/>
+          </a:xfrm>
+          <a:prstGeom prst="rect">
+            <a:avLst/>
+          </a:prstGeom>
+          <a:noFill/>
+        </p:spPr>
+      </p:pic>
+    </p:spTree>
+    <p:extLst>
+      <p:ext uri="{BB962C8B-B14F-4D97-AF65-F5344CB8AC3E}">
+        <p14:creationId xmlns:p14="http://schemas.microsoft.com/office/powerpoint/2010/main" val="1061480252"/>
       </p:ext>
     </p:extLst>
   </p:cSld>
@@ -15274,1923 +14045,6 @@
     <p:extLst>
       <p:ext uri="{BB962C8B-B14F-4D97-AF65-F5344CB8AC3E}">
         <p14:creationId xmlns:p14="http://schemas.microsoft.com/office/powerpoint/2010/main" val="328872645"/>
-      </p:ext>
-    </p:extLst>
-  </p:cSld>
-  <p:clrMapOvr>
-    <a:masterClrMapping/>
-  </p:clrMapOvr>
-</p:sld>
-</file>
-
-<file path=ppt/slides/slide30.xml><?xml version="1.0" encoding="utf-8"?>
-<p:sld xmlns:a="http://schemas.openxmlformats.org/drawingml/2006/main" xmlns:r="http://schemas.openxmlformats.org/officeDocument/2006/relationships" xmlns:p="http://schemas.openxmlformats.org/presentationml/2006/main">
-  <p:cSld>
-    <p:spTree>
-      <p:nvGrpSpPr>
-        <p:cNvPr id="1" name=""/>
-        <p:cNvGrpSpPr/>
-        <p:nvPr/>
-      </p:nvGrpSpPr>
-      <p:grpSpPr>
-        <a:xfrm>
-          <a:off x="0" y="0"/>
-          <a:ext cx="0" cy="0"/>
-          <a:chOff x="0" y="0"/>
-          <a:chExt cx="0" cy="0"/>
-        </a:xfrm>
-      </p:grpSpPr>
-      <p:sp>
-        <p:nvSpPr>
-          <p:cNvPr id="3" name="Content Placeholder 2"/>
-          <p:cNvSpPr>
-            <a:spLocks noGrp="1"/>
-          </p:cNvSpPr>
-          <p:nvPr>
-            <p:ph sz="half" idx="4294967295"/>
-          </p:nvPr>
-        </p:nvSpPr>
-        <p:spPr>
-          <a:xfrm>
-            <a:off x="3810000" y="261787"/>
-            <a:ext cx="6650169" cy="412741"/>
-          </a:xfrm>
-          <a:solidFill>
-            <a:schemeClr val="accent6"/>
-          </a:solidFill>
-        </p:spPr>
-        <p:style>
-          <a:lnRef idx="2">
-            <a:schemeClr val="accent6">
-              <a:shade val="50000"/>
-            </a:schemeClr>
-          </a:lnRef>
-          <a:fillRef idx="1">
-            <a:schemeClr val="accent6"/>
-          </a:fillRef>
-          <a:effectRef idx="0">
-            <a:schemeClr val="accent6"/>
-          </a:effectRef>
-          <a:fontRef idx="minor">
-            <a:schemeClr val="lt1"/>
-          </a:fontRef>
-        </p:style>
-        <p:txBody>
-          <a:bodyPr>
-            <a:noAutofit/>
-          </a:bodyPr>
-          <a:lstStyle/>
-          <a:p>
-            <a:pPr marL="0" indent="0" algn="ctr">
-              <a:buNone/>
-            </a:pPr>
-            <a:r>
-              <a:rPr lang="en-IE" sz="2000" dirty="0"/>
-              <a:t>Adding </a:t>
-            </a:r>
-            <a:r>
-              <a:rPr lang="en-IE" sz="2000" b="1" dirty="0">
-                <a:solidFill>
-                  <a:srgbClr val="FF0000"/>
-                </a:solidFill>
-              </a:rPr>
-              <a:t>Save</a:t>
-            </a:r>
-            <a:r>
-              <a:rPr lang="en-IE" sz="2000" dirty="0"/>
-              <a:t> and </a:t>
-            </a:r>
-            <a:r>
-              <a:rPr lang="en-IE" sz="2000" b="1" dirty="0">
-                <a:solidFill>
-                  <a:srgbClr val="FF0000"/>
-                </a:solidFill>
-              </a:rPr>
-              <a:t>Load</a:t>
-            </a:r>
-            <a:r>
-              <a:rPr lang="en-IE" sz="2000" dirty="0">
-                <a:solidFill>
-                  <a:srgbClr val="FF0000"/>
-                </a:solidFill>
-              </a:rPr>
-              <a:t> </a:t>
-            </a:r>
-            <a:r>
-              <a:rPr lang="en-IE" sz="2000" dirty="0"/>
-              <a:t>functionality to the </a:t>
-            </a:r>
-            <a:r>
-              <a:rPr lang="en-IE" sz="2000" b="1" dirty="0"/>
-              <a:t>menu</a:t>
-            </a:r>
-            <a:r>
-              <a:rPr lang="en-IE" sz="2000" dirty="0"/>
-              <a:t>.</a:t>
-            </a:r>
-          </a:p>
-          <a:p>
-            <a:pPr marL="457200" lvl="1" indent="0" algn="ctr">
-              <a:buNone/>
-            </a:pPr>
-            <a:endParaRPr lang="en-IE" sz="2000" dirty="0"/>
-          </a:p>
-          <a:p>
-            <a:pPr algn="ctr"/>
-            <a:endParaRPr lang="en-US" sz="2000" dirty="0"/>
-          </a:p>
-        </p:txBody>
-      </p:sp>
-      <p:pic>
-        <p:nvPicPr>
-          <p:cNvPr id="11" name="Picture 10">
-            <a:extLst>
-              <a:ext uri="{FF2B5EF4-FFF2-40B4-BE49-F238E27FC236}">
-                <a16:creationId xmlns:a16="http://schemas.microsoft.com/office/drawing/2014/main" id="{C965D4E2-B20A-44A6-AD94-FCBD65CC51F0}"/>
-              </a:ext>
-            </a:extLst>
-          </p:cNvPr>
-          <p:cNvPicPr>
-            <a:picLocks noChangeAspect="1"/>
-          </p:cNvPicPr>
-          <p:nvPr/>
-        </p:nvPicPr>
-        <p:blipFill>
-          <a:blip r:embed="rId3"/>
-          <a:stretch>
-            <a:fillRect/>
-          </a:stretch>
-        </p:blipFill>
-        <p:spPr>
-          <a:xfrm>
-            <a:off x="357024" y="154228"/>
-            <a:ext cx="2614776" cy="3468580"/>
-          </a:xfrm>
-          <a:prstGeom prst="rect">
-            <a:avLst/>
-          </a:prstGeom>
-          <a:ln>
-            <a:noFill/>
-          </a:ln>
-          <a:effectLst>
-            <a:outerShdw blurRad="292100" dist="139700" dir="2700000" algn="tl" rotWithShape="0">
-              <a:srgbClr val="333333">
-                <a:alpha val="65000"/>
-              </a:srgbClr>
-            </a:outerShdw>
-          </a:effectLst>
-        </p:spPr>
-      </p:pic>
-      <p:sp>
-        <p:nvSpPr>
-          <p:cNvPr id="13" name="Rectangle: Rounded Corners 12">
-            <a:extLst>
-              <a:ext uri="{FF2B5EF4-FFF2-40B4-BE49-F238E27FC236}">
-                <a16:creationId xmlns:a16="http://schemas.microsoft.com/office/drawing/2014/main" id="{721696B5-2FB1-4326-9F41-87341094A66A}"/>
-              </a:ext>
-            </a:extLst>
-          </p:cNvPr>
-          <p:cNvSpPr/>
-          <p:nvPr/>
-        </p:nvSpPr>
-        <p:spPr>
-          <a:xfrm>
-            <a:off x="457200" y="990600"/>
-            <a:ext cx="1828800" cy="228600"/>
-          </a:xfrm>
-          <a:prstGeom prst="roundRect">
-            <a:avLst/>
-          </a:prstGeom>
-          <a:noFill/>
-          <a:ln>
-            <a:solidFill>
-              <a:srgbClr val="C00000"/>
-            </a:solidFill>
-          </a:ln>
-        </p:spPr>
-        <p:style>
-          <a:lnRef idx="2">
-            <a:schemeClr val="accent1">
-              <a:shade val="50000"/>
-            </a:schemeClr>
-          </a:lnRef>
-          <a:fillRef idx="1">
-            <a:schemeClr val="accent1"/>
-          </a:fillRef>
-          <a:effectRef idx="0">
-            <a:schemeClr val="accent1"/>
-          </a:effectRef>
-          <a:fontRef idx="minor">
-            <a:schemeClr val="lt1"/>
-          </a:fontRef>
-        </p:style>
-        <p:txBody>
-          <a:bodyPr rtlCol="0" anchor="ctr"/>
-          <a:lstStyle/>
-          <a:p>
-            <a:pPr algn="ctr"/>
-            <a:endParaRPr lang="en-VI"/>
-          </a:p>
-        </p:txBody>
-      </p:sp>
-      <p:pic>
-        <p:nvPicPr>
-          <p:cNvPr id="4" name="Picture 3">
-            <a:extLst>
-              <a:ext uri="{FF2B5EF4-FFF2-40B4-BE49-F238E27FC236}">
-                <a16:creationId xmlns:a16="http://schemas.microsoft.com/office/drawing/2014/main" id="{46A3E0AD-4F15-49E7-ADD9-36FDE61F9189}"/>
-              </a:ext>
-            </a:extLst>
-          </p:cNvPr>
-          <p:cNvPicPr>
-            <a:picLocks noChangeAspect="1"/>
-          </p:cNvPicPr>
-          <p:nvPr/>
-        </p:nvPicPr>
-        <p:blipFill>
-          <a:blip r:embed="rId4"/>
-          <a:stretch>
-            <a:fillRect/>
-          </a:stretch>
-        </p:blipFill>
-        <p:spPr>
-          <a:xfrm>
-            <a:off x="3581400" y="1589446"/>
-            <a:ext cx="7638285" cy="3679107"/>
-          </a:xfrm>
-          <a:prstGeom prst="rect">
-            <a:avLst/>
-          </a:prstGeom>
-          <a:ln>
-            <a:noFill/>
-          </a:ln>
-          <a:effectLst>
-            <a:outerShdw blurRad="292100" dist="139700" dir="2700000" algn="tl" rotWithShape="0">
-              <a:srgbClr val="333333">
-                <a:alpha val="65000"/>
-              </a:srgbClr>
-            </a:outerShdw>
-          </a:effectLst>
-        </p:spPr>
-      </p:pic>
-      <p:sp>
-        <p:nvSpPr>
-          <p:cNvPr id="8" name="Arrow: Right 7">
-            <a:extLst>
-              <a:ext uri="{FF2B5EF4-FFF2-40B4-BE49-F238E27FC236}">
-                <a16:creationId xmlns:a16="http://schemas.microsoft.com/office/drawing/2014/main" id="{AD684C83-0898-4336-92B5-D3BF49BA212C}"/>
-              </a:ext>
-            </a:extLst>
-          </p:cNvPr>
-          <p:cNvSpPr/>
-          <p:nvPr/>
-        </p:nvSpPr>
-        <p:spPr>
-          <a:xfrm>
-            <a:off x="2971800" y="4191000"/>
-            <a:ext cx="978408" cy="484632"/>
-          </a:xfrm>
-          <a:prstGeom prst="rightArrow">
-            <a:avLst/>
-          </a:prstGeom>
-        </p:spPr>
-        <p:style>
-          <a:lnRef idx="2">
-            <a:schemeClr val="accent1">
-              <a:shade val="50000"/>
-            </a:schemeClr>
-          </a:lnRef>
-          <a:fillRef idx="1">
-            <a:schemeClr val="accent1"/>
-          </a:fillRef>
-          <a:effectRef idx="0">
-            <a:schemeClr val="accent1"/>
-          </a:effectRef>
-          <a:fontRef idx="minor">
-            <a:schemeClr val="lt1"/>
-          </a:fontRef>
-        </p:style>
-        <p:txBody>
-          <a:bodyPr rtlCol="0" anchor="ctr"/>
-          <a:lstStyle/>
-          <a:p>
-            <a:pPr algn="ctr"/>
-            <a:endParaRPr lang="en-VI"/>
-          </a:p>
-        </p:txBody>
-      </p:sp>
-      <p:sp>
-        <p:nvSpPr>
-          <p:cNvPr id="7" name="Rectangle: Rounded Corners 6">
-            <a:extLst>
-              <a:ext uri="{FF2B5EF4-FFF2-40B4-BE49-F238E27FC236}">
-                <a16:creationId xmlns:a16="http://schemas.microsoft.com/office/drawing/2014/main" id="{278BEBB4-0A7D-4EBB-9030-B9D6DC04BFC9}"/>
-              </a:ext>
-            </a:extLst>
-          </p:cNvPr>
-          <p:cNvSpPr/>
-          <p:nvPr/>
-        </p:nvSpPr>
-        <p:spPr>
-          <a:xfrm>
-            <a:off x="357024" y="154228"/>
-            <a:ext cx="1828800" cy="228600"/>
-          </a:xfrm>
-          <a:prstGeom prst="roundRect">
-            <a:avLst/>
-          </a:prstGeom>
-          <a:noFill/>
-          <a:ln>
-            <a:solidFill>
-              <a:srgbClr val="C00000"/>
-            </a:solidFill>
-          </a:ln>
-        </p:spPr>
-        <p:style>
-          <a:lnRef idx="2">
-            <a:schemeClr val="accent1">
-              <a:shade val="50000"/>
-            </a:schemeClr>
-          </a:lnRef>
-          <a:fillRef idx="1">
-            <a:schemeClr val="accent1"/>
-          </a:fillRef>
-          <a:effectRef idx="0">
-            <a:schemeClr val="accent1"/>
-          </a:effectRef>
-          <a:fontRef idx="minor">
-            <a:schemeClr val="lt1"/>
-          </a:fontRef>
-        </p:style>
-        <p:txBody>
-          <a:bodyPr rtlCol="0" anchor="ctr"/>
-          <a:lstStyle/>
-          <a:p>
-            <a:pPr algn="ctr"/>
-            <a:endParaRPr lang="en-VI"/>
-          </a:p>
-        </p:txBody>
-      </p:sp>
-    </p:spTree>
-    <p:extLst>
-      <p:ext uri="{BB962C8B-B14F-4D97-AF65-F5344CB8AC3E}">
-        <p14:creationId xmlns:p14="http://schemas.microsoft.com/office/powerpoint/2010/main" val="4408826"/>
-      </p:ext>
-    </p:extLst>
-  </p:cSld>
-  <p:clrMapOvr>
-    <a:masterClrMapping/>
-  </p:clrMapOvr>
-</p:sld>
-</file>
-
-<file path=ppt/slides/slide31.xml><?xml version="1.0" encoding="utf-8"?>
-<p:sld xmlns:a="http://schemas.openxmlformats.org/drawingml/2006/main" xmlns:r="http://schemas.openxmlformats.org/officeDocument/2006/relationships" xmlns:p="http://schemas.openxmlformats.org/presentationml/2006/main">
-  <p:cSld>
-    <p:spTree>
-      <p:nvGrpSpPr>
-        <p:cNvPr id="1" name=""/>
-        <p:cNvGrpSpPr/>
-        <p:nvPr/>
-      </p:nvGrpSpPr>
-      <p:grpSpPr>
-        <a:xfrm>
-          <a:off x="0" y="0"/>
-          <a:ext cx="0" cy="0"/>
-          <a:chOff x="0" y="0"/>
-          <a:chExt cx="0" cy="0"/>
-        </a:xfrm>
-      </p:grpSpPr>
-      <p:sp>
-        <p:nvSpPr>
-          <p:cNvPr id="3" name="Content Placeholder 2"/>
-          <p:cNvSpPr>
-            <a:spLocks noGrp="1"/>
-          </p:cNvSpPr>
-          <p:nvPr>
-            <p:ph sz="half" idx="4294967295"/>
-          </p:nvPr>
-        </p:nvSpPr>
-        <p:spPr>
-          <a:xfrm>
-            <a:off x="3810000" y="261787"/>
-            <a:ext cx="6650169" cy="412741"/>
-          </a:xfrm>
-          <a:solidFill>
-            <a:schemeClr val="accent6"/>
-          </a:solidFill>
-        </p:spPr>
-        <p:style>
-          <a:lnRef idx="2">
-            <a:schemeClr val="accent6">
-              <a:shade val="50000"/>
-            </a:schemeClr>
-          </a:lnRef>
-          <a:fillRef idx="1">
-            <a:schemeClr val="accent6"/>
-          </a:fillRef>
-          <a:effectRef idx="0">
-            <a:schemeClr val="accent6"/>
-          </a:effectRef>
-          <a:fontRef idx="minor">
-            <a:schemeClr val="lt1"/>
-          </a:fontRef>
-        </p:style>
-        <p:txBody>
-          <a:bodyPr>
-            <a:noAutofit/>
-          </a:bodyPr>
-          <a:lstStyle/>
-          <a:p>
-            <a:pPr marL="0" indent="0" algn="ctr">
-              <a:buNone/>
-            </a:pPr>
-            <a:r>
-              <a:rPr lang="en-IE" sz="2000" dirty="0"/>
-              <a:t>Adding </a:t>
-            </a:r>
-            <a:r>
-              <a:rPr lang="en-IE" sz="2000" b="1" dirty="0">
-                <a:solidFill>
-                  <a:srgbClr val="FF0000"/>
-                </a:solidFill>
-              </a:rPr>
-              <a:t>Save</a:t>
-            </a:r>
-            <a:r>
-              <a:rPr lang="en-IE" sz="2000" dirty="0"/>
-              <a:t> and </a:t>
-            </a:r>
-            <a:r>
-              <a:rPr lang="en-IE" sz="2000" b="1" dirty="0">
-                <a:solidFill>
-                  <a:srgbClr val="FF0000"/>
-                </a:solidFill>
-              </a:rPr>
-              <a:t>Load</a:t>
-            </a:r>
-            <a:r>
-              <a:rPr lang="en-IE" sz="2000" dirty="0">
-                <a:solidFill>
-                  <a:srgbClr val="FF0000"/>
-                </a:solidFill>
-              </a:rPr>
-              <a:t> </a:t>
-            </a:r>
-            <a:r>
-              <a:rPr lang="en-IE" sz="2000" dirty="0"/>
-              <a:t>functionality to the </a:t>
-            </a:r>
-            <a:r>
-              <a:rPr lang="en-IE" sz="2000" b="1" dirty="0"/>
-              <a:t>menu</a:t>
-            </a:r>
-            <a:r>
-              <a:rPr lang="en-IE" sz="2000" dirty="0"/>
-              <a:t>.</a:t>
-            </a:r>
-          </a:p>
-          <a:p>
-            <a:pPr marL="457200" lvl="1" indent="0" algn="ctr">
-              <a:buNone/>
-            </a:pPr>
-            <a:endParaRPr lang="en-IE" sz="2000" dirty="0"/>
-          </a:p>
-          <a:p>
-            <a:pPr algn="ctr"/>
-            <a:endParaRPr lang="en-US" sz="2000" dirty="0"/>
-          </a:p>
-        </p:txBody>
-      </p:sp>
-      <p:pic>
-        <p:nvPicPr>
-          <p:cNvPr id="11" name="Picture 10">
-            <a:extLst>
-              <a:ext uri="{FF2B5EF4-FFF2-40B4-BE49-F238E27FC236}">
-                <a16:creationId xmlns:a16="http://schemas.microsoft.com/office/drawing/2014/main" id="{C965D4E2-B20A-44A6-AD94-FCBD65CC51F0}"/>
-              </a:ext>
-            </a:extLst>
-          </p:cNvPr>
-          <p:cNvPicPr>
-            <a:picLocks noChangeAspect="1"/>
-          </p:cNvPicPr>
-          <p:nvPr/>
-        </p:nvPicPr>
-        <p:blipFill>
-          <a:blip r:embed="rId3"/>
-          <a:stretch>
-            <a:fillRect/>
-          </a:stretch>
-        </p:blipFill>
-        <p:spPr>
-          <a:xfrm>
-            <a:off x="357024" y="154228"/>
-            <a:ext cx="2614776" cy="3468580"/>
-          </a:xfrm>
-          <a:prstGeom prst="rect">
-            <a:avLst/>
-          </a:prstGeom>
-          <a:ln>
-            <a:noFill/>
-          </a:ln>
-          <a:effectLst>
-            <a:outerShdw blurRad="292100" dist="139700" dir="2700000" algn="tl" rotWithShape="0">
-              <a:srgbClr val="333333">
-                <a:alpha val="65000"/>
-              </a:srgbClr>
-            </a:outerShdw>
-          </a:effectLst>
-        </p:spPr>
-      </p:pic>
-      <p:sp>
-        <p:nvSpPr>
-          <p:cNvPr id="13" name="Rectangle: Rounded Corners 12">
-            <a:extLst>
-              <a:ext uri="{FF2B5EF4-FFF2-40B4-BE49-F238E27FC236}">
-                <a16:creationId xmlns:a16="http://schemas.microsoft.com/office/drawing/2014/main" id="{721696B5-2FB1-4326-9F41-87341094A66A}"/>
-              </a:ext>
-            </a:extLst>
-          </p:cNvPr>
-          <p:cNvSpPr/>
-          <p:nvPr/>
-        </p:nvSpPr>
-        <p:spPr>
-          <a:xfrm>
-            <a:off x="357024" y="2895600"/>
-            <a:ext cx="1828800" cy="457200"/>
-          </a:xfrm>
-          <a:prstGeom prst="roundRect">
-            <a:avLst/>
-          </a:prstGeom>
-          <a:noFill/>
-          <a:ln>
-            <a:solidFill>
-              <a:srgbClr val="C00000"/>
-            </a:solidFill>
-          </a:ln>
-        </p:spPr>
-        <p:style>
-          <a:lnRef idx="2">
-            <a:schemeClr val="accent1">
-              <a:shade val="50000"/>
-            </a:schemeClr>
-          </a:lnRef>
-          <a:fillRef idx="1">
-            <a:schemeClr val="accent1"/>
-          </a:fillRef>
-          <a:effectRef idx="0">
-            <a:schemeClr val="accent1"/>
-          </a:effectRef>
-          <a:fontRef idx="minor">
-            <a:schemeClr val="lt1"/>
-          </a:fontRef>
-        </p:style>
-        <p:txBody>
-          <a:bodyPr rtlCol="0" anchor="ctr"/>
-          <a:lstStyle/>
-          <a:p>
-            <a:pPr algn="ctr"/>
-            <a:endParaRPr lang="en-VI" sz="4400"/>
-          </a:p>
-        </p:txBody>
-      </p:sp>
-      <p:sp>
-        <p:nvSpPr>
-          <p:cNvPr id="4" name="Rectangle 1">
-            <a:extLst>
-              <a:ext uri="{FF2B5EF4-FFF2-40B4-BE49-F238E27FC236}">
-                <a16:creationId xmlns:a16="http://schemas.microsoft.com/office/drawing/2014/main" id="{88D46F7C-9E11-42B8-B3A4-3541544F920B}"/>
-              </a:ext>
-            </a:extLst>
-          </p:cNvPr>
-          <p:cNvSpPr>
-            <a:spLocks noChangeArrowheads="1"/>
-          </p:cNvSpPr>
-          <p:nvPr/>
-        </p:nvSpPr>
-        <p:spPr bwMode="auto">
-          <a:xfrm>
-            <a:off x="3276600" y="3795446"/>
-            <a:ext cx="6793398" cy="2554545"/>
-          </a:xfrm>
-          <a:prstGeom prst="rect">
-            <a:avLst/>
-          </a:prstGeom>
-          <a:ln/>
-        </p:spPr>
-        <p:style>
-          <a:lnRef idx="2">
-            <a:schemeClr val="accent1"/>
-          </a:lnRef>
-          <a:fillRef idx="1">
-            <a:schemeClr val="lt1"/>
-          </a:fillRef>
-          <a:effectRef idx="0">
-            <a:schemeClr val="accent1"/>
-          </a:effectRef>
-          <a:fontRef idx="minor">
-            <a:schemeClr val="dk1"/>
-          </a:fontRef>
-        </p:style>
-        <p:txBody>
-          <a:bodyPr vert="horz" wrap="none" lIns="91440" tIns="45720" rIns="91440" bIns="45720" numCol="1" anchor="ctr" anchorCtr="0" compatLnSpc="1">
-            <a:prstTxWarp prst="textNoShape">
-              <a:avLst/>
-            </a:prstTxWarp>
-            <a:spAutoFit/>
-          </a:bodyPr>
-          <a:lstStyle/>
-          <a:p>
-            <a:pPr marL="0" marR="0" lvl="0" indent="0" algn="l" defTabSz="914400" rtl="0" eaLnBrk="0" fontAlgn="base" latinLnBrk="0" hangingPunct="0">
-              <a:lnSpc>
-                <a:spcPct val="100000"/>
-              </a:lnSpc>
-              <a:spcBef>
-                <a:spcPct val="0"/>
-              </a:spcBef>
-              <a:spcAft>
-                <a:spcPct val="0"/>
-              </a:spcAft>
-              <a:buClrTx/>
-              <a:buSzTx/>
-              <a:buFontTx/>
-              <a:buNone/>
-              <a:tabLst/>
-            </a:pPr>
-            <a:r>
-              <a:rPr kumimoji="0" lang="en-VI" altLang="en-VI" sz="2000" b="0" i="1" u="none" strike="noStrike" cap="none" normalizeH="0" baseline="0" dirty="0">
-                <a:ln>
-                  <a:noFill/>
-                </a:ln>
-                <a:solidFill>
-                  <a:srgbClr val="8C8C8C"/>
-                </a:solidFill>
-                <a:effectLst/>
-                <a:latin typeface="JetBrains Mono"/>
-              </a:rPr>
-              <a:t>//load all the products into the store from a file on the hard disk</a:t>
-            </a:r>
-            <a:br>
-              <a:rPr kumimoji="0" lang="en-VI" altLang="en-VI" sz="2000" b="0" i="1" u="none" strike="noStrike" cap="none" normalizeH="0" baseline="0" dirty="0">
-                <a:ln>
-                  <a:noFill/>
-                </a:ln>
-                <a:solidFill>
-                  <a:srgbClr val="8C8C8C"/>
-                </a:solidFill>
-                <a:effectLst/>
-                <a:latin typeface="JetBrains Mono"/>
-              </a:rPr>
-            </a:br>
-            <a:r>
-              <a:rPr kumimoji="0" lang="en-VI" altLang="en-VI" sz="2000" b="0" i="0" u="none" strike="noStrike" cap="none" normalizeH="0" baseline="0" dirty="0">
-                <a:ln>
-                  <a:noFill/>
-                </a:ln>
-                <a:solidFill>
-                  <a:srgbClr val="0033B3"/>
-                </a:solidFill>
-                <a:effectLst/>
-                <a:latin typeface="JetBrains Mono"/>
-              </a:rPr>
-              <a:t>private void </a:t>
-            </a:r>
-            <a:r>
-              <a:rPr kumimoji="0" lang="en-VI" altLang="en-VI" sz="2000" b="0" i="0" u="none" strike="noStrike" cap="none" normalizeH="0" baseline="0" dirty="0" err="1">
-                <a:ln>
-                  <a:noFill/>
-                </a:ln>
-                <a:solidFill>
-                  <a:srgbClr val="00627A"/>
-                </a:solidFill>
-                <a:effectLst/>
-                <a:latin typeface="JetBrains Mono"/>
-              </a:rPr>
-              <a:t>loadProducts</a:t>
-            </a:r>
-            <a:r>
-              <a:rPr kumimoji="0" lang="en-VI" altLang="en-VI" sz="2000" b="0" i="0" u="none" strike="noStrike" cap="none" normalizeH="0" baseline="0" dirty="0">
-                <a:ln>
-                  <a:noFill/>
-                </a:ln>
-                <a:solidFill>
-                  <a:srgbClr val="080808"/>
-                </a:solidFill>
-                <a:effectLst/>
-                <a:latin typeface="JetBrains Mono"/>
-              </a:rPr>
-              <a:t>() {</a:t>
-            </a:r>
-            <a:br>
-              <a:rPr kumimoji="0" lang="en-VI" altLang="en-VI" sz="2000" b="0" i="0" u="none" strike="noStrike" cap="none" normalizeH="0" baseline="0" dirty="0">
-                <a:ln>
-                  <a:noFill/>
-                </a:ln>
-                <a:solidFill>
-                  <a:srgbClr val="080808"/>
-                </a:solidFill>
-                <a:effectLst/>
-                <a:latin typeface="JetBrains Mono"/>
-              </a:rPr>
-            </a:br>
-            <a:r>
-              <a:rPr kumimoji="0" lang="en-VI" altLang="en-VI" sz="2000" b="0" i="0" u="none" strike="noStrike" cap="none" normalizeH="0" baseline="0" dirty="0">
-                <a:ln>
-                  <a:noFill/>
-                </a:ln>
-                <a:solidFill>
-                  <a:srgbClr val="080808"/>
-                </a:solidFill>
-                <a:effectLst/>
-                <a:latin typeface="JetBrains Mono"/>
-              </a:rPr>
-              <a:t>    </a:t>
-            </a:r>
-            <a:r>
-              <a:rPr kumimoji="0" lang="en-VI" altLang="en-VI" sz="2000" b="0" i="0" u="none" strike="noStrike" cap="none" normalizeH="0" baseline="0" dirty="0">
-                <a:ln>
-                  <a:noFill/>
-                </a:ln>
-                <a:solidFill>
-                  <a:srgbClr val="0033B3"/>
-                </a:solidFill>
-                <a:effectLst/>
-                <a:latin typeface="JetBrains Mono"/>
-              </a:rPr>
-              <a:t>try </a:t>
-            </a:r>
-            <a:r>
-              <a:rPr kumimoji="0" lang="en-VI" altLang="en-VI" sz="2000" b="0" i="0" u="none" strike="noStrike" cap="none" normalizeH="0" baseline="0" dirty="0">
-                <a:ln>
-                  <a:noFill/>
-                </a:ln>
-                <a:solidFill>
-                  <a:srgbClr val="080808"/>
-                </a:solidFill>
-                <a:effectLst/>
-                <a:latin typeface="JetBrains Mono"/>
-              </a:rPr>
-              <a:t>{</a:t>
-            </a:r>
-            <a:br>
-              <a:rPr kumimoji="0" lang="en-VI" altLang="en-VI" sz="2000" b="0" i="0" u="none" strike="noStrike" cap="none" normalizeH="0" baseline="0" dirty="0">
-                <a:ln>
-                  <a:noFill/>
-                </a:ln>
-                <a:solidFill>
-                  <a:srgbClr val="080808"/>
-                </a:solidFill>
-                <a:effectLst/>
-                <a:latin typeface="JetBrains Mono"/>
-              </a:rPr>
-            </a:br>
-            <a:r>
-              <a:rPr kumimoji="0" lang="en-VI" altLang="en-VI" sz="2000" b="0" i="0" u="none" strike="noStrike" cap="none" normalizeH="0" baseline="0" dirty="0">
-                <a:ln>
-                  <a:noFill/>
-                </a:ln>
-                <a:solidFill>
-                  <a:srgbClr val="080808"/>
-                </a:solidFill>
-                <a:effectLst/>
-                <a:latin typeface="JetBrains Mono"/>
-              </a:rPr>
-              <a:t>        </a:t>
-            </a:r>
-            <a:r>
-              <a:rPr kumimoji="0" lang="en-VI" altLang="en-VI" sz="2000" b="0" i="0" u="none" strike="noStrike" cap="none" normalizeH="0" baseline="0" dirty="0" err="1">
-                <a:ln>
-                  <a:noFill/>
-                </a:ln>
-                <a:solidFill>
-                  <a:srgbClr val="871094"/>
-                </a:solidFill>
-                <a:effectLst/>
-                <a:latin typeface="JetBrains Mono"/>
-              </a:rPr>
-              <a:t>store</a:t>
-            </a:r>
-            <a:r>
-              <a:rPr kumimoji="0" lang="en-VI" altLang="en-VI" sz="2000" b="0" i="0" u="none" strike="noStrike" cap="none" normalizeH="0" baseline="0" dirty="0" err="1">
-                <a:ln>
-                  <a:noFill/>
-                </a:ln>
-                <a:solidFill>
-                  <a:srgbClr val="080808"/>
-                </a:solidFill>
-                <a:effectLst/>
-                <a:latin typeface="JetBrains Mono"/>
-              </a:rPr>
-              <a:t>.load</a:t>
-            </a:r>
-            <a:r>
-              <a:rPr kumimoji="0" lang="en-VI" altLang="en-VI" sz="2000" b="0" i="0" u="none" strike="noStrike" cap="none" normalizeH="0" baseline="0" dirty="0">
-                <a:ln>
-                  <a:noFill/>
-                </a:ln>
-                <a:solidFill>
-                  <a:srgbClr val="080808"/>
-                </a:solidFill>
-                <a:effectLst/>
-                <a:latin typeface="JetBrains Mono"/>
-              </a:rPr>
-              <a:t>();</a:t>
-            </a:r>
-            <a:br>
-              <a:rPr kumimoji="0" lang="en-VI" altLang="en-VI" sz="2000" b="0" i="0" u="none" strike="noStrike" cap="none" normalizeH="0" baseline="0" dirty="0">
-                <a:ln>
-                  <a:noFill/>
-                </a:ln>
-                <a:solidFill>
-                  <a:srgbClr val="080808"/>
-                </a:solidFill>
-                <a:effectLst/>
-                <a:latin typeface="JetBrains Mono"/>
-              </a:rPr>
-            </a:br>
-            <a:r>
-              <a:rPr kumimoji="0" lang="en-VI" altLang="en-VI" sz="2000" b="0" i="0" u="none" strike="noStrike" cap="none" normalizeH="0" baseline="0" dirty="0">
-                <a:ln>
-                  <a:noFill/>
-                </a:ln>
-                <a:solidFill>
-                  <a:srgbClr val="080808"/>
-                </a:solidFill>
-                <a:effectLst/>
-                <a:latin typeface="JetBrains Mono"/>
-              </a:rPr>
-              <a:t>    } </a:t>
-            </a:r>
-            <a:r>
-              <a:rPr kumimoji="0" lang="en-VI" altLang="en-VI" sz="2000" b="0" i="0" u="none" strike="noStrike" cap="none" normalizeH="0" baseline="0" dirty="0">
-                <a:ln>
-                  <a:noFill/>
-                </a:ln>
-                <a:solidFill>
-                  <a:srgbClr val="0033B3"/>
-                </a:solidFill>
-                <a:effectLst/>
-                <a:latin typeface="JetBrains Mono"/>
-              </a:rPr>
-              <a:t>catch </a:t>
-            </a:r>
-            <a:r>
-              <a:rPr kumimoji="0" lang="en-VI" altLang="en-VI" sz="2000" b="0" i="0" u="none" strike="noStrike" cap="none" normalizeH="0" baseline="0" dirty="0">
-                <a:ln>
-                  <a:noFill/>
-                </a:ln>
-                <a:solidFill>
-                  <a:srgbClr val="080808"/>
-                </a:solidFill>
-                <a:effectLst/>
-                <a:latin typeface="JetBrains Mono"/>
-              </a:rPr>
-              <a:t>(</a:t>
-            </a:r>
-            <a:r>
-              <a:rPr kumimoji="0" lang="en-VI" altLang="en-VI" sz="2000" b="0" i="0" u="none" strike="noStrike" cap="none" normalizeH="0" baseline="0" dirty="0">
-                <a:ln>
-                  <a:noFill/>
-                </a:ln>
-                <a:solidFill>
-                  <a:srgbClr val="000000"/>
-                </a:solidFill>
-                <a:effectLst/>
-                <a:latin typeface="JetBrains Mono"/>
-              </a:rPr>
-              <a:t>Exception </a:t>
-            </a:r>
-            <a:r>
-              <a:rPr kumimoji="0" lang="en-VI" altLang="en-VI" sz="2000" b="0" i="0" u="none" strike="noStrike" cap="none" normalizeH="0" baseline="0" dirty="0">
-                <a:ln>
-                  <a:noFill/>
-                </a:ln>
-                <a:solidFill>
-                  <a:srgbClr val="080808"/>
-                </a:solidFill>
-                <a:effectLst/>
-                <a:latin typeface="JetBrains Mono"/>
-              </a:rPr>
-              <a:t>e) {</a:t>
-            </a:r>
-            <a:br>
-              <a:rPr kumimoji="0" lang="en-VI" altLang="en-VI" sz="2000" b="0" i="0" u="none" strike="noStrike" cap="none" normalizeH="0" baseline="0" dirty="0">
-                <a:ln>
-                  <a:noFill/>
-                </a:ln>
-                <a:solidFill>
-                  <a:srgbClr val="080808"/>
-                </a:solidFill>
-                <a:effectLst/>
-                <a:latin typeface="JetBrains Mono"/>
-              </a:rPr>
-            </a:br>
-            <a:r>
-              <a:rPr kumimoji="0" lang="en-VI" altLang="en-VI" sz="2000" b="0" i="0" u="none" strike="noStrike" cap="none" normalizeH="0" baseline="0" dirty="0">
-                <a:ln>
-                  <a:noFill/>
-                </a:ln>
-                <a:solidFill>
-                  <a:srgbClr val="080808"/>
-                </a:solidFill>
-                <a:effectLst/>
-                <a:latin typeface="JetBrains Mono"/>
-              </a:rPr>
-              <a:t>        </a:t>
-            </a:r>
-            <a:r>
-              <a:rPr kumimoji="0" lang="en-VI" altLang="en-VI" sz="2000" b="0" i="0" u="none" strike="noStrike" cap="none" normalizeH="0" baseline="0" dirty="0" err="1">
-                <a:ln>
-                  <a:noFill/>
-                </a:ln>
-                <a:solidFill>
-                  <a:srgbClr val="000000"/>
-                </a:solidFill>
-                <a:effectLst/>
-                <a:latin typeface="JetBrains Mono"/>
-              </a:rPr>
-              <a:t>System</a:t>
-            </a:r>
-            <a:r>
-              <a:rPr kumimoji="0" lang="en-VI" altLang="en-VI" sz="2000" b="0" i="0" u="none" strike="noStrike" cap="none" normalizeH="0" baseline="0" dirty="0" err="1">
-                <a:ln>
-                  <a:noFill/>
-                </a:ln>
-                <a:solidFill>
-                  <a:srgbClr val="080808"/>
-                </a:solidFill>
-                <a:effectLst/>
-                <a:latin typeface="JetBrains Mono"/>
-              </a:rPr>
-              <a:t>.</a:t>
-            </a:r>
-            <a:r>
-              <a:rPr kumimoji="0" lang="en-VI" altLang="en-VI" sz="2000" b="0" i="1" u="none" strike="noStrike" cap="none" normalizeH="0" baseline="0" dirty="0" err="1">
-                <a:ln>
-                  <a:noFill/>
-                </a:ln>
-                <a:solidFill>
-                  <a:srgbClr val="871094"/>
-                </a:solidFill>
-                <a:effectLst/>
-                <a:latin typeface="JetBrains Mono"/>
-              </a:rPr>
-              <a:t>err</a:t>
-            </a:r>
-            <a:r>
-              <a:rPr kumimoji="0" lang="en-VI" altLang="en-VI" sz="2000" b="0" i="0" u="none" strike="noStrike" cap="none" normalizeH="0" baseline="0" dirty="0" err="1">
-                <a:ln>
-                  <a:noFill/>
-                </a:ln>
-                <a:solidFill>
-                  <a:srgbClr val="080808"/>
-                </a:solidFill>
-                <a:effectLst/>
-                <a:latin typeface="JetBrains Mono"/>
-              </a:rPr>
-              <a:t>.println</a:t>
-            </a:r>
-            <a:r>
-              <a:rPr kumimoji="0" lang="en-VI" altLang="en-VI" sz="2000" b="0" i="0" u="none" strike="noStrike" cap="none" normalizeH="0" baseline="0" dirty="0">
-                <a:ln>
-                  <a:noFill/>
-                </a:ln>
-                <a:solidFill>
-                  <a:srgbClr val="080808"/>
-                </a:solidFill>
-                <a:effectLst/>
-                <a:latin typeface="JetBrains Mono"/>
-              </a:rPr>
-              <a:t>(</a:t>
-            </a:r>
-            <a:r>
-              <a:rPr kumimoji="0" lang="en-VI" altLang="en-VI" sz="2000" b="0" i="0" u="none" strike="noStrike" cap="none" normalizeH="0" baseline="0" dirty="0">
-                <a:ln>
-                  <a:noFill/>
-                </a:ln>
-                <a:solidFill>
-                  <a:srgbClr val="067D17"/>
-                </a:solidFill>
-                <a:effectLst/>
-                <a:latin typeface="JetBrains Mono"/>
-              </a:rPr>
-              <a:t>"Error reading from file: " </a:t>
-            </a:r>
-            <a:r>
-              <a:rPr kumimoji="0" lang="en-VI" altLang="en-VI" sz="2000" b="0" i="0" u="none" strike="noStrike" cap="none" normalizeH="0" baseline="0" dirty="0">
-                <a:ln>
-                  <a:noFill/>
-                </a:ln>
-                <a:solidFill>
-                  <a:srgbClr val="080808"/>
-                </a:solidFill>
-                <a:effectLst/>
-                <a:latin typeface="JetBrains Mono"/>
-              </a:rPr>
-              <a:t>+ e);</a:t>
-            </a:r>
-            <a:br>
-              <a:rPr kumimoji="0" lang="en-VI" altLang="en-VI" sz="2000" b="0" i="0" u="none" strike="noStrike" cap="none" normalizeH="0" baseline="0" dirty="0">
-                <a:ln>
-                  <a:noFill/>
-                </a:ln>
-                <a:solidFill>
-                  <a:srgbClr val="080808"/>
-                </a:solidFill>
-                <a:effectLst/>
-                <a:latin typeface="JetBrains Mono"/>
-              </a:rPr>
-            </a:br>
-            <a:r>
-              <a:rPr kumimoji="0" lang="en-VI" altLang="en-VI" sz="2000" b="0" i="0" u="none" strike="noStrike" cap="none" normalizeH="0" baseline="0" dirty="0">
-                <a:ln>
-                  <a:noFill/>
-                </a:ln>
-                <a:solidFill>
-                  <a:srgbClr val="080808"/>
-                </a:solidFill>
-                <a:effectLst/>
-                <a:latin typeface="JetBrains Mono"/>
-              </a:rPr>
-              <a:t>    }</a:t>
-            </a:r>
-            <a:br>
-              <a:rPr kumimoji="0" lang="en-VI" altLang="en-VI" sz="2000" b="0" i="0" u="none" strike="noStrike" cap="none" normalizeH="0" baseline="0" dirty="0">
-                <a:ln>
-                  <a:noFill/>
-                </a:ln>
-                <a:solidFill>
-                  <a:srgbClr val="080808"/>
-                </a:solidFill>
-                <a:effectLst/>
-                <a:latin typeface="JetBrains Mono"/>
-              </a:rPr>
-            </a:br>
-            <a:r>
-              <a:rPr kumimoji="0" lang="en-VI" altLang="en-VI" sz="2000" b="0" i="0" u="none" strike="noStrike" cap="none" normalizeH="0" baseline="0" dirty="0">
-                <a:ln>
-                  <a:noFill/>
-                </a:ln>
-                <a:solidFill>
-                  <a:srgbClr val="080808"/>
-                </a:solidFill>
-                <a:effectLst/>
-                <a:latin typeface="JetBrains Mono"/>
-              </a:rPr>
-              <a:t>}</a:t>
-            </a:r>
-            <a:endParaRPr kumimoji="0" lang="en-VI" altLang="en-VI" sz="4800" b="0" i="0" u="none" strike="noStrike" cap="none" normalizeH="0" baseline="0" dirty="0">
-              <a:ln>
-                <a:noFill/>
-              </a:ln>
-              <a:solidFill>
-                <a:schemeClr val="tx1"/>
-              </a:solidFill>
-              <a:effectLst/>
-              <a:latin typeface="Arial" panose="020B0604020202020204" pitchFamily="34" charset="0"/>
-            </a:endParaRPr>
-          </a:p>
-        </p:txBody>
-      </p:sp>
-      <p:sp>
-        <p:nvSpPr>
-          <p:cNvPr id="7" name="Rectangle 6">
-            <a:extLst>
-              <a:ext uri="{FF2B5EF4-FFF2-40B4-BE49-F238E27FC236}">
-                <a16:creationId xmlns:a16="http://schemas.microsoft.com/office/drawing/2014/main" id="{0F31747B-010E-4FC5-855F-F09CE932119B}"/>
-              </a:ext>
-            </a:extLst>
-          </p:cNvPr>
-          <p:cNvSpPr>
-            <a:spLocks noChangeArrowheads="1"/>
-          </p:cNvSpPr>
-          <p:nvPr/>
-        </p:nvSpPr>
-        <p:spPr bwMode="auto">
-          <a:xfrm>
-            <a:off x="3272883" y="874455"/>
-            <a:ext cx="6303072" cy="2554545"/>
-          </a:xfrm>
-          <a:prstGeom prst="rect">
-            <a:avLst/>
-          </a:prstGeom>
-          <a:ln/>
-        </p:spPr>
-        <p:style>
-          <a:lnRef idx="2">
-            <a:schemeClr val="accent1"/>
-          </a:lnRef>
-          <a:fillRef idx="1">
-            <a:schemeClr val="lt1"/>
-          </a:fillRef>
-          <a:effectRef idx="0">
-            <a:schemeClr val="accent1"/>
-          </a:effectRef>
-          <a:fontRef idx="minor">
-            <a:schemeClr val="dk1"/>
-          </a:fontRef>
-        </p:style>
-        <p:txBody>
-          <a:bodyPr vert="horz" wrap="none" lIns="91440" tIns="45720" rIns="91440" bIns="45720" numCol="1" anchor="ctr" anchorCtr="0" compatLnSpc="1">
-            <a:prstTxWarp prst="textNoShape">
-              <a:avLst/>
-            </a:prstTxWarp>
-            <a:spAutoFit/>
-          </a:bodyPr>
-          <a:lstStyle/>
-          <a:p>
-            <a:pPr marL="0" marR="0" lvl="0" indent="0" algn="l" defTabSz="914400" rtl="0" eaLnBrk="0" fontAlgn="base" latinLnBrk="0" hangingPunct="0">
-              <a:lnSpc>
-                <a:spcPct val="100000"/>
-              </a:lnSpc>
-              <a:spcBef>
-                <a:spcPct val="0"/>
-              </a:spcBef>
-              <a:spcAft>
-                <a:spcPct val="0"/>
-              </a:spcAft>
-              <a:buClrTx/>
-              <a:buSzTx/>
-              <a:buFontTx/>
-              <a:buNone/>
-              <a:tabLst/>
-            </a:pPr>
-            <a:r>
-              <a:rPr kumimoji="0" lang="en-VI" altLang="en-VI" sz="2000" b="0" i="1" u="none" strike="noStrike" cap="none" normalizeH="0" baseline="0" dirty="0">
-                <a:ln>
-                  <a:noFill/>
-                </a:ln>
-                <a:solidFill>
-                  <a:srgbClr val="8C8C8C"/>
-                </a:solidFill>
-                <a:effectLst/>
-                <a:latin typeface="JetBrains Mono"/>
-              </a:rPr>
-              <a:t>//save all the products in the store to a file on the hard disk</a:t>
-            </a:r>
-            <a:br>
-              <a:rPr kumimoji="0" lang="en-VI" altLang="en-VI" sz="2000" b="0" i="1" u="none" strike="noStrike" cap="none" normalizeH="0" baseline="0" dirty="0">
-                <a:ln>
-                  <a:noFill/>
-                </a:ln>
-                <a:solidFill>
-                  <a:srgbClr val="8C8C8C"/>
-                </a:solidFill>
-                <a:effectLst/>
-                <a:latin typeface="JetBrains Mono"/>
-              </a:rPr>
-            </a:br>
-            <a:r>
-              <a:rPr kumimoji="0" lang="en-VI" altLang="en-VI" sz="2000" b="0" i="0" u="none" strike="noStrike" cap="none" normalizeH="0" baseline="0" dirty="0">
-                <a:ln>
-                  <a:noFill/>
-                </a:ln>
-                <a:solidFill>
-                  <a:srgbClr val="0033B3"/>
-                </a:solidFill>
-                <a:effectLst/>
-                <a:latin typeface="JetBrains Mono"/>
-              </a:rPr>
-              <a:t>private void </a:t>
-            </a:r>
-            <a:r>
-              <a:rPr kumimoji="0" lang="en-VI" altLang="en-VI" sz="2000" b="0" i="0" u="none" strike="noStrike" cap="none" normalizeH="0" baseline="0" dirty="0" err="1">
-                <a:ln>
-                  <a:noFill/>
-                </a:ln>
-                <a:solidFill>
-                  <a:srgbClr val="00627A"/>
-                </a:solidFill>
-                <a:effectLst/>
-                <a:latin typeface="JetBrains Mono"/>
-              </a:rPr>
-              <a:t>saveProducts</a:t>
-            </a:r>
-            <a:r>
-              <a:rPr kumimoji="0" lang="en-VI" altLang="en-VI" sz="2000" b="0" i="0" u="none" strike="noStrike" cap="none" normalizeH="0" baseline="0" dirty="0">
-                <a:ln>
-                  <a:noFill/>
-                </a:ln>
-                <a:solidFill>
-                  <a:srgbClr val="080808"/>
-                </a:solidFill>
-                <a:effectLst/>
-                <a:latin typeface="JetBrains Mono"/>
-              </a:rPr>
-              <a:t>() {</a:t>
-            </a:r>
-            <a:br>
-              <a:rPr kumimoji="0" lang="en-VI" altLang="en-VI" sz="2000" b="0" i="0" u="none" strike="noStrike" cap="none" normalizeH="0" baseline="0" dirty="0">
-                <a:ln>
-                  <a:noFill/>
-                </a:ln>
-                <a:solidFill>
-                  <a:srgbClr val="080808"/>
-                </a:solidFill>
-                <a:effectLst/>
-                <a:latin typeface="JetBrains Mono"/>
-              </a:rPr>
-            </a:br>
-            <a:r>
-              <a:rPr kumimoji="0" lang="en-VI" altLang="en-VI" sz="2000" b="0" i="0" u="none" strike="noStrike" cap="none" normalizeH="0" baseline="0" dirty="0">
-                <a:ln>
-                  <a:noFill/>
-                </a:ln>
-                <a:solidFill>
-                  <a:srgbClr val="080808"/>
-                </a:solidFill>
-                <a:effectLst/>
-                <a:latin typeface="JetBrains Mono"/>
-              </a:rPr>
-              <a:t>    </a:t>
-            </a:r>
-            <a:r>
-              <a:rPr kumimoji="0" lang="en-VI" altLang="en-VI" sz="2000" b="0" i="0" u="none" strike="noStrike" cap="none" normalizeH="0" baseline="0" dirty="0">
-                <a:ln>
-                  <a:noFill/>
-                </a:ln>
-                <a:solidFill>
-                  <a:srgbClr val="0033B3"/>
-                </a:solidFill>
-                <a:effectLst/>
-                <a:latin typeface="JetBrains Mono"/>
-              </a:rPr>
-              <a:t>try </a:t>
-            </a:r>
-            <a:r>
-              <a:rPr kumimoji="0" lang="en-VI" altLang="en-VI" sz="2000" b="0" i="0" u="none" strike="noStrike" cap="none" normalizeH="0" baseline="0" dirty="0">
-                <a:ln>
-                  <a:noFill/>
-                </a:ln>
-                <a:solidFill>
-                  <a:srgbClr val="080808"/>
-                </a:solidFill>
-                <a:effectLst/>
-                <a:latin typeface="JetBrains Mono"/>
-              </a:rPr>
-              <a:t>{</a:t>
-            </a:r>
-            <a:br>
-              <a:rPr kumimoji="0" lang="en-VI" altLang="en-VI" sz="2000" b="0" i="0" u="none" strike="noStrike" cap="none" normalizeH="0" baseline="0" dirty="0">
-                <a:ln>
-                  <a:noFill/>
-                </a:ln>
-                <a:solidFill>
-                  <a:srgbClr val="080808"/>
-                </a:solidFill>
-                <a:effectLst/>
-                <a:latin typeface="JetBrains Mono"/>
-              </a:rPr>
-            </a:br>
-            <a:r>
-              <a:rPr kumimoji="0" lang="en-VI" altLang="en-VI" sz="2000" b="0" i="0" u="none" strike="noStrike" cap="none" normalizeH="0" baseline="0" dirty="0">
-                <a:ln>
-                  <a:noFill/>
-                </a:ln>
-                <a:solidFill>
-                  <a:srgbClr val="080808"/>
-                </a:solidFill>
-                <a:effectLst/>
-                <a:latin typeface="JetBrains Mono"/>
-              </a:rPr>
-              <a:t>        </a:t>
-            </a:r>
-            <a:r>
-              <a:rPr kumimoji="0" lang="en-VI" altLang="en-VI" sz="2000" b="0" i="0" u="none" strike="noStrike" cap="none" normalizeH="0" baseline="0" dirty="0" err="1">
-                <a:ln>
-                  <a:noFill/>
-                </a:ln>
-                <a:solidFill>
-                  <a:srgbClr val="871094"/>
-                </a:solidFill>
-                <a:effectLst/>
-                <a:latin typeface="JetBrains Mono"/>
-              </a:rPr>
-              <a:t>store</a:t>
-            </a:r>
-            <a:r>
-              <a:rPr kumimoji="0" lang="en-VI" altLang="en-VI" sz="2000" b="0" i="0" u="none" strike="noStrike" cap="none" normalizeH="0" baseline="0" dirty="0" err="1">
-                <a:ln>
-                  <a:noFill/>
-                </a:ln>
-                <a:solidFill>
-                  <a:srgbClr val="080808"/>
-                </a:solidFill>
-                <a:effectLst/>
-                <a:latin typeface="JetBrains Mono"/>
-              </a:rPr>
-              <a:t>.save</a:t>
-            </a:r>
-            <a:r>
-              <a:rPr kumimoji="0" lang="en-VI" altLang="en-VI" sz="2000" b="0" i="0" u="none" strike="noStrike" cap="none" normalizeH="0" baseline="0" dirty="0">
-                <a:ln>
-                  <a:noFill/>
-                </a:ln>
-                <a:solidFill>
-                  <a:srgbClr val="080808"/>
-                </a:solidFill>
-                <a:effectLst/>
-                <a:latin typeface="JetBrains Mono"/>
-              </a:rPr>
-              <a:t>();</a:t>
-            </a:r>
-            <a:br>
-              <a:rPr kumimoji="0" lang="en-VI" altLang="en-VI" sz="2000" b="0" i="0" u="none" strike="noStrike" cap="none" normalizeH="0" baseline="0" dirty="0">
-                <a:ln>
-                  <a:noFill/>
-                </a:ln>
-                <a:solidFill>
-                  <a:srgbClr val="080808"/>
-                </a:solidFill>
-                <a:effectLst/>
-                <a:latin typeface="JetBrains Mono"/>
-              </a:rPr>
-            </a:br>
-            <a:r>
-              <a:rPr kumimoji="0" lang="en-VI" altLang="en-VI" sz="2000" b="0" i="0" u="none" strike="noStrike" cap="none" normalizeH="0" baseline="0" dirty="0">
-                <a:ln>
-                  <a:noFill/>
-                </a:ln>
-                <a:solidFill>
-                  <a:srgbClr val="080808"/>
-                </a:solidFill>
-                <a:effectLst/>
-                <a:latin typeface="JetBrains Mono"/>
-              </a:rPr>
-              <a:t>    } </a:t>
-            </a:r>
-            <a:r>
-              <a:rPr kumimoji="0" lang="en-VI" altLang="en-VI" sz="2000" b="0" i="0" u="none" strike="noStrike" cap="none" normalizeH="0" baseline="0" dirty="0">
-                <a:ln>
-                  <a:noFill/>
-                </a:ln>
-                <a:solidFill>
-                  <a:srgbClr val="0033B3"/>
-                </a:solidFill>
-                <a:effectLst/>
-                <a:latin typeface="JetBrains Mono"/>
-              </a:rPr>
-              <a:t>catch </a:t>
-            </a:r>
-            <a:r>
-              <a:rPr kumimoji="0" lang="en-VI" altLang="en-VI" sz="2000" b="0" i="0" u="none" strike="noStrike" cap="none" normalizeH="0" baseline="0" dirty="0">
-                <a:ln>
-                  <a:noFill/>
-                </a:ln>
-                <a:solidFill>
-                  <a:srgbClr val="080808"/>
-                </a:solidFill>
-                <a:effectLst/>
-                <a:latin typeface="JetBrains Mono"/>
-              </a:rPr>
-              <a:t>(</a:t>
-            </a:r>
-            <a:r>
-              <a:rPr kumimoji="0" lang="en-VI" altLang="en-VI" sz="2000" b="0" i="0" u="none" strike="noStrike" cap="none" normalizeH="0" baseline="0" dirty="0">
-                <a:ln>
-                  <a:noFill/>
-                </a:ln>
-                <a:solidFill>
-                  <a:srgbClr val="000000"/>
-                </a:solidFill>
-                <a:effectLst/>
-                <a:latin typeface="JetBrains Mono"/>
-              </a:rPr>
-              <a:t>Exception </a:t>
-            </a:r>
-            <a:r>
-              <a:rPr kumimoji="0" lang="en-VI" altLang="en-VI" sz="2000" b="0" i="0" u="none" strike="noStrike" cap="none" normalizeH="0" baseline="0" dirty="0">
-                <a:ln>
-                  <a:noFill/>
-                </a:ln>
-                <a:solidFill>
-                  <a:srgbClr val="080808"/>
-                </a:solidFill>
-                <a:effectLst/>
-                <a:latin typeface="JetBrains Mono"/>
-              </a:rPr>
-              <a:t>e) {</a:t>
-            </a:r>
-            <a:br>
-              <a:rPr kumimoji="0" lang="en-VI" altLang="en-VI" sz="2000" b="0" i="0" u="none" strike="noStrike" cap="none" normalizeH="0" baseline="0" dirty="0">
-                <a:ln>
-                  <a:noFill/>
-                </a:ln>
-                <a:solidFill>
-                  <a:srgbClr val="080808"/>
-                </a:solidFill>
-                <a:effectLst/>
-                <a:latin typeface="JetBrains Mono"/>
-              </a:rPr>
-            </a:br>
-            <a:r>
-              <a:rPr kumimoji="0" lang="en-VI" altLang="en-VI" sz="2000" b="0" i="0" u="none" strike="noStrike" cap="none" normalizeH="0" baseline="0" dirty="0">
-                <a:ln>
-                  <a:noFill/>
-                </a:ln>
-                <a:solidFill>
-                  <a:srgbClr val="080808"/>
-                </a:solidFill>
-                <a:effectLst/>
-                <a:latin typeface="JetBrains Mono"/>
-              </a:rPr>
-              <a:t>        </a:t>
-            </a:r>
-            <a:r>
-              <a:rPr kumimoji="0" lang="en-VI" altLang="en-VI" sz="2000" b="0" i="0" u="none" strike="noStrike" cap="none" normalizeH="0" baseline="0" dirty="0" err="1">
-                <a:ln>
-                  <a:noFill/>
-                </a:ln>
-                <a:solidFill>
-                  <a:srgbClr val="000000"/>
-                </a:solidFill>
-                <a:effectLst/>
-                <a:latin typeface="JetBrains Mono"/>
-              </a:rPr>
-              <a:t>System</a:t>
-            </a:r>
-            <a:r>
-              <a:rPr kumimoji="0" lang="en-VI" altLang="en-VI" sz="2000" b="0" i="0" u="none" strike="noStrike" cap="none" normalizeH="0" baseline="0" dirty="0" err="1">
-                <a:ln>
-                  <a:noFill/>
-                </a:ln>
-                <a:solidFill>
-                  <a:srgbClr val="080808"/>
-                </a:solidFill>
-                <a:effectLst/>
-                <a:latin typeface="JetBrains Mono"/>
-              </a:rPr>
-              <a:t>.</a:t>
-            </a:r>
-            <a:r>
-              <a:rPr kumimoji="0" lang="en-VI" altLang="en-VI" sz="2000" b="0" i="1" u="none" strike="noStrike" cap="none" normalizeH="0" baseline="0" dirty="0" err="1">
-                <a:ln>
-                  <a:noFill/>
-                </a:ln>
-                <a:solidFill>
-                  <a:srgbClr val="871094"/>
-                </a:solidFill>
-                <a:effectLst/>
-                <a:latin typeface="JetBrains Mono"/>
-              </a:rPr>
-              <a:t>err</a:t>
-            </a:r>
-            <a:r>
-              <a:rPr kumimoji="0" lang="en-VI" altLang="en-VI" sz="2000" b="0" i="0" u="none" strike="noStrike" cap="none" normalizeH="0" baseline="0" dirty="0" err="1">
-                <a:ln>
-                  <a:noFill/>
-                </a:ln>
-                <a:solidFill>
-                  <a:srgbClr val="080808"/>
-                </a:solidFill>
-                <a:effectLst/>
-                <a:latin typeface="JetBrains Mono"/>
-              </a:rPr>
-              <a:t>.println</a:t>
-            </a:r>
-            <a:r>
-              <a:rPr kumimoji="0" lang="en-VI" altLang="en-VI" sz="2000" b="0" i="0" u="none" strike="noStrike" cap="none" normalizeH="0" baseline="0" dirty="0">
-                <a:ln>
-                  <a:noFill/>
-                </a:ln>
-                <a:solidFill>
-                  <a:srgbClr val="080808"/>
-                </a:solidFill>
-                <a:effectLst/>
-                <a:latin typeface="JetBrains Mono"/>
-              </a:rPr>
-              <a:t>(</a:t>
-            </a:r>
-            <a:r>
-              <a:rPr kumimoji="0" lang="en-VI" altLang="en-VI" sz="2000" b="0" i="0" u="none" strike="noStrike" cap="none" normalizeH="0" baseline="0" dirty="0">
-                <a:ln>
-                  <a:noFill/>
-                </a:ln>
-                <a:solidFill>
-                  <a:srgbClr val="067D17"/>
-                </a:solidFill>
-                <a:effectLst/>
-                <a:latin typeface="JetBrains Mono"/>
-              </a:rPr>
-              <a:t>"Error writing to file: " </a:t>
-            </a:r>
-            <a:r>
-              <a:rPr kumimoji="0" lang="en-VI" altLang="en-VI" sz="2000" b="0" i="0" u="none" strike="noStrike" cap="none" normalizeH="0" baseline="0" dirty="0">
-                <a:ln>
-                  <a:noFill/>
-                </a:ln>
-                <a:solidFill>
-                  <a:srgbClr val="080808"/>
-                </a:solidFill>
-                <a:effectLst/>
-                <a:latin typeface="JetBrains Mono"/>
-              </a:rPr>
-              <a:t>+ e);</a:t>
-            </a:r>
-            <a:br>
-              <a:rPr kumimoji="0" lang="en-VI" altLang="en-VI" sz="2000" b="0" i="0" u="none" strike="noStrike" cap="none" normalizeH="0" baseline="0" dirty="0">
-                <a:ln>
-                  <a:noFill/>
-                </a:ln>
-                <a:solidFill>
-                  <a:srgbClr val="080808"/>
-                </a:solidFill>
-                <a:effectLst/>
-                <a:latin typeface="JetBrains Mono"/>
-              </a:rPr>
-            </a:br>
-            <a:r>
-              <a:rPr kumimoji="0" lang="en-VI" altLang="en-VI" sz="2000" b="0" i="0" u="none" strike="noStrike" cap="none" normalizeH="0" baseline="0" dirty="0">
-                <a:ln>
-                  <a:noFill/>
-                </a:ln>
-                <a:solidFill>
-                  <a:srgbClr val="080808"/>
-                </a:solidFill>
-                <a:effectLst/>
-                <a:latin typeface="JetBrains Mono"/>
-              </a:rPr>
-              <a:t>    }</a:t>
-            </a:r>
-            <a:br>
-              <a:rPr kumimoji="0" lang="en-VI" altLang="en-VI" sz="2000" b="0" i="0" u="none" strike="noStrike" cap="none" normalizeH="0" baseline="0" dirty="0">
-                <a:ln>
-                  <a:noFill/>
-                </a:ln>
-                <a:solidFill>
-                  <a:srgbClr val="080808"/>
-                </a:solidFill>
-                <a:effectLst/>
-                <a:latin typeface="JetBrains Mono"/>
-              </a:rPr>
-            </a:br>
-            <a:r>
-              <a:rPr kumimoji="0" lang="en-VI" altLang="en-VI" sz="2000" b="0" i="0" u="none" strike="noStrike" cap="none" normalizeH="0" baseline="0" dirty="0">
-                <a:ln>
-                  <a:noFill/>
-                </a:ln>
-                <a:solidFill>
-                  <a:srgbClr val="080808"/>
-                </a:solidFill>
-                <a:effectLst/>
-                <a:latin typeface="JetBrains Mono"/>
-              </a:rPr>
-              <a:t>}</a:t>
-            </a:r>
-            <a:endParaRPr kumimoji="0" lang="en-VI" altLang="en-VI" sz="4800" b="0" i="0" u="none" strike="noStrike" cap="none" normalizeH="0" baseline="0" dirty="0">
-              <a:ln>
-                <a:noFill/>
-              </a:ln>
-              <a:solidFill>
-                <a:schemeClr val="tx1"/>
-              </a:solidFill>
-              <a:effectLst/>
-              <a:latin typeface="Arial" panose="020B0604020202020204" pitchFamily="34" charset="0"/>
-            </a:endParaRPr>
-          </a:p>
-        </p:txBody>
-      </p:sp>
-      <p:sp>
-        <p:nvSpPr>
-          <p:cNvPr id="8" name="Rectangle: Rounded Corners 7">
-            <a:extLst>
-              <a:ext uri="{FF2B5EF4-FFF2-40B4-BE49-F238E27FC236}">
-                <a16:creationId xmlns:a16="http://schemas.microsoft.com/office/drawing/2014/main" id="{31FB60E5-414E-4854-A5CB-E09F8B75FD3D}"/>
-              </a:ext>
-            </a:extLst>
-          </p:cNvPr>
-          <p:cNvSpPr/>
-          <p:nvPr/>
-        </p:nvSpPr>
-        <p:spPr>
-          <a:xfrm>
-            <a:off x="357024" y="154228"/>
-            <a:ext cx="1828800" cy="228600"/>
-          </a:xfrm>
-          <a:prstGeom prst="roundRect">
-            <a:avLst/>
-          </a:prstGeom>
-          <a:noFill/>
-          <a:ln>
-            <a:solidFill>
-              <a:srgbClr val="C00000"/>
-            </a:solidFill>
-          </a:ln>
-        </p:spPr>
-        <p:style>
-          <a:lnRef idx="2">
-            <a:schemeClr val="accent1">
-              <a:shade val="50000"/>
-            </a:schemeClr>
-          </a:lnRef>
-          <a:fillRef idx="1">
-            <a:schemeClr val="accent1"/>
-          </a:fillRef>
-          <a:effectRef idx="0">
-            <a:schemeClr val="accent1"/>
-          </a:effectRef>
-          <a:fontRef idx="minor">
-            <a:schemeClr val="lt1"/>
-          </a:fontRef>
-        </p:style>
-        <p:txBody>
-          <a:bodyPr rtlCol="0" anchor="ctr"/>
-          <a:lstStyle/>
-          <a:p>
-            <a:pPr algn="ctr"/>
-            <a:endParaRPr lang="en-VI"/>
-          </a:p>
-        </p:txBody>
-      </p:sp>
-    </p:spTree>
-    <p:extLst>
-      <p:ext uri="{BB962C8B-B14F-4D97-AF65-F5344CB8AC3E}">
-        <p14:creationId xmlns:p14="http://schemas.microsoft.com/office/powerpoint/2010/main" val="192138280"/>
-      </p:ext>
-    </p:extLst>
-  </p:cSld>
-  <p:clrMapOvr>
-    <a:masterClrMapping/>
-  </p:clrMapOvr>
-</p:sld>
-</file>
-
-<file path=ppt/slides/slide32.xml><?xml version="1.0" encoding="utf-8"?>
-<p:sld xmlns:a="http://schemas.openxmlformats.org/drawingml/2006/main" xmlns:r="http://schemas.openxmlformats.org/officeDocument/2006/relationships" xmlns:p="http://schemas.openxmlformats.org/presentationml/2006/main">
-  <p:cSld>
-    <p:spTree>
-      <p:nvGrpSpPr>
-        <p:cNvPr id="1" name=""/>
-        <p:cNvGrpSpPr/>
-        <p:nvPr/>
-      </p:nvGrpSpPr>
-      <p:grpSpPr>
-        <a:xfrm>
-          <a:off x="0" y="0"/>
-          <a:ext cx="0" cy="0"/>
-          <a:chOff x="0" y="0"/>
-          <a:chExt cx="0" cy="0"/>
-        </a:xfrm>
-      </p:grpSpPr>
-      <p:sp>
-        <p:nvSpPr>
-          <p:cNvPr id="2" name="Title 1"/>
-          <p:cNvSpPr>
-            <a:spLocks noGrp="1"/>
-          </p:cNvSpPr>
-          <p:nvPr>
-            <p:ph type="title"/>
-          </p:nvPr>
-        </p:nvSpPr>
-        <p:spPr/>
-        <p:txBody>
-          <a:bodyPr/>
-          <a:lstStyle/>
-          <a:p>
-            <a:r>
-              <a:rPr lang="en-GB" dirty="0"/>
-              <a:t>Summary</a:t>
-            </a:r>
-          </a:p>
-        </p:txBody>
-      </p:sp>
-      <p:sp>
-        <p:nvSpPr>
-          <p:cNvPr id="3" name="Content Placeholder 2"/>
-          <p:cNvSpPr>
-            <a:spLocks noGrp="1"/>
-          </p:cNvSpPr>
-          <p:nvPr>
-            <p:ph idx="1"/>
-          </p:nvPr>
-        </p:nvSpPr>
-        <p:spPr>
-          <a:xfrm>
-            <a:off x="609600" y="1600200"/>
-            <a:ext cx="9601200" cy="5029200"/>
-          </a:xfrm>
-        </p:spPr>
-        <p:txBody>
-          <a:bodyPr>
-            <a:normAutofit/>
-          </a:bodyPr>
-          <a:lstStyle/>
-          <a:p>
-            <a:r>
-              <a:rPr lang="en-GB" dirty="0"/>
-              <a:t>Crash v Exceptions</a:t>
-            </a:r>
-          </a:p>
-          <a:p>
-            <a:r>
-              <a:rPr lang="en-GB" dirty="0"/>
-              <a:t>Detect and Handle</a:t>
-            </a:r>
-          </a:p>
-          <a:p>
-            <a:pPr lvl="1"/>
-            <a:r>
-              <a:rPr lang="en-GB" dirty="0"/>
-              <a:t>Enables program to continue</a:t>
-            </a:r>
-          </a:p>
-          <a:p>
-            <a:r>
-              <a:rPr lang="en-GB" dirty="0"/>
-              <a:t>Java’s predefined Exception objects</a:t>
-            </a:r>
-          </a:p>
-          <a:p>
-            <a:r>
-              <a:rPr lang="en-GB" dirty="0"/>
-              <a:t>try / catch block</a:t>
-            </a:r>
-          </a:p>
-          <a:p>
-            <a:r>
-              <a:rPr lang="en-GB" dirty="0"/>
-              <a:t>Introduction to </a:t>
-            </a:r>
-          </a:p>
-          <a:p>
-            <a:pPr lvl="1"/>
-            <a:r>
-              <a:rPr lang="en-GB" dirty="0"/>
-              <a:t>do while loop</a:t>
-            </a:r>
-          </a:p>
-          <a:p>
-            <a:pPr lvl="2"/>
-            <a:r>
-              <a:rPr lang="en-GB" dirty="0"/>
-              <a:t>Always runs once</a:t>
-            </a:r>
-          </a:p>
-          <a:p>
-            <a:pPr lvl="2"/>
-            <a:r>
-              <a:rPr lang="en-GB" dirty="0"/>
-              <a:t>Condition is test at the end</a:t>
-            </a:r>
-          </a:p>
-          <a:p>
-            <a:endParaRPr lang="en-GB" dirty="0"/>
-          </a:p>
-        </p:txBody>
-      </p:sp>
-    </p:spTree>
-    <p:extLst>
-      <p:ext uri="{BB962C8B-B14F-4D97-AF65-F5344CB8AC3E}">
-        <p14:creationId xmlns:p14="http://schemas.microsoft.com/office/powerpoint/2010/main" val="1047752017"/>
-      </p:ext>
-    </p:extLst>
-  </p:cSld>
-  <p:clrMapOvr>
-    <a:masterClrMapping/>
-  </p:clrMapOvr>
-</p:sld>
-</file>
-
-<file path=ppt/slides/slide33.xml><?xml version="1.0" encoding="utf-8"?>
-<p:sld xmlns:a="http://schemas.openxmlformats.org/drawingml/2006/main" xmlns:r="http://schemas.openxmlformats.org/officeDocument/2006/relationships" xmlns:p="http://schemas.openxmlformats.org/presentationml/2006/main">
-  <p:cSld>
-    <p:spTree>
-      <p:nvGrpSpPr>
-        <p:cNvPr id="1" name=""/>
-        <p:cNvGrpSpPr/>
-        <p:nvPr/>
-      </p:nvGrpSpPr>
-      <p:grpSpPr>
-        <a:xfrm>
-          <a:off x="0" y="0"/>
-          <a:ext cx="0" cy="0"/>
-          <a:chOff x="0" y="0"/>
-          <a:chExt cx="0" cy="0"/>
-        </a:xfrm>
-      </p:grpSpPr>
-      <p:pic>
-        <p:nvPicPr>
-          <p:cNvPr id="8194" name="Picture 2" descr="C:\Users\Siobhan\AppData\Local\Microsoft\Windows\Temporary Internet Files\Content.IE5\D6SFLNVW\questions-2[1].jpg"/>
-          <p:cNvPicPr>
-            <a:picLocks noChangeAspect="1" noChangeArrowheads="1"/>
-          </p:cNvPicPr>
-          <p:nvPr/>
-        </p:nvPicPr>
-        <p:blipFill>
-          <a:blip r:embed="rId2">
-            <a:extLst>
-              <a:ext uri="{28A0092B-C50C-407E-A947-70E740481C1C}">
-                <a14:useLocalDpi xmlns:a14="http://schemas.microsoft.com/office/drawing/2010/main" val="0"/>
-              </a:ext>
-            </a:extLst>
-          </a:blip>
-          <a:srcRect/>
-          <a:stretch>
-            <a:fillRect/>
-          </a:stretch>
-        </p:blipFill>
-        <p:spPr bwMode="auto">
-          <a:xfrm>
-            <a:off x="5740400" y="1752600"/>
-            <a:ext cx="4394200" cy="4394200"/>
-          </a:xfrm>
-          <a:prstGeom prst="rect">
-            <a:avLst/>
-          </a:prstGeom>
-          <a:noFill/>
-          <a:extLst>
-            <a:ext uri="{909E8E84-426E-40DD-AFC4-6F175D3DCCD1}">
-              <a14:hiddenFill xmlns:a14="http://schemas.microsoft.com/office/drawing/2010/main">
-                <a:solidFill>
-                  <a:srgbClr val="FFFFFF"/>
-                </a:solidFill>
-              </a14:hiddenFill>
-            </a:ext>
-          </a:extLst>
-        </p:spPr>
-      </p:pic>
-      <p:sp>
-        <p:nvSpPr>
-          <p:cNvPr id="2" name="Rectangle 1"/>
-          <p:cNvSpPr/>
-          <p:nvPr/>
-        </p:nvSpPr>
-        <p:spPr>
-          <a:xfrm>
-            <a:off x="2762598" y="3122474"/>
-            <a:ext cx="3485803" cy="1754326"/>
-          </a:xfrm>
-          <a:prstGeom prst="rect">
-            <a:avLst/>
-          </a:prstGeom>
-          <a:noFill/>
-        </p:spPr>
-        <p:txBody>
-          <a:bodyPr wrap="square" lIns="91440" tIns="45720" rIns="91440" bIns="45720">
-            <a:spAutoFit/>
-            <a:scene3d>
-              <a:camera prst="orthographicFront"/>
-              <a:lightRig rig="flat" dir="tl">
-                <a:rot lat="0" lon="0" rev="6600000"/>
-              </a:lightRig>
-            </a:scene3d>
-            <a:sp3d extrusionH="25400" contourW="8890">
-              <a:bevelT w="38100" h="31750"/>
-              <a:contourClr>
-                <a:schemeClr val="accent2">
-                  <a:shade val="75000"/>
-                </a:schemeClr>
-              </a:contourClr>
-            </a:sp3d>
-          </a:bodyPr>
-          <a:lstStyle/>
-          <a:p>
-            <a:pPr algn="ctr"/>
-            <a:r>
-              <a:rPr lang="en-US" sz="5400" b="1" dirty="0">
-                <a:ln w="11430"/>
-                <a:gradFill>
-                  <a:gsLst>
-                    <a:gs pos="0">
-                      <a:schemeClr val="accent2">
-                        <a:tint val="70000"/>
-                        <a:satMod val="245000"/>
-                      </a:schemeClr>
-                    </a:gs>
-                    <a:gs pos="75000">
-                      <a:schemeClr val="accent2">
-                        <a:tint val="90000"/>
-                        <a:shade val="60000"/>
-                        <a:satMod val="240000"/>
-                      </a:schemeClr>
-                    </a:gs>
-                    <a:gs pos="100000">
-                      <a:schemeClr val="accent2">
-                        <a:tint val="100000"/>
-                        <a:shade val="50000"/>
-                        <a:satMod val="240000"/>
-                      </a:schemeClr>
-                    </a:gs>
-                  </a:gsLst>
-                  <a:lin ang="5400000"/>
-                </a:gradFill>
-                <a:effectLst>
-                  <a:outerShdw blurRad="50800" dist="39000" dir="5460000" algn="tl">
-                    <a:srgbClr val="000000">
-                      <a:alpha val="38000"/>
-                    </a:srgbClr>
-                  </a:outerShdw>
-                </a:effectLst>
-              </a:rPr>
-              <a:t>Any Questions?</a:t>
-            </a:r>
-          </a:p>
-        </p:txBody>
-      </p:sp>
-    </p:spTree>
-    <p:extLst>
-      <p:ext uri="{BB962C8B-B14F-4D97-AF65-F5344CB8AC3E}">
-        <p14:creationId xmlns:p14="http://schemas.microsoft.com/office/powerpoint/2010/main" val="1150381320"/>
       </p:ext>
     </p:extLst>
   </p:cSld>
